--- a/theory_04-fundamentals_of_computer_networks/theory_04-fundamentals_of_computer_networks.pptx
+++ b/theory_04-fundamentals_of_computer_networks/theory_04-fundamentals_of_computer_networks.pptx
@@ -226,7 +226,7 @@
           <a:p>
             <a:fld id="{B6FBD0CA-8F9C-4380-8AFD-600A0D90DFDA}" type="datetimeFigureOut">
               <a:rPr lang="en-GB" smtClean="0"/>
-              <a:t>11/03/2024</a:t>
+              <a:t>10/03/2025</a:t>
             </a:fld>
             <a:endParaRPr lang="en-GB"/>
           </a:p>
@@ -1612,7 +1612,9 @@
           <a:lstStyle>
             <a:lvl1pPr marL="0" indent="0" algn="ctr">
               <a:buNone/>
-              <a:defRPr sz="4800" b="1"/>
+              <a:defRPr sz="4800" b="1">
+                <a:latin typeface="Aptos" panose="020B0004020202020204" pitchFamily="34" charset="0"/>
+              </a:defRPr>
             </a:lvl1pPr>
             <a:lvl2pPr marL="457200" indent="0" algn="ctr">
               <a:buNone/>
@@ -1698,7 +1700,9 @@
           <a:lstStyle/>
           <a:p>
             <a:pPr algn="ctr"/>
-            <a:endParaRPr lang="en-GB" dirty="0"/>
+            <a:endParaRPr lang="en-GB" dirty="0">
+              <a:latin typeface="Aptos" panose="020B0004020202020204" pitchFamily="34" charset="0"/>
+            </a:endParaRPr>
           </a:p>
         </p:txBody>
       </p:sp>
@@ -1748,7 +1752,9 @@
           <a:lstStyle/>
           <a:p>
             <a:pPr algn="ctr"/>
-            <a:endParaRPr lang="en-GB" dirty="0"/>
+            <a:endParaRPr lang="en-GB" dirty="0">
+              <a:latin typeface="Aptos" panose="020B0004020202020204" pitchFamily="34" charset="0"/>
+            </a:endParaRPr>
           </a:p>
         </p:txBody>
       </p:sp>
@@ -1794,36 +1800,52 @@
           </a:lstStyle>
           <a:p>
             <a:r>
-              <a:rPr lang="it-IT" sz="2800" b="0" dirty="0" err="1"/>
+              <a:rPr lang="it-IT" sz="2800" b="0" dirty="0" err="1">
+                <a:latin typeface="Aptos" panose="020B0004020202020204" pitchFamily="34" charset="0"/>
+              </a:rPr>
               <a:t>Biomedical</a:t>
             </a:r>
             <a:r>
-              <a:rPr lang="it-IT" sz="2800" b="0" dirty="0"/>
+              <a:rPr lang="it-IT" sz="2800" b="0" dirty="0">
+                <a:latin typeface="Aptos" panose="020B0004020202020204" pitchFamily="34" charset="0"/>
+              </a:rPr>
               <a:t> </a:t>
             </a:r>
             <a:r>
-              <a:rPr lang="it-IT" sz="2800" b="0" dirty="0" err="1"/>
+              <a:rPr lang="it-IT" sz="2800" b="0" dirty="0" err="1">
+                <a:latin typeface="Aptos" panose="020B0004020202020204" pitchFamily="34" charset="0"/>
+              </a:rPr>
               <a:t>Wearable</a:t>
             </a:r>
             <a:r>
-              <a:rPr lang="it-IT" sz="2800" b="0" dirty="0"/>
+              <a:rPr lang="it-IT" sz="2800" b="0" dirty="0">
+                <a:latin typeface="Aptos" panose="020B0004020202020204" pitchFamily="34" charset="0"/>
+              </a:rPr>
               <a:t> Technologies </a:t>
             </a:r>
           </a:p>
           <a:p>
             <a:r>
-              <a:rPr lang="it-IT" sz="2800" b="0" dirty="0"/>
+              <a:rPr lang="it-IT" sz="2800" b="0" dirty="0">
+                <a:latin typeface="Aptos" panose="020B0004020202020204" pitchFamily="34" charset="0"/>
+              </a:rPr>
               <a:t>for Healthcare and </a:t>
             </a:r>
             <a:r>
-              <a:rPr lang="it-IT" sz="2800" b="0" dirty="0" err="1"/>
+              <a:rPr lang="it-IT" sz="2800" b="0" dirty="0" err="1">
+                <a:latin typeface="Aptos" panose="020B0004020202020204" pitchFamily="34" charset="0"/>
+              </a:rPr>
               <a:t>Wellbeing</a:t>
             </a:r>
             <a:r>
-              <a:rPr lang="it-IT" sz="2800" b="0" dirty="0"/>
+              <a:rPr lang="it-IT" sz="2800" b="0" dirty="0">
+                <a:latin typeface="Aptos" panose="020B0004020202020204" pitchFamily="34" charset="0"/>
+              </a:rPr>
               <a:t>  </a:t>
             </a:r>
-            <a:endParaRPr lang="en-GB" sz="2800" b="0" dirty="0"/>
+            <a:endParaRPr lang="en-GB" sz="2800" b="0" dirty="0">
+              <a:latin typeface="Aptos" panose="020B0004020202020204" pitchFamily="34" charset="0"/>
+            </a:endParaRPr>
           </a:p>
         </p:txBody>
       </p:sp>
@@ -1874,8 +1896,10 @@
               </a:spcAft>
             </a:pPr>
             <a:r>
-              <a:rPr lang="it-IT" sz="2800" dirty="0"/>
-              <a:t>A.Y. 2023-2024</a:t>
+              <a:rPr lang="it-IT" sz="2800" dirty="0">
+                <a:latin typeface="Aptos" panose="020B0004020202020204" pitchFamily="34" charset="0"/>
+              </a:rPr>
+              <a:t>A.Y. 2024-2025</a:t>
             </a:r>
           </a:p>
           <a:p>
@@ -1885,7 +1909,9 @@
               </a:spcAft>
             </a:pPr>
             <a:r>
-              <a:rPr lang="it-IT" sz="2800" baseline="0" dirty="0"/>
+              <a:rPr lang="it-IT" sz="2800" baseline="0" dirty="0">
+                <a:latin typeface="Aptos" panose="020B0004020202020204" pitchFamily="34" charset="0"/>
+              </a:rPr>
               <a:t>Giacomo Cappon</a:t>
             </a:r>
           </a:p>
@@ -1925,7 +1951,7 @@
                 <a:effectLst/>
                 <a:uLnTx/>
                 <a:uFillTx/>
-                <a:latin typeface="Palatino Linotype" panose="02040502050505030304" pitchFamily="18" charset="0"/>
+                <a:latin typeface="Aptos" panose="020B0004020202020204" pitchFamily="34" charset="0"/>
                 <a:ea typeface="+mj-ea"/>
                 <a:cs typeface="+mj-cs"/>
               </a:rPr>
@@ -1942,7 +1968,7 @@
                 <a:effectLst/>
                 <a:uLnTx/>
                 <a:uFillTx/>
-                <a:latin typeface="Palatino Linotype" panose="02040502050505030304" pitchFamily="18" charset="0"/>
+                <a:latin typeface="Aptos" panose="020B0004020202020204" pitchFamily="34" charset="0"/>
                 <a:ea typeface="+mj-ea"/>
                 <a:cs typeface="+mj-cs"/>
               </a:rPr>
@@ -1959,7 +1985,7 @@
                 <a:effectLst/>
                 <a:uLnTx/>
                 <a:uFillTx/>
-                <a:latin typeface="Palatino Linotype" panose="02040502050505030304" pitchFamily="18" charset="0"/>
+                <a:latin typeface="Aptos" panose="020B0004020202020204" pitchFamily="34" charset="0"/>
                 <a:ea typeface="+mj-ea"/>
                 <a:cs typeface="+mj-cs"/>
               </a:rPr>
@@ -1975,7 +2001,7 @@
                 <a:effectLst/>
                 <a:uLnTx/>
                 <a:uFillTx/>
-                <a:latin typeface="Palatino Linotype" panose="02040502050505030304" pitchFamily="18" charset="0"/>
+                <a:latin typeface="Aptos" panose="020B0004020202020204" pitchFamily="34" charset="0"/>
                 <a:ea typeface="+mj-ea"/>
                 <a:cs typeface="+mj-cs"/>
               </a:rPr>
@@ -1992,7 +2018,7 @@
                 <a:effectLst/>
                 <a:uLnTx/>
                 <a:uFillTx/>
-                <a:latin typeface="Palatino Linotype" panose="02040502050505030304" pitchFamily="18" charset="0"/>
+                <a:latin typeface="Aptos" panose="020B0004020202020204" pitchFamily="34" charset="0"/>
                 <a:ea typeface="+mj-ea"/>
                 <a:cs typeface="+mj-cs"/>
               </a:rPr>
@@ -2009,13 +2035,15 @@
                 <a:effectLst/>
                 <a:uLnTx/>
                 <a:uFillTx/>
-                <a:latin typeface="Palatino Linotype" panose="02040502050505030304" pitchFamily="18" charset="0"/>
+                <a:latin typeface="Aptos" panose="020B0004020202020204" pitchFamily="34" charset="0"/>
                 <a:ea typeface="+mj-ea"/>
                 <a:cs typeface="+mj-cs"/>
               </a:rPr>
               <a:t>Engineering</a:t>
             </a:r>
-            <a:endParaRPr lang="en-GB" sz="1100" cap="small" baseline="0" dirty="0"/>
+            <a:endParaRPr lang="en-GB" sz="1100" cap="small" baseline="0" dirty="0">
+              <a:latin typeface="Aptos" panose="020B0004020202020204" pitchFamily="34" charset="0"/>
+            </a:endParaRPr>
           </a:p>
         </p:txBody>
       </p:sp>
@@ -2923,32 +2951,42 @@
           <a:lstStyle/>
           <a:p>
             <a:r>
-              <a:rPr lang="en-GB" b="1" dirty="0"/>
+              <a:rPr lang="en-GB" b="1" dirty="0">
+                <a:latin typeface="Aptos" panose="020B0004020202020204" pitchFamily="34" charset="0"/>
+              </a:rPr>
               <a:t>Service: </a:t>
             </a:r>
             <a:r>
-              <a:rPr lang="en-GB" dirty="0"/>
+              <a:rPr lang="en-GB" dirty="0">
+                <a:latin typeface="Aptos" panose="020B0004020202020204" pitchFamily="34" charset="0"/>
+              </a:rPr>
               <a:t>a set of primitives (operations) that a layer provides to the layer above.</a:t>
             </a:r>
           </a:p>
           <a:p>
             <a:pPr lvl="1"/>
             <a:r>
-              <a:rPr lang="en-GB" dirty="0"/>
+              <a:rPr lang="en-GB" dirty="0">
+                <a:latin typeface="Aptos" panose="020B0004020202020204" pitchFamily="34" charset="0"/>
+              </a:rPr>
               <a:t>What operations the layer is prepared to perform on behalf of its users</a:t>
             </a:r>
           </a:p>
           <a:p>
             <a:pPr lvl="1"/>
             <a:r>
-              <a:rPr lang="en-GB" dirty="0"/>
+              <a:rPr lang="en-GB" dirty="0">
+                <a:latin typeface="Aptos" panose="020B0004020202020204" pitchFamily="34" charset="0"/>
+              </a:rPr>
               <a:t>No information about how these operations are implemented. </a:t>
             </a:r>
           </a:p>
           <a:p>
             <a:pPr lvl="1"/>
             <a:r>
-              <a:rPr lang="en-GB" dirty="0"/>
+              <a:rPr lang="en-GB" dirty="0">
+                <a:latin typeface="Aptos" panose="020B0004020202020204" pitchFamily="34" charset="0"/>
+              </a:rPr>
               <a:t>It relates to an interface between two layers, with the lower layer being the service provider and the upper layer being the service user.</a:t>
             </a:r>
           </a:p>
@@ -2970,10 +3008,14 @@
           <a:lstStyle/>
           <a:p>
             <a:fld id="{31DE2C5B-556E-47B8-A792-024C2FCA4ACC}" type="slidenum">
-              <a:rPr lang="en-GB" smtClean="0"/>
+              <a:rPr lang="en-GB" smtClean="0">
+                <a:latin typeface="Aptos" panose="020B0004020202020204" pitchFamily="34" charset="0"/>
+              </a:rPr>
               <a:t>10</a:t>
             </a:fld>
-            <a:endParaRPr lang="en-GB"/>
+            <a:endParaRPr lang="en-GB">
+              <a:latin typeface="Aptos" panose="020B0004020202020204" pitchFamily="34" charset="0"/>
+            </a:endParaRPr>
           </a:p>
         </p:txBody>
       </p:sp>
@@ -2986,7 +3028,7 @@
           <p:nvPr>
             <p:extLst>
               <p:ext uri="{D42A27DB-BD31-4B8C-83A1-F6EECF244321}">
-                <p14:modId xmlns:p14="http://schemas.microsoft.com/office/powerpoint/2010/main" val="3727956536"/>
+                <p14:modId xmlns:p14="http://schemas.microsoft.com/office/powerpoint/2010/main" val="2391186040"/>
               </p:ext>
             </p:extLst>
           </p:nvPr>
@@ -3026,12 +3068,12 @@
                       <a:pPr algn="ctr"/>
                       <a:r>
                         <a:rPr lang="it-IT" sz="2000" dirty="0">
-                          <a:latin typeface="Palatino Linotype" panose="02040502050505030304" pitchFamily="18" charset="0"/>
+                          <a:latin typeface="Aptos" panose="020B0004020202020204" pitchFamily="34" charset="0"/>
                         </a:rPr>
                         <a:t>Primitive</a:t>
                       </a:r>
                       <a:endParaRPr lang="en-GB" sz="2000" dirty="0">
-                        <a:latin typeface="Palatino Linotype" panose="02040502050505030304" pitchFamily="18" charset="0"/>
+                        <a:latin typeface="Aptos" panose="020B0004020202020204" pitchFamily="34" charset="0"/>
                       </a:endParaRPr>
                     </a:p>
                   </a:txBody>
@@ -3045,12 +3087,12 @@
                       <a:pPr algn="ctr"/>
                       <a:r>
                         <a:rPr lang="it-IT" sz="2000" dirty="0" err="1">
-                          <a:latin typeface="Palatino Linotype" panose="02040502050505030304" pitchFamily="18" charset="0"/>
+                          <a:latin typeface="Aptos" panose="020B0004020202020204" pitchFamily="34" charset="0"/>
                         </a:rPr>
                         <a:t>Meaning</a:t>
                       </a:r>
                       <a:endParaRPr lang="en-GB" sz="2000" dirty="0">
-                        <a:latin typeface="Palatino Linotype" panose="02040502050505030304" pitchFamily="18" charset="0"/>
+                        <a:latin typeface="Aptos" panose="020B0004020202020204" pitchFamily="34" charset="0"/>
                       </a:endParaRPr>
                     </a:p>
                   </a:txBody>
@@ -3070,12 +3112,12 @@
                     <a:p>
                       <a:r>
                         <a:rPr lang="it-IT" sz="2000" dirty="0">
-                          <a:latin typeface="Palatino Linotype" panose="02040502050505030304" pitchFamily="18" charset="0"/>
+                          <a:latin typeface="Aptos" panose="020B0004020202020204" pitchFamily="34" charset="0"/>
                         </a:rPr>
                         <a:t>LISTEN</a:t>
                       </a:r>
                       <a:endParaRPr lang="en-GB" sz="2000" dirty="0">
-                        <a:latin typeface="Palatino Linotype" panose="02040502050505030304" pitchFamily="18" charset="0"/>
+                        <a:latin typeface="Aptos" panose="020B0004020202020204" pitchFamily="34" charset="0"/>
                       </a:endParaRPr>
                     </a:p>
                   </a:txBody>
@@ -3091,14 +3133,14 @@
                           <a:solidFill>
                             <a:schemeClr val="dk1"/>
                           </a:solidFill>
-                          <a:latin typeface="Palatino Linotype" panose="02040502050505030304" pitchFamily="18" charset="0"/>
+                          <a:latin typeface="Aptos" panose="020B0004020202020204" pitchFamily="34" charset="0"/>
                           <a:ea typeface="+mn-ea"/>
                           <a:cs typeface="+mn-cs"/>
                         </a:rPr>
                         <a:t>Block waiting for an incoming connection</a:t>
                       </a:r>
                       <a:endParaRPr lang="en-GB" sz="2000" dirty="0">
-                        <a:latin typeface="Palatino Linotype" panose="02040502050505030304" pitchFamily="18" charset="0"/>
+                        <a:latin typeface="Aptos" panose="020B0004020202020204" pitchFamily="34" charset="0"/>
                       </a:endParaRPr>
                     </a:p>
                   </a:txBody>
@@ -3118,12 +3160,12 @@
                     <a:p>
                       <a:r>
                         <a:rPr lang="it-IT" sz="2000" dirty="0">
-                          <a:latin typeface="Palatino Linotype" panose="02040502050505030304" pitchFamily="18" charset="0"/>
+                          <a:latin typeface="Aptos" panose="020B0004020202020204" pitchFamily="34" charset="0"/>
                         </a:rPr>
                         <a:t>CONNECT</a:t>
                       </a:r>
                       <a:endParaRPr lang="en-GB" sz="2000" dirty="0">
-                        <a:latin typeface="Palatino Linotype" panose="02040502050505030304" pitchFamily="18" charset="0"/>
+                        <a:latin typeface="Aptos" panose="020B0004020202020204" pitchFamily="34" charset="0"/>
                       </a:endParaRPr>
                     </a:p>
                   </a:txBody>
@@ -3139,14 +3181,14 @@
                           <a:solidFill>
                             <a:schemeClr val="dk1"/>
                           </a:solidFill>
-                          <a:latin typeface="Palatino Linotype" panose="02040502050505030304" pitchFamily="18" charset="0"/>
+                          <a:latin typeface="Aptos" panose="020B0004020202020204" pitchFamily="34" charset="0"/>
                           <a:ea typeface="+mn-ea"/>
                           <a:cs typeface="+mn-cs"/>
                         </a:rPr>
                         <a:t>Establish a connection with a waiting peer</a:t>
                       </a:r>
                       <a:endParaRPr lang="en-GB" sz="2000" dirty="0">
-                        <a:latin typeface="Palatino Linotype" panose="02040502050505030304" pitchFamily="18" charset="0"/>
+                        <a:latin typeface="Aptos" panose="020B0004020202020204" pitchFamily="34" charset="0"/>
                       </a:endParaRPr>
                     </a:p>
                   </a:txBody>
@@ -3166,12 +3208,12 @@
                     <a:p>
                       <a:r>
                         <a:rPr lang="it-IT" sz="2000" dirty="0">
-                          <a:latin typeface="Palatino Linotype" panose="02040502050505030304" pitchFamily="18" charset="0"/>
+                          <a:latin typeface="Aptos" panose="020B0004020202020204" pitchFamily="34" charset="0"/>
                         </a:rPr>
                         <a:t>ACCEPT</a:t>
                       </a:r>
                       <a:endParaRPr lang="en-GB" sz="2000" dirty="0">
-                        <a:latin typeface="Palatino Linotype" panose="02040502050505030304" pitchFamily="18" charset="0"/>
+                        <a:latin typeface="Aptos" panose="020B0004020202020204" pitchFamily="34" charset="0"/>
                       </a:endParaRPr>
                     </a:p>
                   </a:txBody>
@@ -3187,14 +3229,14 @@
                           <a:solidFill>
                             <a:schemeClr val="dk1"/>
                           </a:solidFill>
-                          <a:latin typeface="Palatino Linotype" panose="02040502050505030304" pitchFamily="18" charset="0"/>
+                          <a:latin typeface="Aptos" panose="020B0004020202020204" pitchFamily="34" charset="0"/>
                           <a:ea typeface="+mn-ea"/>
                           <a:cs typeface="+mn-cs"/>
                         </a:rPr>
                         <a:t>Accept an incoming connection from a peer</a:t>
                       </a:r>
                       <a:endParaRPr lang="en-GB" sz="2000" dirty="0">
-                        <a:latin typeface="Palatino Linotype" panose="02040502050505030304" pitchFamily="18" charset="0"/>
+                        <a:latin typeface="Aptos" panose="020B0004020202020204" pitchFamily="34" charset="0"/>
                       </a:endParaRPr>
                     </a:p>
                   </a:txBody>
@@ -3214,12 +3256,12 @@
                     <a:p>
                       <a:r>
                         <a:rPr lang="it-IT" sz="2000" dirty="0">
-                          <a:latin typeface="Palatino Linotype" panose="02040502050505030304" pitchFamily="18" charset="0"/>
+                          <a:latin typeface="Aptos" panose="020B0004020202020204" pitchFamily="34" charset="0"/>
                         </a:rPr>
                         <a:t>RECEIVE</a:t>
                       </a:r>
                       <a:endParaRPr lang="en-GB" sz="2000" dirty="0">
-                        <a:latin typeface="Palatino Linotype" panose="02040502050505030304" pitchFamily="18" charset="0"/>
+                        <a:latin typeface="Aptos" panose="020B0004020202020204" pitchFamily="34" charset="0"/>
                       </a:endParaRPr>
                     </a:p>
                   </a:txBody>
@@ -3235,14 +3277,14 @@
                           <a:solidFill>
                             <a:schemeClr val="dk1"/>
                           </a:solidFill>
-                          <a:latin typeface="Palatino Linotype" panose="02040502050505030304" pitchFamily="18" charset="0"/>
+                          <a:latin typeface="Aptos" panose="020B0004020202020204" pitchFamily="34" charset="0"/>
                           <a:ea typeface="+mn-ea"/>
                           <a:cs typeface="+mn-cs"/>
                         </a:rPr>
                         <a:t>Block waiting for an incoming message</a:t>
                       </a:r>
                       <a:endParaRPr lang="en-GB" sz="2000" dirty="0">
-                        <a:latin typeface="Palatino Linotype" panose="02040502050505030304" pitchFamily="18" charset="0"/>
+                        <a:latin typeface="Aptos" panose="020B0004020202020204" pitchFamily="34" charset="0"/>
                       </a:endParaRPr>
                     </a:p>
                   </a:txBody>
@@ -3262,12 +3304,12 @@
                     <a:p>
                       <a:r>
                         <a:rPr lang="it-IT" sz="2000" dirty="0">
-                          <a:latin typeface="Palatino Linotype" panose="02040502050505030304" pitchFamily="18" charset="0"/>
+                          <a:latin typeface="Aptos" panose="020B0004020202020204" pitchFamily="34" charset="0"/>
                         </a:rPr>
                         <a:t>SEND</a:t>
                       </a:r>
                       <a:endParaRPr lang="en-GB" sz="2000" dirty="0">
-                        <a:latin typeface="Palatino Linotype" panose="02040502050505030304" pitchFamily="18" charset="0"/>
+                        <a:latin typeface="Aptos" panose="020B0004020202020204" pitchFamily="34" charset="0"/>
                       </a:endParaRPr>
                     </a:p>
                   </a:txBody>
@@ -3283,14 +3325,14 @@
                           <a:solidFill>
                             <a:schemeClr val="dk1"/>
                           </a:solidFill>
-                          <a:latin typeface="Palatino Linotype" panose="02040502050505030304" pitchFamily="18" charset="0"/>
+                          <a:latin typeface="Aptos" panose="020B0004020202020204" pitchFamily="34" charset="0"/>
                           <a:ea typeface="+mn-ea"/>
                           <a:cs typeface="+mn-cs"/>
                         </a:rPr>
                         <a:t>Send a message to the peer</a:t>
                       </a:r>
                       <a:endParaRPr lang="en-GB" sz="2000" dirty="0">
-                        <a:latin typeface="Palatino Linotype" panose="02040502050505030304" pitchFamily="18" charset="0"/>
+                        <a:latin typeface="Aptos" panose="020B0004020202020204" pitchFamily="34" charset="0"/>
                       </a:endParaRPr>
                     </a:p>
                   </a:txBody>
@@ -3310,12 +3352,12 @@
                     <a:p>
                       <a:r>
                         <a:rPr lang="it-IT" sz="2000" dirty="0">
-                          <a:latin typeface="Palatino Linotype" panose="02040502050505030304" pitchFamily="18" charset="0"/>
+                          <a:latin typeface="Aptos" panose="020B0004020202020204" pitchFamily="34" charset="0"/>
                         </a:rPr>
                         <a:t>DISCONNECT</a:t>
                       </a:r>
                       <a:endParaRPr lang="en-GB" sz="2000" dirty="0">
-                        <a:latin typeface="Palatino Linotype" panose="02040502050505030304" pitchFamily="18" charset="0"/>
+                        <a:latin typeface="Aptos" panose="020B0004020202020204" pitchFamily="34" charset="0"/>
                       </a:endParaRPr>
                     </a:p>
                   </a:txBody>
@@ -3331,14 +3373,14 @@
                           <a:solidFill>
                             <a:schemeClr val="dk1"/>
                           </a:solidFill>
-                          <a:latin typeface="Palatino Linotype" panose="02040502050505030304" pitchFamily="18" charset="0"/>
+                          <a:latin typeface="Aptos" panose="020B0004020202020204" pitchFamily="34" charset="0"/>
                           <a:ea typeface="+mn-ea"/>
                           <a:cs typeface="+mn-cs"/>
                         </a:rPr>
                         <a:t>Terminate a connection</a:t>
                       </a:r>
                       <a:endParaRPr lang="en-GB" sz="2000" dirty="0">
-                        <a:latin typeface="Palatino Linotype" panose="02040502050505030304" pitchFamily="18" charset="0"/>
+                        <a:latin typeface="Aptos" panose="020B0004020202020204" pitchFamily="34" charset="0"/>
                       </a:endParaRPr>
                     </a:p>
                   </a:txBody>
@@ -3379,7 +3421,7 @@
             <a:pPr algn="ctr"/>
             <a:r>
               <a:rPr lang="en-US" sz="2000" dirty="0">
-                <a:latin typeface="Palatino Linotype" panose="02040502050505030304" pitchFamily="18" charset="0"/>
+                <a:latin typeface="Aptos" panose="020B0004020202020204" pitchFamily="34" charset="0"/>
               </a:rPr>
               <a:t>Examples of primitives for a simple connection-oriented service</a:t>
             </a:r>
@@ -3432,30 +3474,44 @@
           <a:lstStyle/>
           <a:p>
             <a:r>
-              <a:rPr lang="it-IT" dirty="0"/>
+              <a:rPr lang="it-IT" dirty="0">
+                <a:latin typeface="Aptos" panose="020B0004020202020204" pitchFamily="34" charset="0"/>
+              </a:rPr>
               <a:t>Connection-</a:t>
             </a:r>
             <a:r>
-              <a:rPr lang="it-IT" dirty="0" err="1"/>
+              <a:rPr lang="it-IT" dirty="0" err="1">
+                <a:latin typeface="Aptos" panose="020B0004020202020204" pitchFamily="34" charset="0"/>
+              </a:rPr>
               <a:t>oriented</a:t>
             </a:r>
             <a:r>
-              <a:rPr lang="it-IT" dirty="0"/>
+              <a:rPr lang="it-IT" dirty="0">
+                <a:latin typeface="Aptos" panose="020B0004020202020204" pitchFamily="34" charset="0"/>
+              </a:rPr>
               <a:t> vs </a:t>
             </a:r>
             <a:r>
-              <a:rPr lang="it-IT" dirty="0" err="1"/>
+              <a:rPr lang="it-IT" dirty="0" err="1">
+                <a:latin typeface="Aptos" panose="020B0004020202020204" pitchFamily="34" charset="0"/>
+              </a:rPr>
               <a:t>connectionless</a:t>
             </a:r>
             <a:r>
-              <a:rPr lang="it-IT" dirty="0"/>
+              <a:rPr lang="it-IT" dirty="0">
+                <a:latin typeface="Aptos" panose="020B0004020202020204" pitchFamily="34" charset="0"/>
+              </a:rPr>
               <a:t> </a:t>
             </a:r>
             <a:r>
-              <a:rPr lang="it-IT" dirty="0" err="1"/>
+              <a:rPr lang="it-IT" dirty="0" err="1">
+                <a:latin typeface="Aptos" panose="020B0004020202020204" pitchFamily="34" charset="0"/>
+              </a:rPr>
               <a:t>services</a:t>
             </a:r>
-            <a:endParaRPr lang="en-GB" dirty="0"/>
+            <a:endParaRPr lang="en-GB" dirty="0">
+              <a:latin typeface="Aptos" panose="020B0004020202020204" pitchFamily="34" charset="0"/>
+            </a:endParaRPr>
           </a:p>
         </p:txBody>
       </p:sp>
@@ -3477,7 +3533,7 @@
         </p:spPr>
         <p:txBody>
           <a:bodyPr>
-            <a:normAutofit lnSpcReduction="10000"/>
+            <a:normAutofit/>
           </a:bodyPr>
           <a:lstStyle/>
           <a:p>
@@ -3485,11 +3541,15 @@
               <a:buNone/>
             </a:pPr>
             <a:r>
-              <a:rPr lang="en-GB" b="1" dirty="0"/>
+              <a:rPr lang="en-GB" b="1" dirty="0">
+                <a:latin typeface="Aptos" panose="020B0004020202020204" pitchFamily="34" charset="0"/>
+              </a:rPr>
               <a:t>Two types of service</a:t>
             </a:r>
             <a:r>
-              <a:rPr lang="en-GB" dirty="0"/>
+              <a:rPr lang="en-GB" dirty="0">
+                <a:latin typeface="Aptos" panose="020B0004020202020204" pitchFamily="34" charset="0"/>
+              </a:rPr>
               <a:t>:</a:t>
             </a:r>
           </a:p>
@@ -3497,111 +3557,158 @@
             <a:pPr marL="0" indent="0">
               <a:buNone/>
             </a:pPr>
-            <a:endParaRPr lang="en-GB" dirty="0"/>
-          </a:p>
-          <a:p>
-            <a:r>
-              <a:rPr lang="en-GB" b="1" dirty="0"/>
+            <a:endParaRPr lang="en-GB" dirty="0">
+              <a:latin typeface="Aptos" panose="020B0004020202020204" pitchFamily="34" charset="0"/>
+            </a:endParaRPr>
+          </a:p>
+          <a:p>
+            <a:r>
+              <a:rPr lang="en-GB" b="1" dirty="0">
+                <a:latin typeface="Aptos" panose="020B0004020202020204" pitchFamily="34" charset="0"/>
+              </a:rPr>
               <a:t>Connection-oriented service: </a:t>
             </a:r>
             <a:r>
-              <a:rPr lang="en-GB" dirty="0"/>
+              <a:rPr lang="en-GB" dirty="0">
+                <a:latin typeface="Aptos" panose="020B0004020202020204" pitchFamily="34" charset="0"/>
+              </a:rPr>
               <a:t>the service user first establishes a connection with the receiver, then it uses the connection to send data, and finally it releases the connection (like in a telephone communication).</a:t>
             </a:r>
           </a:p>
           <a:p>
             <a:pPr lvl="1"/>
             <a:r>
-              <a:rPr lang="en-GB" dirty="0"/>
+              <a:rPr lang="en-GB" dirty="0">
+                <a:latin typeface="Aptos" panose="020B0004020202020204" pitchFamily="34" charset="0"/>
+              </a:rPr>
               <a:t>In most cases the order of data bits is preserved </a:t>
             </a:r>
             <a:r>
               <a:rPr lang="en-GB" dirty="0">
+                <a:latin typeface="Aptos" panose="020B0004020202020204" pitchFamily="34" charset="0"/>
                 <a:sym typeface="Wingdings" panose="05000000000000000000" pitchFamily="2" charset="2"/>
               </a:rPr>
               <a:t></a:t>
             </a:r>
             <a:r>
-              <a:rPr lang="en-GB" dirty="0"/>
+              <a:rPr lang="en-GB" dirty="0">
+                <a:latin typeface="Aptos" panose="020B0004020202020204" pitchFamily="34" charset="0"/>
+              </a:rPr>
               <a:t> bits arrive in the same order they were sent.</a:t>
             </a:r>
           </a:p>
           <a:p>
             <a:pPr lvl="1"/>
-            <a:endParaRPr lang="en-GB" dirty="0"/>
-          </a:p>
-          <a:p>
-            <a:r>
-              <a:rPr lang="en-GB" b="1" dirty="0"/>
+            <a:endParaRPr lang="en-GB" dirty="0">
+              <a:latin typeface="Aptos" panose="020B0004020202020204" pitchFamily="34" charset="0"/>
+            </a:endParaRPr>
+          </a:p>
+          <a:p>
+            <a:r>
+              <a:rPr lang="en-GB" b="1" dirty="0">
+                <a:latin typeface="Aptos" panose="020B0004020202020204" pitchFamily="34" charset="0"/>
+              </a:rPr>
               <a:t>Connectionless</a:t>
             </a:r>
             <a:r>
-              <a:rPr lang="en-GB" dirty="0"/>
+              <a:rPr lang="en-GB" dirty="0">
+                <a:latin typeface="Aptos" panose="020B0004020202020204" pitchFamily="34" charset="0"/>
+              </a:rPr>
               <a:t> </a:t>
             </a:r>
             <a:r>
-              <a:rPr lang="en-GB" b="1" dirty="0"/>
+              <a:rPr lang="en-GB" b="1" dirty="0">
+                <a:latin typeface="Aptos" panose="020B0004020202020204" pitchFamily="34" charset="0"/>
+              </a:rPr>
               <a:t>service</a:t>
             </a:r>
             <a:r>
-              <a:rPr lang="en-GB" dirty="0"/>
+              <a:rPr lang="en-GB" dirty="0">
+                <a:latin typeface="Aptos" panose="020B0004020202020204" pitchFamily="34" charset="0"/>
+              </a:rPr>
               <a:t>: each message carries the full destination address and each one is sent independently on the subsequent messages (like in postal system). </a:t>
             </a:r>
           </a:p>
           <a:p>
             <a:pPr lvl="1"/>
             <a:r>
-              <a:rPr lang="en-GB" dirty="0"/>
+              <a:rPr lang="en-GB" dirty="0">
+                <a:latin typeface="Aptos" panose="020B0004020202020204" pitchFamily="34" charset="0"/>
+              </a:rPr>
               <a:t>Normally, when two messages are sent to the same destination, the first one sent will be the first one to arrive. However, it is possible that the first one sent can be delayed so that the second one arrives first.</a:t>
             </a:r>
           </a:p>
           <a:p>
             <a:pPr lvl="1"/>
             <a:r>
-              <a:rPr lang="it-IT" dirty="0"/>
+              <a:rPr lang="it-IT" dirty="0">
+                <a:latin typeface="Aptos" panose="020B0004020202020204" pitchFamily="34" charset="0"/>
+              </a:rPr>
               <a:t>The </a:t>
             </a:r>
             <a:r>
-              <a:rPr lang="it-IT" dirty="0" err="1"/>
+              <a:rPr lang="it-IT" dirty="0" err="1">
+                <a:latin typeface="Aptos" panose="020B0004020202020204" pitchFamily="34" charset="0"/>
+              </a:rPr>
               <a:t>messages</a:t>
             </a:r>
             <a:r>
-              <a:rPr lang="it-IT" dirty="0"/>
+              <a:rPr lang="it-IT" dirty="0">
+                <a:latin typeface="Aptos" panose="020B0004020202020204" pitchFamily="34" charset="0"/>
+              </a:rPr>
               <a:t> in a </a:t>
             </a:r>
             <a:r>
-              <a:rPr lang="it-IT" dirty="0" err="1"/>
+              <a:rPr lang="it-IT" dirty="0" err="1">
+                <a:latin typeface="Aptos" panose="020B0004020202020204" pitchFamily="34" charset="0"/>
+              </a:rPr>
               <a:t>connectionless</a:t>
             </a:r>
             <a:r>
-              <a:rPr lang="it-IT" dirty="0"/>
+              <a:rPr lang="it-IT" dirty="0">
+                <a:latin typeface="Aptos" panose="020B0004020202020204" pitchFamily="34" charset="0"/>
+              </a:rPr>
               <a:t> service are </a:t>
             </a:r>
             <a:r>
-              <a:rPr lang="it-IT" dirty="0" err="1"/>
+              <a:rPr lang="it-IT" dirty="0" err="1">
+                <a:latin typeface="Aptos" panose="020B0004020202020204" pitchFamily="34" charset="0"/>
+              </a:rPr>
               <a:t>also</a:t>
             </a:r>
             <a:r>
-              <a:rPr lang="it-IT" dirty="0"/>
+              <a:rPr lang="it-IT" dirty="0">
+                <a:latin typeface="Aptos" panose="020B0004020202020204" pitchFamily="34" charset="0"/>
+              </a:rPr>
               <a:t> </a:t>
             </a:r>
             <a:r>
-              <a:rPr lang="it-IT" dirty="0" err="1"/>
+              <a:rPr lang="it-IT" dirty="0" err="1">
+                <a:latin typeface="Aptos" panose="020B0004020202020204" pitchFamily="34" charset="0"/>
+              </a:rPr>
               <a:t>called</a:t>
             </a:r>
             <a:r>
-              <a:rPr lang="it-IT" dirty="0"/>
+              <a:rPr lang="it-IT" dirty="0">
+                <a:latin typeface="Aptos" panose="020B0004020202020204" pitchFamily="34" charset="0"/>
+              </a:rPr>
               <a:t> </a:t>
             </a:r>
             <a:r>
-              <a:rPr lang="it-IT" b="1" dirty="0" err="1"/>
+              <a:rPr lang="it-IT" b="1" dirty="0" err="1">
+                <a:latin typeface="Aptos" panose="020B0004020202020204" pitchFamily="34" charset="0"/>
+              </a:rPr>
               <a:t>datagram</a:t>
             </a:r>
             <a:r>
-              <a:rPr lang="it-IT" dirty="0"/>
+              <a:rPr lang="it-IT" dirty="0">
+                <a:latin typeface="Aptos" panose="020B0004020202020204" pitchFamily="34" charset="0"/>
+              </a:rPr>
               <a:t>.</a:t>
             </a:r>
-            <a:endParaRPr lang="en-GB" dirty="0"/>
+            <a:endParaRPr lang="en-GB" dirty="0">
+              <a:latin typeface="Aptos" panose="020B0004020202020204" pitchFamily="34" charset="0"/>
+            </a:endParaRPr>
           </a:p>
         </p:txBody>
       </p:sp>
@@ -3621,10 +3728,14 @@
           <a:lstStyle/>
           <a:p>
             <a:fld id="{31DE2C5B-556E-47B8-A792-024C2FCA4ACC}" type="slidenum">
-              <a:rPr lang="en-GB" smtClean="0"/>
+              <a:rPr lang="en-GB" smtClean="0">
+                <a:latin typeface="Aptos" panose="020B0004020202020204" pitchFamily="34" charset="0"/>
+              </a:rPr>
               <a:t>11</a:t>
             </a:fld>
-            <a:endParaRPr lang="en-GB"/>
+            <a:endParaRPr lang="en-GB">
+              <a:latin typeface="Aptos" panose="020B0004020202020204" pitchFamily="34" charset="0"/>
+            </a:endParaRPr>
           </a:p>
         </p:txBody>
       </p:sp>
@@ -3704,26 +3815,38 @@
           <a:lstStyle/>
           <a:p>
             <a:r>
-              <a:rPr lang="it-IT" dirty="0" err="1"/>
+              <a:rPr lang="it-IT" dirty="0" err="1">
+                <a:latin typeface="Aptos" panose="020B0004020202020204" pitchFamily="34" charset="0"/>
+              </a:rPr>
               <a:t>Reliable</a:t>
             </a:r>
             <a:r>
-              <a:rPr lang="it-IT" dirty="0"/>
+              <a:rPr lang="it-IT" dirty="0">
+                <a:latin typeface="Aptos" panose="020B0004020202020204" pitchFamily="34" charset="0"/>
+              </a:rPr>
               <a:t> vs. </a:t>
             </a:r>
             <a:r>
-              <a:rPr lang="it-IT" dirty="0" err="1"/>
+              <a:rPr lang="it-IT" dirty="0" err="1">
+                <a:latin typeface="Aptos" panose="020B0004020202020204" pitchFamily="34" charset="0"/>
+              </a:rPr>
               <a:t>unrealiable</a:t>
             </a:r>
             <a:r>
-              <a:rPr lang="it-IT" dirty="0"/>
+              <a:rPr lang="it-IT" dirty="0">
+                <a:latin typeface="Aptos" panose="020B0004020202020204" pitchFamily="34" charset="0"/>
+              </a:rPr>
               <a:t> </a:t>
             </a:r>
             <a:r>
-              <a:rPr lang="it-IT" dirty="0" err="1"/>
+              <a:rPr lang="it-IT" dirty="0" err="1">
+                <a:latin typeface="Aptos" panose="020B0004020202020204" pitchFamily="34" charset="0"/>
+              </a:rPr>
               <a:t>services</a:t>
             </a:r>
-            <a:endParaRPr lang="en-GB" dirty="0"/>
+            <a:endParaRPr lang="en-GB" dirty="0">
+              <a:latin typeface="Aptos" panose="020B0004020202020204" pitchFamily="34" charset="0"/>
+            </a:endParaRPr>
           </a:p>
         </p:txBody>
       </p:sp>
@@ -3748,90 +3871,130 @@
           <a:lstStyle/>
           <a:p>
             <a:r>
-              <a:rPr lang="it-IT" sz="2200" dirty="0"/>
+              <a:rPr lang="it-IT" sz="2200" dirty="0">
+                <a:latin typeface="Aptos" panose="020B0004020202020204" pitchFamily="34" charset="0"/>
+              </a:rPr>
               <a:t>A </a:t>
             </a:r>
             <a:r>
-              <a:rPr lang="it-IT" sz="2200" b="1" dirty="0" err="1"/>
+              <a:rPr lang="it-IT" sz="2200" b="1" dirty="0" err="1">
+                <a:latin typeface="Aptos" panose="020B0004020202020204" pitchFamily="34" charset="0"/>
+              </a:rPr>
               <a:t>reliable</a:t>
             </a:r>
             <a:r>
-              <a:rPr lang="it-IT" sz="2200" dirty="0"/>
+              <a:rPr lang="it-IT" sz="2200" dirty="0">
+                <a:latin typeface="Aptos" panose="020B0004020202020204" pitchFamily="34" charset="0"/>
+              </a:rPr>
               <a:t> service </a:t>
             </a:r>
             <a:r>
-              <a:rPr lang="it-IT" sz="2200" dirty="0" err="1"/>
+              <a:rPr lang="it-IT" sz="2200" dirty="0" err="1">
+                <a:latin typeface="Aptos" panose="020B0004020202020204" pitchFamily="34" charset="0"/>
+              </a:rPr>
               <a:t>never</a:t>
             </a:r>
             <a:r>
-              <a:rPr lang="it-IT" sz="2200" dirty="0"/>
+              <a:rPr lang="it-IT" sz="2200" dirty="0">
+                <a:latin typeface="Aptos" panose="020B0004020202020204" pitchFamily="34" charset="0"/>
+              </a:rPr>
               <a:t> </a:t>
             </a:r>
             <a:r>
-              <a:rPr lang="it-IT" sz="2200" dirty="0" err="1"/>
+              <a:rPr lang="it-IT" sz="2200" dirty="0" err="1">
+                <a:latin typeface="Aptos" panose="020B0004020202020204" pitchFamily="34" charset="0"/>
+              </a:rPr>
               <a:t>looses</a:t>
             </a:r>
             <a:r>
-              <a:rPr lang="it-IT" sz="2200" dirty="0"/>
+              <a:rPr lang="it-IT" sz="2200" dirty="0">
+                <a:latin typeface="Aptos" panose="020B0004020202020204" pitchFamily="34" charset="0"/>
+              </a:rPr>
               <a:t> data: </a:t>
             </a:r>
             <a:r>
-              <a:rPr lang="en-GB" sz="2200" dirty="0"/>
+              <a:rPr lang="en-GB" sz="2200" dirty="0">
+                <a:latin typeface="Aptos" panose="020B0004020202020204" pitchFamily="34" charset="0"/>
+              </a:rPr>
               <a:t>the receiver acknowledges the receipt of each message so the sender is sure that it arrived. </a:t>
             </a:r>
           </a:p>
           <a:p>
             <a:r>
-              <a:rPr lang="en-GB" sz="2200" dirty="0"/>
+              <a:rPr lang="en-GB" sz="2200" dirty="0">
+                <a:latin typeface="Aptos" panose="020B0004020202020204" pitchFamily="34" charset="0"/>
+              </a:rPr>
               <a:t>The acknowledgement process introduces overhead and delays, sometimes undesirable.</a:t>
             </a:r>
           </a:p>
           <a:p>
             <a:pPr lvl="1"/>
             <a:r>
-              <a:rPr lang="en-GB" dirty="0"/>
+              <a:rPr lang="en-GB" dirty="0">
+                <a:latin typeface="Aptos" panose="020B0004020202020204" pitchFamily="34" charset="0"/>
+              </a:rPr>
               <a:t>E.g. in a telephone communication it is less disruptive to hear a bit of noise on the line from time to time than to experience a delay waiting for acknowledgements.</a:t>
             </a:r>
           </a:p>
           <a:p>
             <a:r>
-              <a:rPr lang="it-IT" sz="2200" dirty="0"/>
+              <a:rPr lang="it-IT" sz="2200" dirty="0">
+                <a:latin typeface="Aptos" panose="020B0004020202020204" pitchFamily="34" charset="0"/>
+              </a:rPr>
               <a:t>An </a:t>
             </a:r>
             <a:r>
-              <a:rPr lang="it-IT" sz="2200" b="1" dirty="0" err="1"/>
+              <a:rPr lang="it-IT" sz="2200" b="1" dirty="0" err="1">
+                <a:latin typeface="Aptos" panose="020B0004020202020204" pitchFamily="34" charset="0"/>
+              </a:rPr>
               <a:t>unreliable</a:t>
             </a:r>
             <a:r>
-              <a:rPr lang="it-IT" sz="2200" dirty="0"/>
+              <a:rPr lang="it-IT" sz="2200" dirty="0">
+                <a:latin typeface="Aptos" panose="020B0004020202020204" pitchFamily="34" charset="0"/>
+              </a:rPr>
               <a:t> service </a:t>
             </a:r>
             <a:r>
-              <a:rPr lang="it-IT" sz="2200" dirty="0" err="1"/>
+              <a:rPr lang="it-IT" sz="2200" dirty="0" err="1">
+                <a:latin typeface="Aptos" panose="020B0004020202020204" pitchFamily="34" charset="0"/>
+              </a:rPr>
               <a:t>does</a:t>
             </a:r>
             <a:r>
-              <a:rPr lang="it-IT" sz="2200" dirty="0"/>
+              <a:rPr lang="it-IT" sz="2200" dirty="0">
+                <a:latin typeface="Aptos" panose="020B0004020202020204" pitchFamily="34" charset="0"/>
+              </a:rPr>
               <a:t> </a:t>
             </a:r>
             <a:r>
-              <a:rPr lang="it-IT" sz="2200" dirty="0" err="1"/>
+              <a:rPr lang="it-IT" sz="2200" dirty="0" err="1">
+                <a:latin typeface="Aptos" panose="020B0004020202020204" pitchFamily="34" charset="0"/>
+              </a:rPr>
               <a:t>not</a:t>
             </a:r>
             <a:r>
-              <a:rPr lang="it-IT" sz="2200" dirty="0"/>
+              <a:rPr lang="it-IT" sz="2200" dirty="0">
+                <a:latin typeface="Aptos" panose="020B0004020202020204" pitchFamily="34" charset="0"/>
+              </a:rPr>
               <a:t> </a:t>
             </a:r>
             <a:r>
-              <a:rPr lang="it-IT" sz="2200" dirty="0" err="1"/>
+              <a:rPr lang="it-IT" sz="2200" dirty="0" err="1">
+                <a:latin typeface="Aptos" panose="020B0004020202020204" pitchFamily="34" charset="0"/>
+              </a:rPr>
               <a:t>return</a:t>
             </a:r>
             <a:r>
-              <a:rPr lang="it-IT" sz="2200" dirty="0"/>
+              <a:rPr lang="it-IT" sz="2200" dirty="0">
+                <a:latin typeface="Aptos" panose="020B0004020202020204" pitchFamily="34" charset="0"/>
+              </a:rPr>
               <a:t> an </a:t>
             </a:r>
             <a:r>
-              <a:rPr lang="en-GB" sz="2200" dirty="0"/>
+              <a:rPr lang="en-GB" sz="2200" dirty="0">
+                <a:latin typeface="Aptos" panose="020B0004020202020204" pitchFamily="34" charset="0"/>
+              </a:rPr>
               <a:t>acknowledgement to the sender</a:t>
             </a:r>
           </a:p>
@@ -3853,10 +4016,14 @@
           <a:lstStyle/>
           <a:p>
             <a:fld id="{31DE2C5B-556E-47B8-A792-024C2FCA4ACC}" type="slidenum">
-              <a:rPr lang="en-GB" smtClean="0"/>
+              <a:rPr lang="en-GB" smtClean="0">
+                <a:latin typeface="Aptos" panose="020B0004020202020204" pitchFamily="34" charset="0"/>
+              </a:rPr>
               <a:t>12</a:t>
             </a:fld>
-            <a:endParaRPr lang="en-GB"/>
+            <a:endParaRPr lang="en-GB">
+              <a:latin typeface="Aptos" panose="020B0004020202020204" pitchFamily="34" charset="0"/>
+            </a:endParaRPr>
           </a:p>
         </p:txBody>
       </p:sp>
@@ -3906,7 +4073,9 @@
           <a:lstStyle/>
           <a:p>
             <a:r>
-              <a:rPr lang="en-GB" dirty="0"/>
+              <a:rPr lang="en-GB" dirty="0">
+                <a:latin typeface="Aptos" panose="020B0004020202020204" pitchFamily="34" charset="0"/>
+              </a:rPr>
               <a:t>Protocol vs. service</a:t>
             </a:r>
           </a:p>
@@ -3930,51 +4099,73 @@
           <a:lstStyle/>
           <a:p>
             <a:r>
-              <a:rPr lang="it-IT" b="1" dirty="0" err="1"/>
+              <a:rPr lang="it-IT" b="1" dirty="0" err="1">
+                <a:latin typeface="Aptos" panose="020B0004020202020204" pitchFamily="34" charset="0"/>
+              </a:rPr>
               <a:t>Protocol</a:t>
             </a:r>
             <a:r>
-              <a:rPr lang="it-IT" dirty="0"/>
+              <a:rPr lang="it-IT" dirty="0">
+                <a:latin typeface="Aptos" panose="020B0004020202020204" pitchFamily="34" charset="0"/>
+              </a:rPr>
               <a:t>: </a:t>
             </a:r>
             <a:r>
-              <a:rPr lang="en-GB" dirty="0"/>
+              <a:rPr lang="en-GB" dirty="0">
+                <a:latin typeface="Aptos" panose="020B0004020202020204" pitchFamily="34" charset="0"/>
+              </a:rPr>
               <a:t>The set of rules governing the format and meaning of the packets, or messages that are exchanged by the </a:t>
             </a:r>
             <a:r>
-              <a:rPr lang="en-GB" u="sng" dirty="0"/>
+              <a:rPr lang="en-GB" u="sng" dirty="0">
+                <a:latin typeface="Aptos" panose="020B0004020202020204" pitchFamily="34" charset="0"/>
+              </a:rPr>
               <a:t>peer entities within a layer</a:t>
             </a:r>
             <a:r>
-              <a:rPr lang="en-GB" dirty="0"/>
+              <a:rPr lang="en-GB" dirty="0">
+                <a:latin typeface="Aptos" panose="020B0004020202020204" pitchFamily="34" charset="0"/>
+              </a:rPr>
               <a:t>.</a:t>
             </a:r>
           </a:p>
           <a:p>
             <a:r>
-              <a:rPr lang="en-GB" b="1" dirty="0"/>
+              <a:rPr lang="en-GB" b="1" dirty="0">
+                <a:latin typeface="Aptos" panose="020B0004020202020204" pitchFamily="34" charset="0"/>
+              </a:rPr>
               <a:t>Service:</a:t>
             </a:r>
             <a:r>
-              <a:rPr lang="en-GB" i="1" dirty="0"/>
+              <a:rPr lang="en-GB" i="1" dirty="0">
+                <a:latin typeface="Aptos" panose="020B0004020202020204" pitchFamily="34" charset="0"/>
+              </a:rPr>
               <a:t> </a:t>
             </a:r>
             <a:r>
-              <a:rPr lang="en-GB" dirty="0"/>
+              <a:rPr lang="en-GB" dirty="0">
+                <a:latin typeface="Aptos" panose="020B0004020202020204" pitchFamily="34" charset="0"/>
+              </a:rPr>
               <a:t>the set of primitives (operations) that a layer provides to the layer above it. They are related to the </a:t>
             </a:r>
             <a:r>
-              <a:rPr lang="en-GB" u="sng" dirty="0"/>
+              <a:rPr lang="en-GB" u="sng" dirty="0">
+                <a:latin typeface="Aptos" panose="020B0004020202020204" pitchFamily="34" charset="0"/>
+              </a:rPr>
               <a:t>interfaces between layers</a:t>
             </a:r>
             <a:r>
-              <a:rPr lang="en-GB" dirty="0"/>
+              <a:rPr lang="en-GB" dirty="0">
+                <a:latin typeface="Aptos" panose="020B0004020202020204" pitchFamily="34" charset="0"/>
+              </a:rPr>
               <a:t>. </a:t>
             </a:r>
           </a:p>
           <a:p>
             <a:r>
-              <a:rPr lang="en-GB" dirty="0"/>
+              <a:rPr lang="en-GB" dirty="0">
+                <a:latin typeface="Aptos" panose="020B0004020202020204" pitchFamily="34" charset="0"/>
+              </a:rPr>
               <a:t>The protocol of layer k defines the implementation details of services which layer k provides to users of layer k+1; such details are not visible to users of layer k+1. </a:t>
             </a:r>
           </a:p>
@@ -3996,10 +4187,14 @@
           <a:lstStyle/>
           <a:p>
             <a:fld id="{31DE2C5B-556E-47B8-A792-024C2FCA4ACC}" type="slidenum">
-              <a:rPr lang="en-GB" smtClean="0"/>
+              <a:rPr lang="en-GB" smtClean="0">
+                <a:latin typeface="Aptos" panose="020B0004020202020204" pitchFamily="34" charset="0"/>
+              </a:rPr>
               <a:t>13</a:t>
             </a:fld>
-            <a:endParaRPr lang="en-GB"/>
+            <a:endParaRPr lang="en-GB">
+              <a:latin typeface="Aptos" panose="020B0004020202020204" pitchFamily="34" charset="0"/>
+            </a:endParaRPr>
           </a:p>
         </p:txBody>
       </p:sp>
@@ -4081,18 +4276,26 @@
           <a:lstStyle/>
           <a:p>
             <a:r>
-              <a:rPr lang="it-IT" dirty="0"/>
+              <a:rPr lang="it-IT" dirty="0">
+                <a:latin typeface="Aptos" panose="020B0004020202020204" pitchFamily="34" charset="0"/>
+              </a:rPr>
               <a:t>The TCP/IP </a:t>
             </a:r>
             <a:r>
-              <a:rPr lang="it-IT" dirty="0" err="1"/>
+              <a:rPr lang="it-IT" dirty="0" err="1">
+                <a:latin typeface="Aptos" panose="020B0004020202020204" pitchFamily="34" charset="0"/>
+              </a:rPr>
               <a:t>reference</a:t>
             </a:r>
             <a:r>
-              <a:rPr lang="it-IT" dirty="0"/>
+              <a:rPr lang="it-IT" dirty="0">
+                <a:latin typeface="Aptos" panose="020B0004020202020204" pitchFamily="34" charset="0"/>
+              </a:rPr>
               <a:t> model</a:t>
             </a:r>
-            <a:endParaRPr lang="en-GB" dirty="0"/>
+            <a:endParaRPr lang="en-GB" dirty="0">
+              <a:latin typeface="Aptos" panose="020B0004020202020204" pitchFamily="34" charset="0"/>
+            </a:endParaRPr>
           </a:p>
         </p:txBody>
       </p:sp>
@@ -4119,102 +4322,152 @@
           <a:lstStyle/>
           <a:p>
             <a:r>
-              <a:rPr lang="en-GB" b="1" dirty="0"/>
+              <a:rPr lang="en-GB" b="1" dirty="0">
+                <a:latin typeface="Aptos" panose="020B0004020202020204" pitchFamily="34" charset="0"/>
+              </a:rPr>
               <a:t>Worldwide Internet</a:t>
             </a:r>
             <a:r>
-              <a:rPr lang="en-GB" dirty="0"/>
+              <a:rPr lang="en-GB" dirty="0">
+                <a:latin typeface="Aptos" panose="020B0004020202020204" pitchFamily="34" charset="0"/>
+              </a:rPr>
               <a:t>: the global system of interconnected computer networks that uses the Internet protocol suite (TCP/IP) to communicate between networks and devices.</a:t>
             </a:r>
-            <a:endParaRPr lang="it-IT" dirty="0"/>
-          </a:p>
-          <a:p>
-            <a:r>
-              <a:rPr lang="it-IT" dirty="0"/>
+            <a:endParaRPr lang="it-IT" dirty="0">
+              <a:latin typeface="Aptos" panose="020B0004020202020204" pitchFamily="34" charset="0"/>
+            </a:endParaRPr>
+          </a:p>
+          <a:p>
+            <a:r>
+              <a:rPr lang="it-IT" dirty="0">
+                <a:latin typeface="Aptos" panose="020B0004020202020204" pitchFamily="34" charset="0"/>
+              </a:rPr>
               <a:t>The </a:t>
             </a:r>
             <a:r>
-              <a:rPr lang="it-IT" dirty="0" err="1"/>
+              <a:rPr lang="it-IT" dirty="0" err="1">
+                <a:latin typeface="Aptos" panose="020B0004020202020204" pitchFamily="34" charset="0"/>
+              </a:rPr>
               <a:t>reference</a:t>
             </a:r>
             <a:r>
-              <a:rPr lang="it-IT" dirty="0"/>
+              <a:rPr lang="it-IT" dirty="0">
+                <a:latin typeface="Aptos" panose="020B0004020202020204" pitchFamily="34" charset="0"/>
+              </a:rPr>
               <a:t> model </a:t>
             </a:r>
             <a:r>
-              <a:rPr lang="it-IT" dirty="0" err="1"/>
+              <a:rPr lang="it-IT" dirty="0" err="1">
+                <a:latin typeface="Aptos" panose="020B0004020202020204" pitchFamily="34" charset="0"/>
+              </a:rPr>
               <a:t>used</a:t>
             </a:r>
             <a:r>
-              <a:rPr lang="it-IT" dirty="0"/>
+              <a:rPr lang="it-IT" dirty="0">
+                <a:latin typeface="Aptos" panose="020B0004020202020204" pitchFamily="34" charset="0"/>
+              </a:rPr>
               <a:t> by the </a:t>
             </a:r>
             <a:r>
-              <a:rPr lang="it-IT" dirty="0" err="1"/>
+              <a:rPr lang="it-IT" dirty="0" err="1">
+                <a:latin typeface="Aptos" panose="020B0004020202020204" pitchFamily="34" charset="0"/>
+              </a:rPr>
               <a:t>worldwide</a:t>
             </a:r>
             <a:r>
-              <a:rPr lang="it-IT" dirty="0"/>
+              <a:rPr lang="it-IT" dirty="0">
+                <a:latin typeface="Aptos" panose="020B0004020202020204" pitchFamily="34" charset="0"/>
+              </a:rPr>
               <a:t> Internet </a:t>
             </a:r>
             <a:r>
-              <a:rPr lang="it-IT" dirty="0" err="1"/>
+              <a:rPr lang="it-IT" dirty="0" err="1">
+                <a:latin typeface="Aptos" panose="020B0004020202020204" pitchFamily="34" charset="0"/>
+              </a:rPr>
               <a:t>is</a:t>
             </a:r>
             <a:r>
-              <a:rPr lang="it-IT" dirty="0"/>
+              <a:rPr lang="it-IT" dirty="0">
+                <a:latin typeface="Aptos" panose="020B0004020202020204" pitchFamily="34" charset="0"/>
+              </a:rPr>
               <a:t> </a:t>
             </a:r>
             <a:r>
-              <a:rPr lang="it-IT" dirty="0" err="1"/>
+              <a:rPr lang="it-IT" dirty="0" err="1">
+                <a:latin typeface="Aptos" panose="020B0004020202020204" pitchFamily="34" charset="0"/>
+              </a:rPr>
               <a:t>called</a:t>
             </a:r>
             <a:r>
-              <a:rPr lang="it-IT" dirty="0"/>
+              <a:rPr lang="it-IT" dirty="0">
+                <a:latin typeface="Aptos" panose="020B0004020202020204" pitchFamily="34" charset="0"/>
+              </a:rPr>
               <a:t> </a:t>
             </a:r>
             <a:r>
-              <a:rPr lang="it-IT" b="1" dirty="0"/>
+              <a:rPr lang="it-IT" b="1" dirty="0">
+                <a:latin typeface="Aptos" panose="020B0004020202020204" pitchFamily="34" charset="0"/>
+              </a:rPr>
               <a:t>TCP/IP </a:t>
             </a:r>
             <a:r>
-              <a:rPr lang="it-IT" b="1" dirty="0" err="1"/>
+              <a:rPr lang="it-IT" b="1" dirty="0" err="1">
+                <a:latin typeface="Aptos" panose="020B0004020202020204" pitchFamily="34" charset="0"/>
+              </a:rPr>
               <a:t>reference</a:t>
             </a:r>
             <a:r>
-              <a:rPr lang="it-IT" b="1" dirty="0"/>
+              <a:rPr lang="it-IT" b="1" dirty="0">
+                <a:latin typeface="Aptos" panose="020B0004020202020204" pitchFamily="34" charset="0"/>
+              </a:rPr>
               <a:t> model </a:t>
             </a:r>
             <a:r>
-              <a:rPr lang="it-IT" dirty="0"/>
+              <a:rPr lang="it-IT" dirty="0">
+                <a:latin typeface="Aptos" panose="020B0004020202020204" pitchFamily="34" charset="0"/>
+              </a:rPr>
               <a:t>and </a:t>
             </a:r>
             <a:r>
-              <a:rPr lang="it-IT" dirty="0" err="1"/>
+              <a:rPr lang="it-IT" dirty="0" err="1">
+                <a:latin typeface="Aptos" panose="020B0004020202020204" pitchFamily="34" charset="0"/>
+              </a:rPr>
               <a:t>it</a:t>
             </a:r>
             <a:r>
-              <a:rPr lang="it-IT" dirty="0"/>
+              <a:rPr lang="it-IT" dirty="0">
+                <a:latin typeface="Aptos" panose="020B0004020202020204" pitchFamily="34" charset="0"/>
+              </a:rPr>
               <a:t> </a:t>
             </a:r>
             <a:r>
-              <a:rPr lang="it-IT" dirty="0" err="1"/>
+              <a:rPr lang="it-IT" dirty="0" err="1">
+                <a:latin typeface="Aptos" panose="020B0004020202020204" pitchFamily="34" charset="0"/>
+              </a:rPr>
               <a:t>was</a:t>
             </a:r>
             <a:r>
-              <a:rPr lang="it-IT" dirty="0"/>
+              <a:rPr lang="it-IT" dirty="0">
+                <a:latin typeface="Aptos" panose="020B0004020202020204" pitchFamily="34" charset="0"/>
+              </a:rPr>
               <a:t> </a:t>
             </a:r>
             <a:r>
-              <a:rPr lang="it-IT" dirty="0" err="1"/>
+              <a:rPr lang="it-IT" dirty="0" err="1">
+                <a:latin typeface="Aptos" panose="020B0004020202020204" pitchFamily="34" charset="0"/>
+              </a:rPr>
               <a:t>introduced</a:t>
             </a:r>
             <a:r>
-              <a:rPr lang="it-IT" dirty="0"/>
+              <a:rPr lang="it-IT" dirty="0">
+                <a:latin typeface="Aptos" panose="020B0004020202020204" pitchFamily="34" charset="0"/>
+              </a:rPr>
               <a:t> by </a:t>
             </a:r>
             <a:r>
-              <a:rPr lang="en-GB" dirty="0"/>
+              <a:rPr lang="en-GB" dirty="0">
+                <a:latin typeface="Aptos" panose="020B0004020202020204" pitchFamily="34" charset="0"/>
+              </a:rPr>
               <a:t>Cerf and Kahn in 1974.</a:t>
             </a:r>
           </a:p>
@@ -4236,10 +4489,14 @@
           <a:lstStyle/>
           <a:p>
             <a:fld id="{31DE2C5B-556E-47B8-A792-024C2FCA4ACC}" type="slidenum">
-              <a:rPr lang="en-GB" smtClean="0"/>
+              <a:rPr lang="en-GB" smtClean="0">
+                <a:latin typeface="Aptos" panose="020B0004020202020204" pitchFamily="34" charset="0"/>
+              </a:rPr>
               <a:t>14</a:t>
             </a:fld>
-            <a:endParaRPr lang="en-GB"/>
+            <a:endParaRPr lang="en-GB">
+              <a:latin typeface="Aptos" panose="020B0004020202020204" pitchFamily="34" charset="0"/>
+            </a:endParaRPr>
           </a:p>
         </p:txBody>
       </p:sp>
@@ -4290,7 +4547,7 @@
                 <a:solidFill>
                   <a:sysClr val="windowText" lastClr="000000"/>
                 </a:solidFill>
-                <a:latin typeface="Palatino Linotype" panose="02040502050505030304" pitchFamily="18" charset="0"/>
+                <a:latin typeface="Aptos" panose="020B0004020202020204" pitchFamily="34" charset="0"/>
               </a:rPr>
               <a:t>Link </a:t>
             </a:r>
@@ -4299,7 +4556,7 @@
                 <a:solidFill>
                   <a:sysClr val="windowText" lastClr="000000"/>
                 </a:solidFill>
-                <a:latin typeface="Palatino Linotype" panose="02040502050505030304" pitchFamily="18" charset="0"/>
+                <a:latin typeface="Aptos" panose="020B0004020202020204" pitchFamily="34" charset="0"/>
               </a:rPr>
               <a:t>layer</a:t>
             </a:r>
@@ -4307,7 +4564,7 @@
               <a:solidFill>
                 <a:sysClr val="windowText" lastClr="000000"/>
               </a:solidFill>
-              <a:latin typeface="Palatino Linotype" panose="02040502050505030304" pitchFamily="18" charset="0"/>
+              <a:latin typeface="Aptos" panose="020B0004020202020204" pitchFamily="34" charset="0"/>
             </a:endParaRPr>
           </a:p>
         </p:txBody>
@@ -4359,7 +4616,7 @@
                 <a:solidFill>
                   <a:sysClr val="windowText" lastClr="000000"/>
                 </a:solidFill>
-                <a:latin typeface="Palatino Linotype" panose="02040502050505030304" pitchFamily="18" charset="0"/>
+                <a:latin typeface="Aptos" panose="020B0004020202020204" pitchFamily="34" charset="0"/>
               </a:rPr>
               <a:t>Network </a:t>
             </a:r>
@@ -4368,7 +4625,7 @@
                 <a:solidFill>
                   <a:sysClr val="windowText" lastClr="000000"/>
                 </a:solidFill>
-                <a:latin typeface="Palatino Linotype" panose="02040502050505030304" pitchFamily="18" charset="0"/>
+                <a:latin typeface="Aptos" panose="020B0004020202020204" pitchFamily="34" charset="0"/>
               </a:rPr>
               <a:t>layer</a:t>
             </a:r>
@@ -4376,7 +4633,7 @@
               <a:solidFill>
                 <a:sysClr val="windowText" lastClr="000000"/>
               </a:solidFill>
-              <a:latin typeface="Palatino Linotype" panose="02040502050505030304" pitchFamily="18" charset="0"/>
+              <a:latin typeface="Aptos" panose="020B0004020202020204" pitchFamily="34" charset="0"/>
             </a:endParaRPr>
           </a:p>
         </p:txBody>
@@ -4428,7 +4685,7 @@
                 <a:solidFill>
                   <a:sysClr val="windowText" lastClr="000000"/>
                 </a:solidFill>
-                <a:latin typeface="Palatino Linotype" panose="02040502050505030304" pitchFamily="18" charset="0"/>
+                <a:latin typeface="Aptos" panose="020B0004020202020204" pitchFamily="34" charset="0"/>
               </a:rPr>
               <a:t>Transport</a:t>
             </a:r>
@@ -4437,7 +4694,7 @@
                 <a:solidFill>
                   <a:sysClr val="windowText" lastClr="000000"/>
                 </a:solidFill>
-                <a:latin typeface="Palatino Linotype" panose="02040502050505030304" pitchFamily="18" charset="0"/>
+                <a:latin typeface="Aptos" panose="020B0004020202020204" pitchFamily="34" charset="0"/>
               </a:rPr>
               <a:t> </a:t>
             </a:r>
@@ -4446,7 +4703,7 @@
                 <a:solidFill>
                   <a:sysClr val="windowText" lastClr="000000"/>
                 </a:solidFill>
-                <a:latin typeface="Palatino Linotype" panose="02040502050505030304" pitchFamily="18" charset="0"/>
+                <a:latin typeface="Aptos" panose="020B0004020202020204" pitchFamily="34" charset="0"/>
               </a:rPr>
               <a:t>layer</a:t>
             </a:r>
@@ -4454,7 +4711,7 @@
               <a:solidFill>
                 <a:sysClr val="windowText" lastClr="000000"/>
               </a:solidFill>
-              <a:latin typeface="Palatino Linotype" panose="02040502050505030304" pitchFamily="18" charset="0"/>
+              <a:latin typeface="Aptos" panose="020B0004020202020204" pitchFamily="34" charset="0"/>
             </a:endParaRPr>
           </a:p>
         </p:txBody>
@@ -4506,7 +4763,7 @@
                 <a:solidFill>
                   <a:sysClr val="windowText" lastClr="000000"/>
                 </a:solidFill>
-                <a:latin typeface="Palatino Linotype" panose="02040502050505030304" pitchFamily="18" charset="0"/>
+                <a:latin typeface="Aptos" panose="020B0004020202020204" pitchFamily="34" charset="0"/>
               </a:rPr>
               <a:t>Application </a:t>
             </a:r>
@@ -4515,7 +4772,7 @@
                 <a:solidFill>
                   <a:sysClr val="windowText" lastClr="000000"/>
                 </a:solidFill>
-                <a:latin typeface="Palatino Linotype" panose="02040502050505030304" pitchFamily="18" charset="0"/>
+                <a:latin typeface="Aptos" panose="020B0004020202020204" pitchFamily="34" charset="0"/>
               </a:rPr>
               <a:t>layer</a:t>
             </a:r>
@@ -4523,7 +4780,7 @@
               <a:solidFill>
                 <a:sysClr val="windowText" lastClr="000000"/>
               </a:solidFill>
-              <a:latin typeface="Palatino Linotype" panose="02040502050505030304" pitchFamily="18" charset="0"/>
+              <a:latin typeface="Aptos" panose="020B0004020202020204" pitchFamily="34" charset="0"/>
             </a:endParaRPr>
           </a:p>
         </p:txBody>
@@ -4575,7 +4832,7 @@
                 <a:solidFill>
                   <a:sysClr val="windowText" lastClr="000000"/>
                 </a:solidFill>
-                <a:latin typeface="Palatino Linotype" panose="02040502050505030304" pitchFamily="18" charset="0"/>
+                <a:latin typeface="Aptos" panose="020B0004020202020204" pitchFamily="34" charset="0"/>
               </a:rPr>
               <a:t>Physical</a:t>
             </a:r>
@@ -4584,7 +4841,7 @@
                 <a:solidFill>
                   <a:sysClr val="windowText" lastClr="000000"/>
                 </a:solidFill>
-                <a:latin typeface="Palatino Linotype" panose="02040502050505030304" pitchFamily="18" charset="0"/>
+                <a:latin typeface="Aptos" panose="020B0004020202020204" pitchFamily="34" charset="0"/>
               </a:rPr>
               <a:t> </a:t>
             </a:r>
@@ -4593,7 +4850,7 @@
                 <a:solidFill>
                   <a:sysClr val="windowText" lastClr="000000"/>
                 </a:solidFill>
-                <a:latin typeface="Palatino Linotype" panose="02040502050505030304" pitchFamily="18" charset="0"/>
+                <a:latin typeface="Aptos" panose="020B0004020202020204" pitchFamily="34" charset="0"/>
               </a:rPr>
               <a:t>layer</a:t>
             </a:r>
@@ -4601,7 +4858,7 @@
               <a:solidFill>
                 <a:sysClr val="windowText" lastClr="000000"/>
               </a:solidFill>
-              <a:latin typeface="Palatino Linotype" panose="02040502050505030304" pitchFamily="18" charset="0"/>
+              <a:latin typeface="Aptos" panose="020B0004020202020204" pitchFamily="34" charset="0"/>
             </a:endParaRPr>
           </a:p>
         </p:txBody>
@@ -4654,18 +4911,26 @@
           <a:lstStyle/>
           <a:p>
             <a:r>
-              <a:rPr lang="it-IT" dirty="0"/>
+              <a:rPr lang="it-IT" dirty="0">
+                <a:latin typeface="Aptos" panose="020B0004020202020204" pitchFamily="34" charset="0"/>
+              </a:rPr>
               <a:t>The TCP/IP </a:t>
             </a:r>
             <a:r>
-              <a:rPr lang="it-IT" dirty="0" err="1"/>
+              <a:rPr lang="it-IT" dirty="0" err="1">
+                <a:latin typeface="Aptos" panose="020B0004020202020204" pitchFamily="34" charset="0"/>
+              </a:rPr>
               <a:t>reference</a:t>
             </a:r>
             <a:r>
-              <a:rPr lang="it-IT" dirty="0"/>
+              <a:rPr lang="it-IT" dirty="0">
+                <a:latin typeface="Aptos" panose="020B0004020202020204" pitchFamily="34" charset="0"/>
+              </a:rPr>
               <a:t> model</a:t>
             </a:r>
-            <a:endParaRPr lang="en-GB" dirty="0"/>
+            <a:endParaRPr lang="en-GB" dirty="0">
+              <a:latin typeface="Aptos" panose="020B0004020202020204" pitchFamily="34" charset="0"/>
+            </a:endParaRPr>
           </a:p>
         </p:txBody>
       </p:sp>
@@ -4685,10 +4950,14 @@
           <a:lstStyle/>
           <a:p>
             <a:fld id="{31DE2C5B-556E-47B8-A792-024C2FCA4ACC}" type="slidenum">
-              <a:rPr lang="en-GB" smtClean="0"/>
+              <a:rPr lang="en-GB" smtClean="0">
+                <a:latin typeface="Aptos" panose="020B0004020202020204" pitchFamily="34" charset="0"/>
+              </a:rPr>
               <a:t>15</a:t>
             </a:fld>
-            <a:endParaRPr lang="en-GB"/>
+            <a:endParaRPr lang="en-GB">
+              <a:latin typeface="Aptos" panose="020B0004020202020204" pitchFamily="34" charset="0"/>
+            </a:endParaRPr>
           </a:p>
         </p:txBody>
       </p:sp>
@@ -4742,12 +5011,12 @@
                 <a:solidFill>
                   <a:schemeClr val="tx1"/>
                 </a:solidFill>
-                <a:latin typeface="Palatino Linotype" panose="02040502050505030304" pitchFamily="18" charset="0"/>
+                <a:latin typeface="Aptos" panose="020B0004020202020204" pitchFamily="34" charset="0"/>
               </a:rPr>
               <a:t>It includes the protocols used by applications running on different hosts to communicate</a:t>
             </a:r>
             <a:endParaRPr lang="en-GB" sz="2400" dirty="0">
-              <a:latin typeface="Palatino Linotype" panose="02040502050505030304" pitchFamily="18" charset="0"/>
+              <a:latin typeface="Aptos" panose="020B0004020202020204" pitchFamily="34" charset="0"/>
             </a:endParaRPr>
           </a:p>
           <a:p>
@@ -4760,126 +5029,126 @@
             </a:pPr>
             <a:r>
               <a:rPr lang="it-IT" sz="2400" dirty="0" err="1">
-                <a:latin typeface="Palatino Linotype" panose="02040502050505030304" pitchFamily="18" charset="0"/>
+                <a:latin typeface="Aptos" panose="020B0004020202020204" pitchFamily="34" charset="0"/>
               </a:rPr>
               <a:t>Example</a:t>
             </a:r>
             <a:r>
               <a:rPr lang="it-IT" sz="2400" dirty="0">
-                <a:latin typeface="Palatino Linotype" panose="02040502050505030304" pitchFamily="18" charset="0"/>
+                <a:latin typeface="Aptos" panose="020B0004020202020204" pitchFamily="34" charset="0"/>
               </a:rPr>
               <a:t>: A Web browser can </a:t>
             </a:r>
             <a:r>
               <a:rPr lang="it-IT" sz="2400" dirty="0" err="1">
-                <a:latin typeface="Palatino Linotype" panose="02040502050505030304" pitchFamily="18" charset="0"/>
+                <a:latin typeface="Aptos" panose="020B0004020202020204" pitchFamily="34" charset="0"/>
               </a:rPr>
               <a:t>send</a:t>
             </a:r>
             <a:r>
               <a:rPr lang="it-IT" sz="2400" dirty="0">
-                <a:latin typeface="Palatino Linotype" panose="02040502050505030304" pitchFamily="18" charset="0"/>
+                <a:latin typeface="Aptos" panose="020B0004020202020204" pitchFamily="34" charset="0"/>
               </a:rPr>
               <a:t> </a:t>
             </a:r>
             <a:r>
               <a:rPr lang="it-IT" sz="2400" dirty="0" err="1">
-                <a:latin typeface="Palatino Linotype" panose="02040502050505030304" pitchFamily="18" charset="0"/>
+                <a:latin typeface="Aptos" panose="020B0004020202020204" pitchFamily="34" charset="0"/>
               </a:rPr>
               <a:t>requests</a:t>
             </a:r>
             <a:r>
               <a:rPr lang="it-IT" sz="2400" dirty="0">
-                <a:latin typeface="Palatino Linotype" panose="02040502050505030304" pitchFamily="18" charset="0"/>
+                <a:latin typeface="Aptos" panose="020B0004020202020204" pitchFamily="34" charset="0"/>
               </a:rPr>
               <a:t> to a Web server </a:t>
             </a:r>
             <a:r>
               <a:rPr lang="it-IT" sz="2400" dirty="0" err="1">
-                <a:latin typeface="Palatino Linotype" panose="02040502050505030304" pitchFamily="18" charset="0"/>
+                <a:latin typeface="Aptos" panose="020B0004020202020204" pitchFamily="34" charset="0"/>
               </a:rPr>
               <a:t>using</a:t>
             </a:r>
             <a:r>
               <a:rPr lang="it-IT" sz="2400" dirty="0">
-                <a:latin typeface="Palatino Linotype" panose="02040502050505030304" pitchFamily="18" charset="0"/>
+                <a:latin typeface="Aptos" panose="020B0004020202020204" pitchFamily="34" charset="0"/>
               </a:rPr>
               <a:t> the </a:t>
             </a:r>
             <a:r>
               <a:rPr lang="it-IT" sz="2400" b="1" dirty="0">
-                <a:latin typeface="Palatino Linotype" panose="02040502050505030304" pitchFamily="18" charset="0"/>
+                <a:latin typeface="Aptos" panose="020B0004020202020204" pitchFamily="34" charset="0"/>
               </a:rPr>
               <a:t>HTTP </a:t>
             </a:r>
             <a:r>
               <a:rPr lang="it-IT" sz="2400" b="1" dirty="0" err="1">
-                <a:latin typeface="Palatino Linotype" panose="02040502050505030304" pitchFamily="18" charset="0"/>
+                <a:latin typeface="Aptos" panose="020B0004020202020204" pitchFamily="34" charset="0"/>
               </a:rPr>
               <a:t>protocol</a:t>
             </a:r>
             <a:r>
               <a:rPr lang="it-IT" sz="2400" dirty="0">
-                <a:latin typeface="Palatino Linotype" panose="02040502050505030304" pitchFamily="18" charset="0"/>
+                <a:latin typeface="Aptos" panose="020B0004020202020204" pitchFamily="34" charset="0"/>
               </a:rPr>
               <a:t>, </a:t>
             </a:r>
             <a:r>
               <a:rPr lang="it-IT" sz="2400" dirty="0" err="1">
-                <a:latin typeface="Palatino Linotype" panose="02040502050505030304" pitchFamily="18" charset="0"/>
+                <a:latin typeface="Aptos" panose="020B0004020202020204" pitchFamily="34" charset="0"/>
               </a:rPr>
               <a:t>which</a:t>
             </a:r>
             <a:r>
               <a:rPr lang="it-IT" sz="2400" dirty="0">
-                <a:latin typeface="Palatino Linotype" panose="02040502050505030304" pitchFamily="18" charset="0"/>
+                <a:latin typeface="Aptos" panose="020B0004020202020204" pitchFamily="34" charset="0"/>
               </a:rPr>
               <a:t> </a:t>
             </a:r>
             <a:r>
               <a:rPr lang="it-IT" sz="2400" dirty="0" err="1">
-                <a:latin typeface="Palatino Linotype" panose="02040502050505030304" pitchFamily="18" charset="0"/>
+                <a:latin typeface="Aptos" panose="020B0004020202020204" pitchFamily="34" charset="0"/>
               </a:rPr>
               <a:t>is</a:t>
             </a:r>
             <a:r>
               <a:rPr lang="it-IT" sz="2400" dirty="0">
-                <a:latin typeface="Palatino Linotype" panose="02040502050505030304" pitchFamily="18" charset="0"/>
+                <a:latin typeface="Aptos" panose="020B0004020202020204" pitchFamily="34" charset="0"/>
               </a:rPr>
               <a:t> a </a:t>
             </a:r>
             <a:r>
               <a:rPr lang="it-IT" sz="2400" dirty="0" err="1">
-                <a:latin typeface="Palatino Linotype" panose="02040502050505030304" pitchFamily="18" charset="0"/>
+                <a:latin typeface="Aptos" panose="020B0004020202020204" pitchFamily="34" charset="0"/>
               </a:rPr>
               <a:t>protocol</a:t>
             </a:r>
             <a:r>
               <a:rPr lang="it-IT" sz="2400" dirty="0">
-                <a:latin typeface="Palatino Linotype" panose="02040502050505030304" pitchFamily="18" charset="0"/>
+                <a:latin typeface="Aptos" panose="020B0004020202020204" pitchFamily="34" charset="0"/>
               </a:rPr>
               <a:t> of the </a:t>
             </a:r>
             <a:r>
               <a:rPr lang="it-IT" sz="2400" dirty="0" err="1">
-                <a:latin typeface="Palatino Linotype" panose="02040502050505030304" pitchFamily="18" charset="0"/>
+                <a:latin typeface="Aptos" panose="020B0004020202020204" pitchFamily="34" charset="0"/>
               </a:rPr>
               <a:t>application</a:t>
             </a:r>
             <a:r>
               <a:rPr lang="it-IT" sz="2400" dirty="0">
-                <a:latin typeface="Palatino Linotype" panose="02040502050505030304" pitchFamily="18" charset="0"/>
+                <a:latin typeface="Aptos" panose="020B0004020202020204" pitchFamily="34" charset="0"/>
               </a:rPr>
               <a:t> </a:t>
             </a:r>
             <a:r>
               <a:rPr lang="it-IT" sz="2400" dirty="0" err="1">
-                <a:latin typeface="Palatino Linotype" panose="02040502050505030304" pitchFamily="18" charset="0"/>
+                <a:latin typeface="Aptos" panose="020B0004020202020204" pitchFamily="34" charset="0"/>
               </a:rPr>
               <a:t>layer</a:t>
             </a:r>
             <a:endParaRPr lang="en-GB" sz="2400" dirty="0">
-              <a:latin typeface="Palatino Linotype" panose="02040502050505030304" pitchFamily="18" charset="0"/>
+              <a:latin typeface="Aptos" panose="020B0004020202020204" pitchFamily="34" charset="0"/>
             </a:endParaRPr>
           </a:p>
         </p:txBody>
@@ -4967,7 +5236,7 @@
                 <a:solidFill>
                   <a:sysClr val="windowText" lastClr="000000"/>
                 </a:solidFill>
-                <a:latin typeface="Palatino Linotype" panose="02040502050505030304" pitchFamily="18" charset="0"/>
+                <a:latin typeface="Aptos" panose="020B0004020202020204" pitchFamily="34" charset="0"/>
               </a:rPr>
               <a:t>Link </a:t>
             </a:r>
@@ -4976,7 +5245,7 @@
                 <a:solidFill>
                   <a:sysClr val="windowText" lastClr="000000"/>
                 </a:solidFill>
-                <a:latin typeface="Palatino Linotype" panose="02040502050505030304" pitchFamily="18" charset="0"/>
+                <a:latin typeface="Aptos" panose="020B0004020202020204" pitchFamily="34" charset="0"/>
               </a:rPr>
               <a:t>layer</a:t>
             </a:r>
@@ -4984,7 +5253,7 @@
               <a:solidFill>
                 <a:sysClr val="windowText" lastClr="000000"/>
               </a:solidFill>
-              <a:latin typeface="Palatino Linotype" panose="02040502050505030304" pitchFamily="18" charset="0"/>
+              <a:latin typeface="Aptos" panose="020B0004020202020204" pitchFamily="34" charset="0"/>
             </a:endParaRPr>
           </a:p>
         </p:txBody>
@@ -5036,7 +5305,7 @@
                 <a:solidFill>
                   <a:sysClr val="windowText" lastClr="000000"/>
                 </a:solidFill>
-                <a:latin typeface="Palatino Linotype" panose="02040502050505030304" pitchFamily="18" charset="0"/>
+                <a:latin typeface="Aptos" panose="020B0004020202020204" pitchFamily="34" charset="0"/>
               </a:rPr>
               <a:t>Network </a:t>
             </a:r>
@@ -5045,7 +5314,7 @@
                 <a:solidFill>
                   <a:sysClr val="windowText" lastClr="000000"/>
                 </a:solidFill>
-                <a:latin typeface="Palatino Linotype" panose="02040502050505030304" pitchFamily="18" charset="0"/>
+                <a:latin typeface="Aptos" panose="020B0004020202020204" pitchFamily="34" charset="0"/>
               </a:rPr>
               <a:t>layer</a:t>
             </a:r>
@@ -5053,7 +5322,7 @@
               <a:solidFill>
                 <a:sysClr val="windowText" lastClr="000000"/>
               </a:solidFill>
-              <a:latin typeface="Palatino Linotype" panose="02040502050505030304" pitchFamily="18" charset="0"/>
+              <a:latin typeface="Aptos" panose="020B0004020202020204" pitchFamily="34" charset="0"/>
             </a:endParaRPr>
           </a:p>
         </p:txBody>
@@ -5105,7 +5374,7 @@
                 <a:solidFill>
                   <a:sysClr val="windowText" lastClr="000000"/>
                 </a:solidFill>
-                <a:latin typeface="Palatino Linotype" panose="02040502050505030304" pitchFamily="18" charset="0"/>
+                <a:latin typeface="Aptos" panose="020B0004020202020204" pitchFamily="34" charset="0"/>
               </a:rPr>
               <a:t>Transport</a:t>
             </a:r>
@@ -5114,7 +5383,7 @@
                 <a:solidFill>
                   <a:sysClr val="windowText" lastClr="000000"/>
                 </a:solidFill>
-                <a:latin typeface="Palatino Linotype" panose="02040502050505030304" pitchFamily="18" charset="0"/>
+                <a:latin typeface="Aptos" panose="020B0004020202020204" pitchFamily="34" charset="0"/>
               </a:rPr>
               <a:t> </a:t>
             </a:r>
@@ -5123,7 +5392,7 @@
                 <a:solidFill>
                   <a:sysClr val="windowText" lastClr="000000"/>
                 </a:solidFill>
-                <a:latin typeface="Palatino Linotype" panose="02040502050505030304" pitchFamily="18" charset="0"/>
+                <a:latin typeface="Aptos" panose="020B0004020202020204" pitchFamily="34" charset="0"/>
               </a:rPr>
               <a:t>layer</a:t>
             </a:r>
@@ -5131,7 +5400,7 @@
               <a:solidFill>
                 <a:sysClr val="windowText" lastClr="000000"/>
               </a:solidFill>
-              <a:latin typeface="Palatino Linotype" panose="02040502050505030304" pitchFamily="18" charset="0"/>
+              <a:latin typeface="Aptos" panose="020B0004020202020204" pitchFamily="34" charset="0"/>
             </a:endParaRPr>
           </a:p>
         </p:txBody>
@@ -5183,7 +5452,7 @@
                 <a:solidFill>
                   <a:sysClr val="windowText" lastClr="000000"/>
                 </a:solidFill>
-                <a:latin typeface="Palatino Linotype" panose="02040502050505030304" pitchFamily="18" charset="0"/>
+                <a:latin typeface="Aptos" panose="020B0004020202020204" pitchFamily="34" charset="0"/>
               </a:rPr>
               <a:t>Application </a:t>
             </a:r>
@@ -5192,7 +5461,7 @@
                 <a:solidFill>
                   <a:sysClr val="windowText" lastClr="000000"/>
                 </a:solidFill>
-                <a:latin typeface="Palatino Linotype" panose="02040502050505030304" pitchFamily="18" charset="0"/>
+                <a:latin typeface="Aptos" panose="020B0004020202020204" pitchFamily="34" charset="0"/>
               </a:rPr>
               <a:t>layer</a:t>
             </a:r>
@@ -5200,7 +5469,7 @@
               <a:solidFill>
                 <a:sysClr val="windowText" lastClr="000000"/>
               </a:solidFill>
-              <a:latin typeface="Palatino Linotype" panose="02040502050505030304" pitchFamily="18" charset="0"/>
+              <a:latin typeface="Aptos" panose="020B0004020202020204" pitchFamily="34" charset="0"/>
             </a:endParaRPr>
           </a:p>
         </p:txBody>
@@ -5252,7 +5521,7 @@
                 <a:solidFill>
                   <a:sysClr val="windowText" lastClr="000000"/>
                 </a:solidFill>
-                <a:latin typeface="Palatino Linotype" panose="02040502050505030304" pitchFamily="18" charset="0"/>
+                <a:latin typeface="Aptos" panose="020B0004020202020204" pitchFamily="34" charset="0"/>
               </a:rPr>
               <a:t>Physical</a:t>
             </a:r>
@@ -5261,7 +5530,7 @@
                 <a:solidFill>
                   <a:sysClr val="windowText" lastClr="000000"/>
                 </a:solidFill>
-                <a:latin typeface="Palatino Linotype" panose="02040502050505030304" pitchFamily="18" charset="0"/>
+                <a:latin typeface="Aptos" panose="020B0004020202020204" pitchFamily="34" charset="0"/>
               </a:rPr>
               <a:t> </a:t>
             </a:r>
@@ -5270,7 +5539,7 @@
                 <a:solidFill>
                   <a:sysClr val="windowText" lastClr="000000"/>
                 </a:solidFill>
-                <a:latin typeface="Palatino Linotype" panose="02040502050505030304" pitchFamily="18" charset="0"/>
+                <a:latin typeface="Aptos" panose="020B0004020202020204" pitchFamily="34" charset="0"/>
               </a:rPr>
               <a:t>layer</a:t>
             </a:r>
@@ -5278,7 +5547,7 @@
               <a:solidFill>
                 <a:sysClr val="windowText" lastClr="000000"/>
               </a:solidFill>
-              <a:latin typeface="Palatino Linotype" panose="02040502050505030304" pitchFamily="18" charset="0"/>
+              <a:latin typeface="Aptos" panose="020B0004020202020204" pitchFamily="34" charset="0"/>
             </a:endParaRPr>
           </a:p>
         </p:txBody>
@@ -5352,7 +5621,9 @@
           <a:lstStyle/>
           <a:p>
             <a:pPr algn="ctr"/>
-            <a:endParaRPr lang="en-GB"/>
+            <a:endParaRPr lang="en-GB">
+              <a:latin typeface="Aptos" panose="020B0004020202020204" pitchFamily="34" charset="0"/>
+            </a:endParaRPr>
           </a:p>
         </p:txBody>
       </p:sp>
@@ -5374,18 +5645,26 @@
           <a:lstStyle/>
           <a:p>
             <a:r>
-              <a:rPr lang="it-IT" dirty="0"/>
+              <a:rPr lang="it-IT" dirty="0">
+                <a:latin typeface="Aptos" panose="020B0004020202020204" pitchFamily="34" charset="0"/>
+              </a:rPr>
               <a:t>The TCP/IP </a:t>
             </a:r>
             <a:r>
-              <a:rPr lang="it-IT" dirty="0" err="1"/>
+              <a:rPr lang="it-IT" dirty="0" err="1">
+                <a:latin typeface="Aptos" panose="020B0004020202020204" pitchFamily="34" charset="0"/>
+              </a:rPr>
               <a:t>reference</a:t>
             </a:r>
             <a:r>
-              <a:rPr lang="it-IT" dirty="0"/>
+              <a:rPr lang="it-IT" dirty="0">
+                <a:latin typeface="Aptos" panose="020B0004020202020204" pitchFamily="34" charset="0"/>
+              </a:rPr>
               <a:t> model</a:t>
             </a:r>
-            <a:endParaRPr lang="en-GB" dirty="0"/>
+            <a:endParaRPr lang="en-GB" dirty="0">
+              <a:latin typeface="Aptos" panose="020B0004020202020204" pitchFamily="34" charset="0"/>
+            </a:endParaRPr>
           </a:p>
         </p:txBody>
       </p:sp>
@@ -5405,10 +5684,14 @@
           <a:lstStyle/>
           <a:p>
             <a:fld id="{31DE2C5B-556E-47B8-A792-024C2FCA4ACC}" type="slidenum">
-              <a:rPr lang="en-GB" smtClean="0"/>
+              <a:rPr lang="en-GB" smtClean="0">
+                <a:latin typeface="Aptos" panose="020B0004020202020204" pitchFamily="34" charset="0"/>
+              </a:rPr>
               <a:t>16</a:t>
             </a:fld>
-            <a:endParaRPr lang="en-GB"/>
+            <a:endParaRPr lang="en-GB">
+              <a:latin typeface="Aptos" panose="020B0004020202020204" pitchFamily="34" charset="0"/>
+            </a:endParaRPr>
           </a:p>
         </p:txBody>
       </p:sp>
@@ -5462,12 +5745,12 @@
                 <a:solidFill>
                   <a:schemeClr val="tx1"/>
                 </a:solidFill>
-                <a:latin typeface="Palatino Linotype" panose="02040502050505030304" pitchFamily="18" charset="0"/>
+                <a:latin typeface="Aptos" panose="020B0004020202020204" pitchFamily="34" charset="0"/>
               </a:rPr>
               <a:t>It creates and maintain conversations between applications on two hosts</a:t>
             </a:r>
             <a:endParaRPr lang="en-GB" sz="2400" dirty="0">
-              <a:latin typeface="Palatino Linotype" panose="02040502050505030304" pitchFamily="18" charset="0"/>
+              <a:latin typeface="Aptos" panose="020B0004020202020204" pitchFamily="34" charset="0"/>
             </a:endParaRPr>
           </a:p>
           <a:p>
@@ -5480,73 +5763,73 @@
             </a:pPr>
             <a:r>
               <a:rPr lang="it-IT" sz="2400" dirty="0" err="1">
-                <a:latin typeface="Palatino Linotype" panose="02040502050505030304" pitchFamily="18" charset="0"/>
+                <a:latin typeface="Aptos" panose="020B0004020202020204" pitchFamily="34" charset="0"/>
               </a:rPr>
               <a:t>Two</a:t>
             </a:r>
             <a:r>
               <a:rPr lang="it-IT" sz="2400" dirty="0">
-                <a:latin typeface="Palatino Linotype" panose="02040502050505030304" pitchFamily="18" charset="0"/>
+                <a:latin typeface="Aptos" panose="020B0004020202020204" pitchFamily="34" charset="0"/>
               </a:rPr>
               <a:t> </a:t>
             </a:r>
             <a:r>
               <a:rPr lang="it-IT" sz="2400" dirty="0" err="1">
-                <a:latin typeface="Palatino Linotype" panose="02040502050505030304" pitchFamily="18" charset="0"/>
+                <a:latin typeface="Aptos" panose="020B0004020202020204" pitchFamily="34" charset="0"/>
               </a:rPr>
               <a:t>transport</a:t>
             </a:r>
             <a:r>
               <a:rPr lang="it-IT" sz="2400" dirty="0">
-                <a:latin typeface="Palatino Linotype" panose="02040502050505030304" pitchFamily="18" charset="0"/>
+                <a:latin typeface="Aptos" panose="020B0004020202020204" pitchFamily="34" charset="0"/>
               </a:rPr>
               <a:t> </a:t>
             </a:r>
             <a:r>
               <a:rPr lang="it-IT" sz="2400" dirty="0" err="1">
-                <a:latin typeface="Palatino Linotype" panose="02040502050505030304" pitchFamily="18" charset="0"/>
+                <a:latin typeface="Aptos" panose="020B0004020202020204" pitchFamily="34" charset="0"/>
               </a:rPr>
               <a:t>protocols</a:t>
             </a:r>
             <a:r>
               <a:rPr lang="it-IT" sz="2400" dirty="0">
-                <a:latin typeface="Palatino Linotype" panose="02040502050505030304" pitchFamily="18" charset="0"/>
+                <a:latin typeface="Aptos" panose="020B0004020202020204" pitchFamily="34" charset="0"/>
               </a:rPr>
               <a:t> </a:t>
             </a:r>
             <a:r>
               <a:rPr lang="it-IT" sz="2400" dirty="0" err="1">
-                <a:latin typeface="Palatino Linotype" panose="02040502050505030304" pitchFamily="18" charset="0"/>
+                <a:latin typeface="Aptos" panose="020B0004020202020204" pitchFamily="34" charset="0"/>
               </a:rPr>
               <a:t>have</a:t>
             </a:r>
             <a:r>
               <a:rPr lang="it-IT" sz="2400" dirty="0">
-                <a:latin typeface="Palatino Linotype" panose="02040502050505030304" pitchFamily="18" charset="0"/>
+                <a:latin typeface="Aptos" panose="020B0004020202020204" pitchFamily="34" charset="0"/>
               </a:rPr>
               <a:t> </a:t>
             </a:r>
             <a:r>
               <a:rPr lang="it-IT" sz="2400" dirty="0" err="1">
-                <a:latin typeface="Palatino Linotype" panose="02040502050505030304" pitchFamily="18" charset="0"/>
+                <a:latin typeface="Aptos" panose="020B0004020202020204" pitchFamily="34" charset="0"/>
               </a:rPr>
               <a:t>been</a:t>
             </a:r>
             <a:r>
               <a:rPr lang="it-IT" sz="2400" dirty="0">
-                <a:latin typeface="Palatino Linotype" panose="02040502050505030304" pitchFamily="18" charset="0"/>
+                <a:latin typeface="Aptos" panose="020B0004020202020204" pitchFamily="34" charset="0"/>
               </a:rPr>
               <a:t> </a:t>
             </a:r>
             <a:r>
               <a:rPr lang="it-IT" sz="2400" dirty="0" err="1">
-                <a:latin typeface="Palatino Linotype" panose="02040502050505030304" pitchFamily="18" charset="0"/>
+                <a:latin typeface="Aptos" panose="020B0004020202020204" pitchFamily="34" charset="0"/>
               </a:rPr>
               <a:t>defined</a:t>
             </a:r>
             <a:r>
               <a:rPr lang="it-IT" sz="2400" dirty="0">
-                <a:latin typeface="Palatino Linotype" panose="02040502050505030304" pitchFamily="18" charset="0"/>
+                <a:latin typeface="Aptos" panose="020B0004020202020204" pitchFamily="34" charset="0"/>
               </a:rPr>
               <a:t>: </a:t>
             </a:r>
@@ -5561,37 +5844,37 @@
             </a:pPr>
             <a:r>
               <a:rPr lang="it-IT" sz="2200" b="1" dirty="0" err="1">
-                <a:latin typeface="Palatino Linotype" panose="02040502050505030304" pitchFamily="18" charset="0"/>
+                <a:latin typeface="Aptos" panose="020B0004020202020204" pitchFamily="34" charset="0"/>
               </a:rPr>
               <a:t>Transmission</a:t>
             </a:r>
             <a:r>
               <a:rPr lang="it-IT" sz="2200" b="1" dirty="0">
-                <a:latin typeface="Palatino Linotype" panose="02040502050505030304" pitchFamily="18" charset="0"/>
+                <a:latin typeface="Aptos" panose="020B0004020202020204" pitchFamily="34" charset="0"/>
               </a:rPr>
               <a:t> control </a:t>
             </a:r>
             <a:r>
               <a:rPr lang="it-IT" sz="2200" b="1" dirty="0" err="1">
-                <a:latin typeface="Palatino Linotype" panose="02040502050505030304" pitchFamily="18" charset="0"/>
+                <a:latin typeface="Aptos" panose="020B0004020202020204" pitchFamily="34" charset="0"/>
               </a:rPr>
               <a:t>protocol</a:t>
             </a:r>
             <a:r>
               <a:rPr lang="it-IT" sz="2200" b="1" dirty="0">
-                <a:latin typeface="Palatino Linotype" panose="02040502050505030304" pitchFamily="18" charset="0"/>
+                <a:latin typeface="Aptos" panose="020B0004020202020204" pitchFamily="34" charset="0"/>
               </a:rPr>
               <a:t> (TCP)</a:t>
             </a:r>
             <a:r>
               <a:rPr lang="it-IT" sz="2200" dirty="0">
-                <a:latin typeface="Palatino Linotype" panose="02040502050505030304" pitchFamily="18" charset="0"/>
+                <a:latin typeface="Aptos" panose="020B0004020202020204" pitchFamily="34" charset="0"/>
               </a:rPr>
               <a:t>: </a:t>
             </a:r>
             <a:r>
               <a:rPr lang="en-GB" sz="2200" dirty="0">
-                <a:latin typeface="Palatino Linotype" panose="02040502050505030304" pitchFamily="18" charset="0"/>
+                <a:latin typeface="Aptos" panose="020B0004020202020204" pitchFamily="34" charset="0"/>
               </a:rPr>
               <a:t>a reliable connection-oriented protocol that allows a byte stream delivery without </a:t>
             </a:r>
@@ -5600,13 +5883,13 @@
                 <a:solidFill>
                   <a:srgbClr val="FF0000"/>
                 </a:solidFill>
-                <a:latin typeface="Palatino Linotype" panose="02040502050505030304" pitchFamily="18" charset="0"/>
+                <a:latin typeface="Aptos" panose="020B0004020202020204" pitchFamily="34" charset="0"/>
               </a:rPr>
               <a:t>errors.</a:t>
             </a:r>
             <a:r>
               <a:rPr lang="it-IT" sz="2200" dirty="0">
-                <a:latin typeface="Palatino Linotype" panose="02040502050505030304" pitchFamily="18" charset="0"/>
+                <a:latin typeface="Aptos" panose="020B0004020202020204" pitchFamily="34" charset="0"/>
               </a:rPr>
               <a:t> </a:t>
             </a:r>
@@ -5621,18 +5904,18 @@
             </a:pPr>
             <a:r>
               <a:rPr lang="en-GB" sz="2200" b="1" dirty="0">
-                <a:latin typeface="Palatino Linotype" panose="02040502050505030304" pitchFamily="18" charset="0"/>
+                <a:latin typeface="Aptos" panose="020B0004020202020204" pitchFamily="34" charset="0"/>
               </a:rPr>
               <a:t>User Datagram Protocol (UDP)</a:t>
             </a:r>
             <a:r>
               <a:rPr lang="en-GB" sz="2200" dirty="0">
-                <a:latin typeface="Palatino Linotype" panose="02040502050505030304" pitchFamily="18" charset="0"/>
+                <a:latin typeface="Aptos" panose="020B0004020202020204" pitchFamily="34" charset="0"/>
               </a:rPr>
               <a:t>: an unreliable, connectionless protocol for applications in which prompt delivery is more important than accurate delivery (e.g., speech or video).</a:t>
             </a:r>
             <a:endParaRPr lang="it-IT" sz="2200" dirty="0">
-              <a:latin typeface="Palatino Linotype" panose="02040502050505030304" pitchFamily="18" charset="0"/>
+              <a:latin typeface="Aptos" panose="020B0004020202020204" pitchFamily="34" charset="0"/>
             </a:endParaRPr>
           </a:p>
         </p:txBody>
@@ -5720,7 +6003,7 @@
                 <a:solidFill>
                   <a:sysClr val="windowText" lastClr="000000"/>
                 </a:solidFill>
-                <a:latin typeface="Palatino Linotype" panose="02040502050505030304" pitchFamily="18" charset="0"/>
+                <a:latin typeface="Aptos" panose="020B0004020202020204" pitchFamily="34" charset="0"/>
               </a:rPr>
               <a:t>Link </a:t>
             </a:r>
@@ -5729,7 +6012,7 @@
                 <a:solidFill>
                   <a:sysClr val="windowText" lastClr="000000"/>
                 </a:solidFill>
-                <a:latin typeface="Palatino Linotype" panose="02040502050505030304" pitchFamily="18" charset="0"/>
+                <a:latin typeface="Aptos" panose="020B0004020202020204" pitchFamily="34" charset="0"/>
               </a:rPr>
               <a:t>layer</a:t>
             </a:r>
@@ -5737,7 +6020,7 @@
               <a:solidFill>
                 <a:sysClr val="windowText" lastClr="000000"/>
               </a:solidFill>
-              <a:latin typeface="Palatino Linotype" panose="02040502050505030304" pitchFamily="18" charset="0"/>
+              <a:latin typeface="Aptos" panose="020B0004020202020204" pitchFamily="34" charset="0"/>
             </a:endParaRPr>
           </a:p>
         </p:txBody>
@@ -5789,7 +6072,7 @@
                 <a:solidFill>
                   <a:sysClr val="windowText" lastClr="000000"/>
                 </a:solidFill>
-                <a:latin typeface="Palatino Linotype" panose="02040502050505030304" pitchFamily="18" charset="0"/>
+                <a:latin typeface="Aptos" panose="020B0004020202020204" pitchFamily="34" charset="0"/>
               </a:rPr>
               <a:t>Network </a:t>
             </a:r>
@@ -5798,7 +6081,7 @@
                 <a:solidFill>
                   <a:sysClr val="windowText" lastClr="000000"/>
                 </a:solidFill>
-                <a:latin typeface="Palatino Linotype" panose="02040502050505030304" pitchFamily="18" charset="0"/>
+                <a:latin typeface="Aptos" panose="020B0004020202020204" pitchFamily="34" charset="0"/>
               </a:rPr>
               <a:t>layer</a:t>
             </a:r>
@@ -5806,7 +6089,7 @@
               <a:solidFill>
                 <a:sysClr val="windowText" lastClr="000000"/>
               </a:solidFill>
-              <a:latin typeface="Palatino Linotype" panose="02040502050505030304" pitchFamily="18" charset="0"/>
+              <a:latin typeface="Aptos" panose="020B0004020202020204" pitchFamily="34" charset="0"/>
             </a:endParaRPr>
           </a:p>
         </p:txBody>
@@ -5858,7 +6141,7 @@
                 <a:solidFill>
                   <a:sysClr val="windowText" lastClr="000000"/>
                 </a:solidFill>
-                <a:latin typeface="Palatino Linotype" panose="02040502050505030304" pitchFamily="18" charset="0"/>
+                <a:latin typeface="Aptos" panose="020B0004020202020204" pitchFamily="34" charset="0"/>
               </a:rPr>
               <a:t>Transport</a:t>
             </a:r>
@@ -5867,7 +6150,7 @@
                 <a:solidFill>
                   <a:sysClr val="windowText" lastClr="000000"/>
                 </a:solidFill>
-                <a:latin typeface="Palatino Linotype" panose="02040502050505030304" pitchFamily="18" charset="0"/>
+                <a:latin typeface="Aptos" panose="020B0004020202020204" pitchFamily="34" charset="0"/>
               </a:rPr>
               <a:t> </a:t>
             </a:r>
@@ -5876,7 +6159,7 @@
                 <a:solidFill>
                   <a:sysClr val="windowText" lastClr="000000"/>
                 </a:solidFill>
-                <a:latin typeface="Palatino Linotype" panose="02040502050505030304" pitchFamily="18" charset="0"/>
+                <a:latin typeface="Aptos" panose="020B0004020202020204" pitchFamily="34" charset="0"/>
               </a:rPr>
               <a:t>layer</a:t>
             </a:r>
@@ -5884,7 +6167,7 @@
               <a:solidFill>
                 <a:sysClr val="windowText" lastClr="000000"/>
               </a:solidFill>
-              <a:latin typeface="Palatino Linotype" panose="02040502050505030304" pitchFamily="18" charset="0"/>
+              <a:latin typeface="Aptos" panose="020B0004020202020204" pitchFamily="34" charset="0"/>
             </a:endParaRPr>
           </a:p>
         </p:txBody>
@@ -5936,7 +6219,7 @@
                 <a:solidFill>
                   <a:sysClr val="windowText" lastClr="000000"/>
                 </a:solidFill>
-                <a:latin typeface="Palatino Linotype" panose="02040502050505030304" pitchFamily="18" charset="0"/>
+                <a:latin typeface="Aptos" panose="020B0004020202020204" pitchFamily="34" charset="0"/>
               </a:rPr>
               <a:t>Application </a:t>
             </a:r>
@@ -5945,7 +6228,7 @@
                 <a:solidFill>
                   <a:sysClr val="windowText" lastClr="000000"/>
                 </a:solidFill>
-                <a:latin typeface="Palatino Linotype" panose="02040502050505030304" pitchFamily="18" charset="0"/>
+                <a:latin typeface="Aptos" panose="020B0004020202020204" pitchFamily="34" charset="0"/>
               </a:rPr>
               <a:t>layer</a:t>
             </a:r>
@@ -5953,7 +6236,7 @@
               <a:solidFill>
                 <a:sysClr val="windowText" lastClr="000000"/>
               </a:solidFill>
-              <a:latin typeface="Palatino Linotype" panose="02040502050505030304" pitchFamily="18" charset="0"/>
+              <a:latin typeface="Aptos" panose="020B0004020202020204" pitchFamily="34" charset="0"/>
             </a:endParaRPr>
           </a:p>
         </p:txBody>
@@ -6005,7 +6288,7 @@
                 <a:solidFill>
                   <a:sysClr val="windowText" lastClr="000000"/>
                 </a:solidFill>
-                <a:latin typeface="Palatino Linotype" panose="02040502050505030304" pitchFamily="18" charset="0"/>
+                <a:latin typeface="Aptos" panose="020B0004020202020204" pitchFamily="34" charset="0"/>
               </a:rPr>
               <a:t>Physical</a:t>
             </a:r>
@@ -6014,7 +6297,7 @@
                 <a:solidFill>
                   <a:sysClr val="windowText" lastClr="000000"/>
                 </a:solidFill>
-                <a:latin typeface="Palatino Linotype" panose="02040502050505030304" pitchFamily="18" charset="0"/>
+                <a:latin typeface="Aptos" panose="020B0004020202020204" pitchFamily="34" charset="0"/>
               </a:rPr>
               <a:t> </a:t>
             </a:r>
@@ -6023,7 +6306,7 @@
                 <a:solidFill>
                   <a:sysClr val="windowText" lastClr="000000"/>
                 </a:solidFill>
-                <a:latin typeface="Palatino Linotype" panose="02040502050505030304" pitchFamily="18" charset="0"/>
+                <a:latin typeface="Aptos" panose="020B0004020202020204" pitchFamily="34" charset="0"/>
               </a:rPr>
               <a:t>layer</a:t>
             </a:r>
@@ -6031,7 +6314,7 @@
               <a:solidFill>
                 <a:sysClr val="windowText" lastClr="000000"/>
               </a:solidFill>
-              <a:latin typeface="Palatino Linotype" panose="02040502050505030304" pitchFamily="18" charset="0"/>
+              <a:latin typeface="Aptos" panose="020B0004020202020204" pitchFamily="34" charset="0"/>
             </a:endParaRPr>
           </a:p>
         </p:txBody>
@@ -6078,12 +6361,12 @@
             <a:pPr algn="ctr"/>
             <a:r>
               <a:rPr lang="it-IT" dirty="0">
-                <a:latin typeface="Palatino Linotype" panose="02040502050505030304" pitchFamily="18" charset="0"/>
+                <a:latin typeface="Aptos" panose="020B0004020202020204" pitchFamily="34" charset="0"/>
               </a:rPr>
               <a:t>Data</a:t>
             </a:r>
             <a:endParaRPr lang="en-GB" dirty="0">
-              <a:latin typeface="Palatino Linotype" panose="02040502050505030304" pitchFamily="18" charset="0"/>
+              <a:latin typeface="Aptos" panose="020B0004020202020204" pitchFamily="34" charset="0"/>
             </a:endParaRPr>
           </a:p>
         </p:txBody>
@@ -6130,18 +6413,18 @@
             <a:pPr algn="ctr"/>
             <a:r>
               <a:rPr lang="it-IT" dirty="0">
-                <a:latin typeface="Palatino Linotype" panose="02040502050505030304" pitchFamily="18" charset="0"/>
+                <a:latin typeface="Aptos" panose="020B0004020202020204" pitchFamily="34" charset="0"/>
               </a:rPr>
               <a:t>TCP/UDP </a:t>
             </a:r>
             <a:r>
               <a:rPr lang="it-IT" dirty="0" err="1">
-                <a:latin typeface="Palatino Linotype" panose="02040502050505030304" pitchFamily="18" charset="0"/>
+                <a:latin typeface="Aptos" panose="020B0004020202020204" pitchFamily="34" charset="0"/>
               </a:rPr>
               <a:t>header</a:t>
             </a:r>
             <a:endParaRPr lang="en-GB" dirty="0">
-              <a:latin typeface="Palatino Linotype" panose="02040502050505030304" pitchFamily="18" charset="0"/>
+              <a:latin typeface="Aptos" panose="020B0004020202020204" pitchFamily="34" charset="0"/>
             </a:endParaRPr>
           </a:p>
         </p:txBody>
@@ -6170,12 +6453,12 @@
           <a:p>
             <a:r>
               <a:rPr lang="it-IT" dirty="0">
-                <a:latin typeface="Palatino Linotype" panose="02040502050505030304" pitchFamily="18" charset="0"/>
+                <a:latin typeface="Aptos" panose="020B0004020202020204" pitchFamily="34" charset="0"/>
               </a:rPr>
               <a:t>SEGMENT</a:t>
             </a:r>
             <a:endParaRPr lang="en-GB" dirty="0">
-              <a:latin typeface="Palatino Linotype" panose="02040502050505030304" pitchFamily="18" charset="0"/>
+              <a:latin typeface="Aptos" panose="020B0004020202020204" pitchFamily="34" charset="0"/>
             </a:endParaRPr>
           </a:p>
         </p:txBody>
@@ -6228,18 +6511,26 @@
           <a:lstStyle/>
           <a:p>
             <a:r>
-              <a:rPr lang="it-IT" dirty="0"/>
+              <a:rPr lang="it-IT" dirty="0">
+                <a:latin typeface="Aptos" panose="020B0004020202020204" pitchFamily="34" charset="0"/>
+              </a:rPr>
               <a:t>The TCP/IP </a:t>
             </a:r>
             <a:r>
-              <a:rPr lang="it-IT" dirty="0" err="1"/>
+              <a:rPr lang="it-IT" dirty="0" err="1">
+                <a:latin typeface="Aptos" panose="020B0004020202020204" pitchFamily="34" charset="0"/>
+              </a:rPr>
               <a:t>reference</a:t>
             </a:r>
             <a:r>
-              <a:rPr lang="it-IT" dirty="0"/>
+              <a:rPr lang="it-IT" dirty="0">
+                <a:latin typeface="Aptos" panose="020B0004020202020204" pitchFamily="34" charset="0"/>
+              </a:rPr>
               <a:t> model</a:t>
             </a:r>
-            <a:endParaRPr lang="en-GB" dirty="0"/>
+            <a:endParaRPr lang="en-GB" dirty="0">
+              <a:latin typeface="Aptos" panose="020B0004020202020204" pitchFamily="34" charset="0"/>
+            </a:endParaRPr>
           </a:p>
         </p:txBody>
       </p:sp>
@@ -6259,10 +6550,14 @@
           <a:lstStyle/>
           <a:p>
             <a:fld id="{31DE2C5B-556E-47B8-A792-024C2FCA4ACC}" type="slidenum">
-              <a:rPr lang="en-GB" smtClean="0"/>
+              <a:rPr lang="en-GB" smtClean="0">
+                <a:latin typeface="Aptos" panose="020B0004020202020204" pitchFamily="34" charset="0"/>
+              </a:rPr>
               <a:t>17</a:t>
             </a:fld>
-            <a:endParaRPr lang="en-GB" dirty="0"/>
+            <a:endParaRPr lang="en-GB" dirty="0">
+              <a:latin typeface="Aptos" panose="020B0004020202020204" pitchFamily="34" charset="0"/>
+            </a:endParaRPr>
           </a:p>
         </p:txBody>
       </p:sp>
@@ -6318,7 +6613,7 @@
                 <a:solidFill>
                   <a:schemeClr val="tx1"/>
                 </a:solidFill>
-                <a:latin typeface="Palatino Linotype" panose="02040502050505030304" pitchFamily="18" charset="0"/>
+                <a:latin typeface="Aptos" panose="020B0004020202020204" pitchFamily="34" charset="0"/>
               </a:rPr>
               <a:t>Finds the correct routing path, handles congestions and quality of service.</a:t>
             </a:r>
@@ -6336,7 +6631,7 @@
                 <a:solidFill>
                   <a:schemeClr val="tx1"/>
                 </a:solidFill>
-                <a:latin typeface="Palatino Linotype" panose="02040502050505030304" pitchFamily="18" charset="0"/>
+                <a:latin typeface="Aptos" panose="020B0004020202020204" pitchFamily="34" charset="0"/>
               </a:rPr>
               <a:t>Packets are sent independently to the destination by a certain path. </a:t>
             </a:r>
@@ -6354,7 +6649,7 @@
                 <a:solidFill>
                   <a:schemeClr val="tx1"/>
                 </a:solidFill>
-                <a:latin typeface="Palatino Linotype" panose="02040502050505030304" pitchFamily="18" charset="0"/>
+                <a:latin typeface="Aptos" panose="020B0004020202020204" pitchFamily="34" charset="0"/>
               </a:rPr>
               <a:t>This layer works with two protocols: </a:t>
             </a:r>
@@ -6372,7 +6667,7 @@
                 <a:solidFill>
                   <a:schemeClr val="tx1"/>
                 </a:solidFill>
-                <a:latin typeface="Palatino Linotype" panose="02040502050505030304" pitchFamily="18" charset="0"/>
+                <a:latin typeface="Aptos" panose="020B0004020202020204" pitchFamily="34" charset="0"/>
               </a:rPr>
               <a:t>Internet protocol (IP): </a:t>
             </a:r>
@@ -6381,7 +6676,7 @@
                 <a:solidFill>
                   <a:schemeClr val="tx1"/>
                 </a:solidFill>
-                <a:latin typeface="Palatino Linotype" panose="02040502050505030304" pitchFamily="18" charset="0"/>
+                <a:latin typeface="Aptos" panose="020B0004020202020204" pitchFamily="34" charset="0"/>
               </a:rPr>
               <a:t>it defines the IP addresses, </a:t>
             </a:r>
@@ -6390,7 +6685,7 @@
                 <a:solidFill>
                   <a:schemeClr val="tx1"/>
                 </a:solidFill>
-                <a:latin typeface="Palatino Linotype" panose="02040502050505030304" pitchFamily="18" charset="0"/>
+                <a:latin typeface="Aptos" panose="020B0004020202020204" pitchFamily="34" charset="0"/>
               </a:rPr>
               <a:t>i.e</a:t>
             </a:r>
@@ -6399,7 +6694,7 @@
                 <a:solidFill>
                   <a:schemeClr val="tx1"/>
                 </a:solidFill>
-                <a:latin typeface="Palatino Linotype" panose="02040502050505030304" pitchFamily="18" charset="0"/>
+                <a:latin typeface="Aptos" panose="020B0004020202020204" pitchFamily="34" charset="0"/>
               </a:rPr>
               <a:t>,. </a:t>
             </a:r>
@@ -6408,7 +6703,7 @@
                 <a:solidFill>
                   <a:prstClr val="black"/>
                 </a:solidFill>
-                <a:latin typeface="Palatino Linotype" panose="02040502050505030304" pitchFamily="18" charset="0"/>
+                <a:latin typeface="Aptos" panose="020B0004020202020204" pitchFamily="34" charset="0"/>
               </a:rPr>
               <a:t>that label (e.g., 192.0.2.1) that uniquely identifies a host connected to a computer network using the IP protocol. </a:t>
             </a:r>
@@ -6416,7 +6711,7 @@
               <a:solidFill>
                 <a:schemeClr val="tx1"/>
               </a:solidFill>
-              <a:latin typeface="Palatino Linotype" panose="02040502050505030304" pitchFamily="18" charset="0"/>
+              <a:latin typeface="Aptos" panose="020B0004020202020204" pitchFamily="34" charset="0"/>
             </a:endParaRPr>
           </a:p>
           <a:p>
@@ -6432,7 +6727,7 @@
                 <a:solidFill>
                   <a:schemeClr val="tx1"/>
                 </a:solidFill>
-                <a:latin typeface="Palatino Linotype" panose="02040502050505030304" pitchFamily="18" charset="0"/>
+                <a:latin typeface="Aptos" panose="020B0004020202020204" pitchFamily="34" charset="0"/>
               </a:rPr>
               <a:t>Internet Control Message Protocol (ICMP)</a:t>
             </a:r>
@@ -6441,7 +6736,7 @@
                 <a:solidFill>
                   <a:schemeClr val="tx1"/>
                 </a:solidFill>
-                <a:latin typeface="Palatino Linotype" panose="02040502050505030304" pitchFamily="18" charset="0"/>
+                <a:latin typeface="Aptos" panose="020B0004020202020204" pitchFamily="34" charset="0"/>
               </a:rPr>
               <a:t>: it sends error and control messages.</a:t>
             </a:r>
@@ -6531,7 +6826,7 @@
                 <a:solidFill>
                   <a:sysClr val="windowText" lastClr="000000"/>
                 </a:solidFill>
-                <a:latin typeface="Palatino Linotype" panose="02040502050505030304" pitchFamily="18" charset="0"/>
+                <a:latin typeface="Aptos" panose="020B0004020202020204" pitchFamily="34" charset="0"/>
               </a:rPr>
               <a:t>Link </a:t>
             </a:r>
@@ -6540,7 +6835,7 @@
                 <a:solidFill>
                   <a:sysClr val="windowText" lastClr="000000"/>
                 </a:solidFill>
-                <a:latin typeface="Palatino Linotype" panose="02040502050505030304" pitchFamily="18" charset="0"/>
+                <a:latin typeface="Aptos" panose="020B0004020202020204" pitchFamily="34" charset="0"/>
               </a:rPr>
               <a:t>layer</a:t>
             </a:r>
@@ -6548,7 +6843,7 @@
               <a:solidFill>
                 <a:sysClr val="windowText" lastClr="000000"/>
               </a:solidFill>
-              <a:latin typeface="Palatino Linotype" panose="02040502050505030304" pitchFamily="18" charset="0"/>
+              <a:latin typeface="Aptos" panose="020B0004020202020204" pitchFamily="34" charset="0"/>
             </a:endParaRPr>
           </a:p>
         </p:txBody>
@@ -6600,7 +6895,7 @@
                 <a:solidFill>
                   <a:sysClr val="windowText" lastClr="000000"/>
                 </a:solidFill>
-                <a:latin typeface="Palatino Linotype" panose="02040502050505030304" pitchFamily="18" charset="0"/>
+                <a:latin typeface="Aptos" panose="020B0004020202020204" pitchFamily="34" charset="0"/>
               </a:rPr>
               <a:t>Network </a:t>
             </a:r>
@@ -6609,7 +6904,7 @@
                 <a:solidFill>
                   <a:sysClr val="windowText" lastClr="000000"/>
                 </a:solidFill>
-                <a:latin typeface="Palatino Linotype" panose="02040502050505030304" pitchFamily="18" charset="0"/>
+                <a:latin typeface="Aptos" panose="020B0004020202020204" pitchFamily="34" charset="0"/>
               </a:rPr>
               <a:t>layer</a:t>
             </a:r>
@@ -6617,7 +6912,7 @@
               <a:solidFill>
                 <a:sysClr val="windowText" lastClr="000000"/>
               </a:solidFill>
-              <a:latin typeface="Palatino Linotype" panose="02040502050505030304" pitchFamily="18" charset="0"/>
+              <a:latin typeface="Aptos" panose="020B0004020202020204" pitchFamily="34" charset="0"/>
             </a:endParaRPr>
           </a:p>
         </p:txBody>
@@ -6669,7 +6964,7 @@
                 <a:solidFill>
                   <a:sysClr val="windowText" lastClr="000000"/>
                 </a:solidFill>
-                <a:latin typeface="Palatino Linotype" panose="02040502050505030304" pitchFamily="18" charset="0"/>
+                <a:latin typeface="Aptos" panose="020B0004020202020204" pitchFamily="34" charset="0"/>
               </a:rPr>
               <a:t>Transport</a:t>
             </a:r>
@@ -6678,7 +6973,7 @@
                 <a:solidFill>
                   <a:sysClr val="windowText" lastClr="000000"/>
                 </a:solidFill>
-                <a:latin typeface="Palatino Linotype" panose="02040502050505030304" pitchFamily="18" charset="0"/>
+                <a:latin typeface="Aptos" panose="020B0004020202020204" pitchFamily="34" charset="0"/>
               </a:rPr>
               <a:t> </a:t>
             </a:r>
@@ -6687,7 +6982,7 @@
                 <a:solidFill>
                   <a:sysClr val="windowText" lastClr="000000"/>
                 </a:solidFill>
-                <a:latin typeface="Palatino Linotype" panose="02040502050505030304" pitchFamily="18" charset="0"/>
+                <a:latin typeface="Aptos" panose="020B0004020202020204" pitchFamily="34" charset="0"/>
               </a:rPr>
               <a:t>layer</a:t>
             </a:r>
@@ -6695,7 +6990,7 @@
               <a:solidFill>
                 <a:sysClr val="windowText" lastClr="000000"/>
               </a:solidFill>
-              <a:latin typeface="Palatino Linotype" panose="02040502050505030304" pitchFamily="18" charset="0"/>
+              <a:latin typeface="Aptos" panose="020B0004020202020204" pitchFamily="34" charset="0"/>
             </a:endParaRPr>
           </a:p>
         </p:txBody>
@@ -6747,7 +7042,7 @@
                 <a:solidFill>
                   <a:sysClr val="windowText" lastClr="000000"/>
                 </a:solidFill>
-                <a:latin typeface="Palatino Linotype" panose="02040502050505030304" pitchFamily="18" charset="0"/>
+                <a:latin typeface="Aptos" panose="020B0004020202020204" pitchFamily="34" charset="0"/>
               </a:rPr>
               <a:t>Application </a:t>
             </a:r>
@@ -6756,7 +7051,7 @@
                 <a:solidFill>
                   <a:sysClr val="windowText" lastClr="000000"/>
                 </a:solidFill>
-                <a:latin typeface="Palatino Linotype" panose="02040502050505030304" pitchFamily="18" charset="0"/>
+                <a:latin typeface="Aptos" panose="020B0004020202020204" pitchFamily="34" charset="0"/>
               </a:rPr>
               <a:t>layer</a:t>
             </a:r>
@@ -6764,7 +7059,7 @@
               <a:solidFill>
                 <a:sysClr val="windowText" lastClr="000000"/>
               </a:solidFill>
-              <a:latin typeface="Palatino Linotype" panose="02040502050505030304" pitchFamily="18" charset="0"/>
+              <a:latin typeface="Aptos" panose="020B0004020202020204" pitchFamily="34" charset="0"/>
             </a:endParaRPr>
           </a:p>
         </p:txBody>
@@ -6816,7 +7111,7 @@
                 <a:solidFill>
                   <a:sysClr val="windowText" lastClr="000000"/>
                 </a:solidFill>
-                <a:latin typeface="Palatino Linotype" panose="02040502050505030304" pitchFamily="18" charset="0"/>
+                <a:latin typeface="Aptos" panose="020B0004020202020204" pitchFamily="34" charset="0"/>
               </a:rPr>
               <a:t>Physical</a:t>
             </a:r>
@@ -6825,7 +7120,7 @@
                 <a:solidFill>
                   <a:sysClr val="windowText" lastClr="000000"/>
                 </a:solidFill>
-                <a:latin typeface="Palatino Linotype" panose="02040502050505030304" pitchFamily="18" charset="0"/>
+                <a:latin typeface="Aptos" panose="020B0004020202020204" pitchFamily="34" charset="0"/>
               </a:rPr>
               <a:t> </a:t>
             </a:r>
@@ -6834,7 +7129,7 @@
                 <a:solidFill>
                   <a:sysClr val="windowText" lastClr="000000"/>
                 </a:solidFill>
-                <a:latin typeface="Palatino Linotype" panose="02040502050505030304" pitchFamily="18" charset="0"/>
+                <a:latin typeface="Aptos" panose="020B0004020202020204" pitchFamily="34" charset="0"/>
               </a:rPr>
               <a:t>layer</a:t>
             </a:r>
@@ -6842,7 +7137,7 @@
               <a:solidFill>
                 <a:sysClr val="windowText" lastClr="000000"/>
               </a:solidFill>
-              <a:latin typeface="Palatino Linotype" panose="02040502050505030304" pitchFamily="18" charset="0"/>
+              <a:latin typeface="Aptos" panose="020B0004020202020204" pitchFamily="34" charset="0"/>
             </a:endParaRPr>
           </a:p>
         </p:txBody>
@@ -6886,7 +7181,9 @@
           <a:lstStyle/>
           <a:p>
             <a:pPr algn="ctr"/>
-            <a:endParaRPr lang="en-GB"/>
+            <a:endParaRPr lang="en-GB">
+              <a:latin typeface="Aptos" panose="020B0004020202020204" pitchFamily="34" charset="0"/>
+            </a:endParaRPr>
           </a:p>
         </p:txBody>
       </p:sp>
@@ -6932,12 +7229,12 @@
             <a:pPr algn="ctr"/>
             <a:r>
               <a:rPr lang="it-IT" dirty="0">
-                <a:latin typeface="Palatino Linotype" panose="02040502050505030304" pitchFamily="18" charset="0"/>
+                <a:latin typeface="Aptos" panose="020B0004020202020204" pitchFamily="34" charset="0"/>
               </a:rPr>
               <a:t>Data</a:t>
             </a:r>
             <a:endParaRPr lang="en-GB" dirty="0">
-              <a:latin typeface="Palatino Linotype" panose="02040502050505030304" pitchFamily="18" charset="0"/>
+              <a:latin typeface="Aptos" panose="020B0004020202020204" pitchFamily="34" charset="0"/>
             </a:endParaRPr>
           </a:p>
         </p:txBody>
@@ -6984,18 +7281,18 @@
             <a:pPr algn="ctr"/>
             <a:r>
               <a:rPr lang="it-IT" dirty="0">
-                <a:latin typeface="Palatino Linotype" panose="02040502050505030304" pitchFamily="18" charset="0"/>
+                <a:latin typeface="Aptos" panose="020B0004020202020204" pitchFamily="34" charset="0"/>
               </a:rPr>
               <a:t>TCP/UDC </a:t>
             </a:r>
             <a:r>
               <a:rPr lang="it-IT" dirty="0" err="1">
-                <a:latin typeface="Palatino Linotype" panose="02040502050505030304" pitchFamily="18" charset="0"/>
+                <a:latin typeface="Aptos" panose="020B0004020202020204" pitchFamily="34" charset="0"/>
               </a:rPr>
               <a:t>header</a:t>
             </a:r>
             <a:endParaRPr lang="en-GB" dirty="0">
-              <a:latin typeface="Palatino Linotype" panose="02040502050505030304" pitchFamily="18" charset="0"/>
+              <a:latin typeface="Aptos" panose="020B0004020202020204" pitchFamily="34" charset="0"/>
             </a:endParaRPr>
           </a:p>
         </p:txBody>
@@ -7024,12 +7321,12 @@
           <a:p>
             <a:r>
               <a:rPr lang="it-IT" dirty="0">
-                <a:latin typeface="Palatino Linotype" panose="02040502050505030304" pitchFamily="18" charset="0"/>
+                <a:latin typeface="Aptos" panose="020B0004020202020204" pitchFamily="34" charset="0"/>
               </a:rPr>
               <a:t>PACKET</a:t>
             </a:r>
             <a:endParaRPr lang="en-GB" dirty="0">
-              <a:latin typeface="Palatino Linotype" panose="02040502050505030304" pitchFamily="18" charset="0"/>
+              <a:latin typeface="Aptos" panose="020B0004020202020204" pitchFamily="34" charset="0"/>
             </a:endParaRPr>
           </a:p>
         </p:txBody>
@@ -7076,18 +7373,18 @@
             <a:pPr algn="ctr"/>
             <a:r>
               <a:rPr lang="it-IT" dirty="0">
-                <a:latin typeface="Palatino Linotype" panose="02040502050505030304" pitchFamily="18" charset="0"/>
+                <a:latin typeface="Aptos" panose="020B0004020202020204" pitchFamily="34" charset="0"/>
               </a:rPr>
               <a:t>IP </a:t>
             </a:r>
             <a:r>
               <a:rPr lang="it-IT" dirty="0" err="1">
-                <a:latin typeface="Palatino Linotype" panose="02040502050505030304" pitchFamily="18" charset="0"/>
+                <a:latin typeface="Aptos" panose="020B0004020202020204" pitchFamily="34" charset="0"/>
               </a:rPr>
               <a:t>header</a:t>
             </a:r>
             <a:endParaRPr lang="en-GB" dirty="0">
-              <a:latin typeface="Palatino Linotype" panose="02040502050505030304" pitchFamily="18" charset="0"/>
+              <a:latin typeface="Aptos" panose="020B0004020202020204" pitchFamily="34" charset="0"/>
             </a:endParaRPr>
           </a:p>
         </p:txBody>
@@ -7140,18 +7437,26 @@
           <a:lstStyle/>
           <a:p>
             <a:r>
-              <a:rPr lang="it-IT" dirty="0"/>
+              <a:rPr lang="it-IT" dirty="0">
+                <a:latin typeface="Aptos" panose="020B0004020202020204" pitchFamily="34" charset="0"/>
+              </a:rPr>
               <a:t>The TCP/IP </a:t>
             </a:r>
             <a:r>
-              <a:rPr lang="it-IT" dirty="0" err="1"/>
+              <a:rPr lang="it-IT" dirty="0" err="1">
+                <a:latin typeface="Aptos" panose="020B0004020202020204" pitchFamily="34" charset="0"/>
+              </a:rPr>
               <a:t>reference</a:t>
             </a:r>
             <a:r>
-              <a:rPr lang="it-IT" dirty="0"/>
+              <a:rPr lang="it-IT" dirty="0">
+                <a:latin typeface="Aptos" panose="020B0004020202020204" pitchFamily="34" charset="0"/>
+              </a:rPr>
               <a:t> model</a:t>
             </a:r>
-            <a:endParaRPr lang="en-GB" dirty="0"/>
+            <a:endParaRPr lang="en-GB" dirty="0">
+              <a:latin typeface="Aptos" panose="020B0004020202020204" pitchFamily="34" charset="0"/>
+            </a:endParaRPr>
           </a:p>
         </p:txBody>
       </p:sp>
@@ -7171,10 +7476,14 @@
           <a:lstStyle/>
           <a:p>
             <a:fld id="{31DE2C5B-556E-47B8-A792-024C2FCA4ACC}" type="slidenum">
-              <a:rPr lang="en-GB" smtClean="0"/>
+              <a:rPr lang="en-GB" smtClean="0">
+                <a:latin typeface="Aptos" panose="020B0004020202020204" pitchFamily="34" charset="0"/>
+              </a:rPr>
               <a:t>18</a:t>
             </a:fld>
-            <a:endParaRPr lang="en-GB" dirty="0"/>
+            <a:endParaRPr lang="en-GB" dirty="0">
+              <a:latin typeface="Aptos" panose="020B0004020202020204" pitchFamily="34" charset="0"/>
+            </a:endParaRPr>
           </a:p>
         </p:txBody>
       </p:sp>
@@ -7228,7 +7537,7 @@
                 <a:solidFill>
                   <a:schemeClr val="tx1"/>
                 </a:solidFill>
-                <a:latin typeface="Palatino Linotype" panose="02040502050505030304" pitchFamily="18" charset="0"/>
+                <a:latin typeface="Aptos" panose="020B0004020202020204" pitchFamily="34" charset="0"/>
               </a:rPr>
               <a:t>It moves packets between the network layer and the physical layer. </a:t>
             </a:r>
@@ -7246,7 +7555,7 @@
                 <a:solidFill>
                   <a:schemeClr val="tx1"/>
                 </a:solidFill>
-                <a:latin typeface="Palatino Linotype" panose="02040502050505030304" pitchFamily="18" charset="0"/>
+                <a:latin typeface="Aptos" panose="020B0004020202020204" pitchFamily="34" charset="0"/>
               </a:rPr>
               <a:t>Not really a layer at all, but rather an interface between hosts and physical transmission links.</a:t>
             </a:r>
@@ -7336,7 +7645,7 @@
                 <a:solidFill>
                   <a:sysClr val="windowText" lastClr="000000"/>
                 </a:solidFill>
-                <a:latin typeface="Palatino Linotype" panose="02040502050505030304" pitchFamily="18" charset="0"/>
+                <a:latin typeface="Aptos" panose="020B0004020202020204" pitchFamily="34" charset="0"/>
               </a:rPr>
               <a:t>Link </a:t>
             </a:r>
@@ -7345,7 +7654,7 @@
                 <a:solidFill>
                   <a:sysClr val="windowText" lastClr="000000"/>
                 </a:solidFill>
-                <a:latin typeface="Palatino Linotype" panose="02040502050505030304" pitchFamily="18" charset="0"/>
+                <a:latin typeface="Aptos" panose="020B0004020202020204" pitchFamily="34" charset="0"/>
               </a:rPr>
               <a:t>layer</a:t>
             </a:r>
@@ -7353,7 +7662,7 @@
               <a:solidFill>
                 <a:sysClr val="windowText" lastClr="000000"/>
               </a:solidFill>
-              <a:latin typeface="Palatino Linotype" panose="02040502050505030304" pitchFamily="18" charset="0"/>
+              <a:latin typeface="Aptos" panose="020B0004020202020204" pitchFamily="34" charset="0"/>
             </a:endParaRPr>
           </a:p>
         </p:txBody>
@@ -7405,7 +7714,7 @@
                 <a:solidFill>
                   <a:sysClr val="windowText" lastClr="000000"/>
                 </a:solidFill>
-                <a:latin typeface="Palatino Linotype" panose="02040502050505030304" pitchFamily="18" charset="0"/>
+                <a:latin typeface="Aptos" panose="020B0004020202020204" pitchFamily="34" charset="0"/>
               </a:rPr>
               <a:t>Network </a:t>
             </a:r>
@@ -7414,7 +7723,7 @@
                 <a:solidFill>
                   <a:sysClr val="windowText" lastClr="000000"/>
                 </a:solidFill>
-                <a:latin typeface="Palatino Linotype" panose="02040502050505030304" pitchFamily="18" charset="0"/>
+                <a:latin typeface="Aptos" panose="020B0004020202020204" pitchFamily="34" charset="0"/>
               </a:rPr>
               <a:t>layer</a:t>
             </a:r>
@@ -7422,7 +7731,7 @@
               <a:solidFill>
                 <a:sysClr val="windowText" lastClr="000000"/>
               </a:solidFill>
-              <a:latin typeface="Palatino Linotype" panose="02040502050505030304" pitchFamily="18" charset="0"/>
+              <a:latin typeface="Aptos" panose="020B0004020202020204" pitchFamily="34" charset="0"/>
             </a:endParaRPr>
           </a:p>
         </p:txBody>
@@ -7474,7 +7783,7 @@
                 <a:solidFill>
                   <a:sysClr val="windowText" lastClr="000000"/>
                 </a:solidFill>
-                <a:latin typeface="Palatino Linotype" panose="02040502050505030304" pitchFamily="18" charset="0"/>
+                <a:latin typeface="Aptos" panose="020B0004020202020204" pitchFamily="34" charset="0"/>
               </a:rPr>
               <a:t>Transport</a:t>
             </a:r>
@@ -7483,7 +7792,7 @@
                 <a:solidFill>
                   <a:sysClr val="windowText" lastClr="000000"/>
                 </a:solidFill>
-                <a:latin typeface="Palatino Linotype" panose="02040502050505030304" pitchFamily="18" charset="0"/>
+                <a:latin typeface="Aptos" panose="020B0004020202020204" pitchFamily="34" charset="0"/>
               </a:rPr>
               <a:t> </a:t>
             </a:r>
@@ -7492,7 +7801,7 @@
                 <a:solidFill>
                   <a:sysClr val="windowText" lastClr="000000"/>
                 </a:solidFill>
-                <a:latin typeface="Palatino Linotype" panose="02040502050505030304" pitchFamily="18" charset="0"/>
+                <a:latin typeface="Aptos" panose="020B0004020202020204" pitchFamily="34" charset="0"/>
               </a:rPr>
               <a:t>layer</a:t>
             </a:r>
@@ -7500,7 +7809,7 @@
               <a:solidFill>
                 <a:sysClr val="windowText" lastClr="000000"/>
               </a:solidFill>
-              <a:latin typeface="Palatino Linotype" panose="02040502050505030304" pitchFamily="18" charset="0"/>
+              <a:latin typeface="Aptos" panose="020B0004020202020204" pitchFamily="34" charset="0"/>
             </a:endParaRPr>
           </a:p>
         </p:txBody>
@@ -7552,7 +7861,7 @@
                 <a:solidFill>
                   <a:sysClr val="windowText" lastClr="000000"/>
                 </a:solidFill>
-                <a:latin typeface="Palatino Linotype" panose="02040502050505030304" pitchFamily="18" charset="0"/>
+                <a:latin typeface="Aptos" panose="020B0004020202020204" pitchFamily="34" charset="0"/>
               </a:rPr>
               <a:t>Application </a:t>
             </a:r>
@@ -7561,7 +7870,7 @@
                 <a:solidFill>
                   <a:sysClr val="windowText" lastClr="000000"/>
                 </a:solidFill>
-                <a:latin typeface="Palatino Linotype" panose="02040502050505030304" pitchFamily="18" charset="0"/>
+                <a:latin typeface="Aptos" panose="020B0004020202020204" pitchFamily="34" charset="0"/>
               </a:rPr>
               <a:t>layer</a:t>
             </a:r>
@@ -7569,7 +7878,7 @@
               <a:solidFill>
                 <a:sysClr val="windowText" lastClr="000000"/>
               </a:solidFill>
-              <a:latin typeface="Palatino Linotype" panose="02040502050505030304" pitchFamily="18" charset="0"/>
+              <a:latin typeface="Aptos" panose="020B0004020202020204" pitchFamily="34" charset="0"/>
             </a:endParaRPr>
           </a:p>
         </p:txBody>
@@ -7621,7 +7930,7 @@
                 <a:solidFill>
                   <a:sysClr val="windowText" lastClr="000000"/>
                 </a:solidFill>
-                <a:latin typeface="Palatino Linotype" panose="02040502050505030304" pitchFamily="18" charset="0"/>
+                <a:latin typeface="Aptos" panose="020B0004020202020204" pitchFamily="34" charset="0"/>
               </a:rPr>
               <a:t>Physical</a:t>
             </a:r>
@@ -7630,7 +7939,7 @@
                 <a:solidFill>
                   <a:sysClr val="windowText" lastClr="000000"/>
                 </a:solidFill>
-                <a:latin typeface="Palatino Linotype" panose="02040502050505030304" pitchFamily="18" charset="0"/>
+                <a:latin typeface="Aptos" panose="020B0004020202020204" pitchFamily="34" charset="0"/>
               </a:rPr>
               <a:t> </a:t>
             </a:r>
@@ -7639,7 +7948,7 @@
                 <a:solidFill>
                   <a:sysClr val="windowText" lastClr="000000"/>
                 </a:solidFill>
-                <a:latin typeface="Palatino Linotype" panose="02040502050505030304" pitchFamily="18" charset="0"/>
+                <a:latin typeface="Aptos" panose="020B0004020202020204" pitchFamily="34" charset="0"/>
               </a:rPr>
               <a:t>layer</a:t>
             </a:r>
@@ -7647,7 +7956,7 @@
               <a:solidFill>
                 <a:sysClr val="windowText" lastClr="000000"/>
               </a:solidFill>
-              <a:latin typeface="Palatino Linotype" panose="02040502050505030304" pitchFamily="18" charset="0"/>
+              <a:latin typeface="Aptos" panose="020B0004020202020204" pitchFamily="34" charset="0"/>
             </a:endParaRPr>
           </a:p>
         </p:txBody>
@@ -7691,7 +8000,9 @@
           <a:lstStyle/>
           <a:p>
             <a:pPr algn="ctr"/>
-            <a:endParaRPr lang="en-GB"/>
+            <a:endParaRPr lang="en-GB">
+              <a:latin typeface="Aptos" panose="020B0004020202020204" pitchFamily="34" charset="0"/>
+            </a:endParaRPr>
           </a:p>
         </p:txBody>
       </p:sp>
@@ -7737,12 +8048,12 @@
             <a:pPr algn="ctr"/>
             <a:r>
               <a:rPr lang="it-IT" dirty="0">
-                <a:latin typeface="Palatino Linotype" panose="02040502050505030304" pitchFamily="18" charset="0"/>
+                <a:latin typeface="Aptos" panose="020B0004020202020204" pitchFamily="34" charset="0"/>
               </a:rPr>
               <a:t>Data</a:t>
             </a:r>
             <a:endParaRPr lang="en-GB" dirty="0">
-              <a:latin typeface="Palatino Linotype" panose="02040502050505030304" pitchFamily="18" charset="0"/>
+              <a:latin typeface="Aptos" panose="020B0004020202020204" pitchFamily="34" charset="0"/>
             </a:endParaRPr>
           </a:p>
         </p:txBody>
@@ -7789,18 +8100,18 @@
             <a:pPr algn="ctr"/>
             <a:r>
               <a:rPr lang="it-IT" dirty="0">
-                <a:latin typeface="Palatino Linotype" panose="02040502050505030304" pitchFamily="18" charset="0"/>
+                <a:latin typeface="Aptos" panose="020B0004020202020204" pitchFamily="34" charset="0"/>
               </a:rPr>
               <a:t>TCP/UDC </a:t>
             </a:r>
             <a:r>
               <a:rPr lang="it-IT" dirty="0" err="1">
-                <a:latin typeface="Palatino Linotype" panose="02040502050505030304" pitchFamily="18" charset="0"/>
+                <a:latin typeface="Aptos" panose="020B0004020202020204" pitchFamily="34" charset="0"/>
               </a:rPr>
               <a:t>header</a:t>
             </a:r>
             <a:endParaRPr lang="en-GB" dirty="0">
-              <a:latin typeface="Palatino Linotype" panose="02040502050505030304" pitchFamily="18" charset="0"/>
+              <a:latin typeface="Aptos" panose="020B0004020202020204" pitchFamily="34" charset="0"/>
             </a:endParaRPr>
           </a:p>
         </p:txBody>
@@ -7829,12 +8140,12 @@
           <a:p>
             <a:r>
               <a:rPr lang="it-IT" dirty="0">
-                <a:latin typeface="Palatino Linotype" panose="02040502050505030304" pitchFamily="18" charset="0"/>
+                <a:latin typeface="Aptos" panose="020B0004020202020204" pitchFamily="34" charset="0"/>
               </a:rPr>
               <a:t>FRAME</a:t>
             </a:r>
             <a:endParaRPr lang="en-GB" dirty="0">
-              <a:latin typeface="Palatino Linotype" panose="02040502050505030304" pitchFamily="18" charset="0"/>
+              <a:latin typeface="Aptos" panose="020B0004020202020204" pitchFamily="34" charset="0"/>
             </a:endParaRPr>
           </a:p>
         </p:txBody>
@@ -7881,18 +8192,18 @@
             <a:pPr algn="ctr"/>
             <a:r>
               <a:rPr lang="it-IT" dirty="0">
-                <a:latin typeface="Palatino Linotype" panose="02040502050505030304" pitchFamily="18" charset="0"/>
+                <a:latin typeface="Aptos" panose="020B0004020202020204" pitchFamily="34" charset="0"/>
               </a:rPr>
               <a:t>IP </a:t>
             </a:r>
             <a:r>
               <a:rPr lang="it-IT" dirty="0" err="1">
-                <a:latin typeface="Palatino Linotype" panose="02040502050505030304" pitchFamily="18" charset="0"/>
+                <a:latin typeface="Aptos" panose="020B0004020202020204" pitchFamily="34" charset="0"/>
               </a:rPr>
               <a:t>header</a:t>
             </a:r>
             <a:endParaRPr lang="en-GB" dirty="0">
-              <a:latin typeface="Palatino Linotype" panose="02040502050505030304" pitchFamily="18" charset="0"/>
+              <a:latin typeface="Aptos" panose="020B0004020202020204" pitchFamily="34" charset="0"/>
             </a:endParaRPr>
           </a:p>
         </p:txBody>
@@ -7939,18 +8250,18 @@
             <a:pPr algn="ctr"/>
             <a:r>
               <a:rPr lang="it-IT" dirty="0">
-                <a:latin typeface="Palatino Linotype" panose="02040502050505030304" pitchFamily="18" charset="0"/>
+                <a:latin typeface="Aptos" panose="020B0004020202020204" pitchFamily="34" charset="0"/>
               </a:rPr>
               <a:t>Link </a:t>
             </a:r>
             <a:r>
               <a:rPr lang="it-IT" dirty="0" err="1">
-                <a:latin typeface="Palatino Linotype" panose="02040502050505030304" pitchFamily="18" charset="0"/>
+                <a:latin typeface="Aptos" panose="020B0004020202020204" pitchFamily="34" charset="0"/>
               </a:rPr>
               <a:t>header</a:t>
             </a:r>
             <a:endParaRPr lang="en-GB" dirty="0">
-              <a:latin typeface="Palatino Linotype" panose="02040502050505030304" pitchFamily="18" charset="0"/>
+              <a:latin typeface="Aptos" panose="020B0004020202020204" pitchFamily="34" charset="0"/>
             </a:endParaRPr>
           </a:p>
         </p:txBody>
@@ -7997,12 +8308,12 @@
             <a:pPr algn="ctr"/>
             <a:r>
               <a:rPr lang="it-IT" dirty="0">
-                <a:latin typeface="Palatino Linotype" panose="02040502050505030304" pitchFamily="18" charset="0"/>
+                <a:latin typeface="Aptos" panose="020B0004020202020204" pitchFamily="34" charset="0"/>
               </a:rPr>
               <a:t>Link trailer</a:t>
             </a:r>
             <a:endParaRPr lang="en-GB" dirty="0">
-              <a:latin typeface="Palatino Linotype" panose="02040502050505030304" pitchFamily="18" charset="0"/>
+              <a:latin typeface="Aptos" panose="020B0004020202020204" pitchFamily="34" charset="0"/>
             </a:endParaRPr>
           </a:p>
         </p:txBody>
@@ -8032,30 +8343,30 @@
             <a:pPr algn="ctr"/>
             <a:r>
               <a:rPr lang="it-IT" dirty="0" err="1">
-                <a:latin typeface="Palatino Linotype" panose="02040502050505030304" pitchFamily="18" charset="0"/>
+                <a:latin typeface="Aptos" panose="020B0004020202020204" pitchFamily="34" charset="0"/>
               </a:rPr>
               <a:t>Error</a:t>
             </a:r>
             <a:r>
               <a:rPr lang="it-IT" dirty="0">
-                <a:latin typeface="Palatino Linotype" panose="02040502050505030304" pitchFamily="18" charset="0"/>
+                <a:latin typeface="Aptos" panose="020B0004020202020204" pitchFamily="34" charset="0"/>
               </a:rPr>
               <a:t> </a:t>
             </a:r>
             <a:r>
               <a:rPr lang="it-IT" dirty="0" err="1">
-                <a:latin typeface="Palatino Linotype" panose="02040502050505030304" pitchFamily="18" charset="0"/>
+                <a:latin typeface="Aptos" panose="020B0004020202020204" pitchFamily="34" charset="0"/>
               </a:rPr>
               <a:t>checking</a:t>
             </a:r>
             <a:r>
               <a:rPr lang="it-IT" dirty="0">
-                <a:latin typeface="Palatino Linotype" panose="02040502050505030304" pitchFamily="18" charset="0"/>
+                <a:latin typeface="Aptos" panose="020B0004020202020204" pitchFamily="34" charset="0"/>
               </a:rPr>
               <a:t> information</a:t>
             </a:r>
             <a:endParaRPr lang="en-GB" dirty="0">
-              <a:latin typeface="Palatino Linotype" panose="02040502050505030304" pitchFamily="18" charset="0"/>
+              <a:latin typeface="Aptos" panose="020B0004020202020204" pitchFamily="34" charset="0"/>
             </a:endParaRPr>
           </a:p>
         </p:txBody>
@@ -8085,60 +8396,60 @@
             <a:pPr algn="ctr"/>
             <a:r>
               <a:rPr lang="it-IT" dirty="0">
-                <a:latin typeface="Palatino Linotype" panose="02040502050505030304" pitchFamily="18" charset="0"/>
+                <a:latin typeface="Aptos" panose="020B0004020202020204" pitchFamily="34" charset="0"/>
               </a:rPr>
               <a:t>Source and </a:t>
             </a:r>
             <a:r>
               <a:rPr lang="it-IT" dirty="0" err="1">
-                <a:latin typeface="Palatino Linotype" panose="02040502050505030304" pitchFamily="18" charset="0"/>
+                <a:latin typeface="Aptos" panose="020B0004020202020204" pitchFamily="34" charset="0"/>
               </a:rPr>
               <a:t>destination</a:t>
             </a:r>
             <a:r>
               <a:rPr lang="it-IT" dirty="0">
-                <a:latin typeface="Palatino Linotype" panose="02040502050505030304" pitchFamily="18" charset="0"/>
+                <a:latin typeface="Aptos" panose="020B0004020202020204" pitchFamily="34" charset="0"/>
               </a:rPr>
               <a:t> MAC </a:t>
             </a:r>
             <a:r>
               <a:rPr lang="it-IT" dirty="0" err="1">
-                <a:latin typeface="Palatino Linotype" panose="02040502050505030304" pitchFamily="18" charset="0"/>
+                <a:latin typeface="Aptos" panose="020B0004020202020204" pitchFamily="34" charset="0"/>
               </a:rPr>
               <a:t>address</a:t>
             </a:r>
             <a:r>
               <a:rPr lang="it-IT" dirty="0">
-                <a:latin typeface="Palatino Linotype" panose="02040502050505030304" pitchFamily="18" charset="0"/>
+                <a:latin typeface="Aptos" panose="020B0004020202020204" pitchFamily="34" charset="0"/>
               </a:rPr>
               <a:t> (</a:t>
             </a:r>
             <a:r>
               <a:rPr lang="it-IT" dirty="0" err="1">
-                <a:latin typeface="Palatino Linotype" panose="02040502050505030304" pitchFamily="18" charset="0"/>
+                <a:latin typeface="Aptos" panose="020B0004020202020204" pitchFamily="34" charset="0"/>
               </a:rPr>
               <a:t>local</a:t>
             </a:r>
             <a:r>
               <a:rPr lang="it-IT" dirty="0">
-                <a:latin typeface="Palatino Linotype" panose="02040502050505030304" pitchFamily="18" charset="0"/>
+                <a:latin typeface="Aptos" panose="020B0004020202020204" pitchFamily="34" charset="0"/>
               </a:rPr>
               <a:t> </a:t>
             </a:r>
             <a:r>
               <a:rPr lang="it-IT" dirty="0" err="1">
-                <a:latin typeface="Palatino Linotype" panose="02040502050505030304" pitchFamily="18" charset="0"/>
+                <a:latin typeface="Aptos" panose="020B0004020202020204" pitchFamily="34" charset="0"/>
               </a:rPr>
               <a:t>address</a:t>
             </a:r>
             <a:r>
               <a:rPr lang="it-IT" dirty="0">
-                <a:latin typeface="Palatino Linotype" panose="02040502050505030304" pitchFamily="18" charset="0"/>
+                <a:latin typeface="Aptos" panose="020B0004020202020204" pitchFamily="34" charset="0"/>
               </a:rPr>
               <a:t> in a LAN)</a:t>
             </a:r>
             <a:endParaRPr lang="en-GB" dirty="0">
-              <a:latin typeface="Palatino Linotype" panose="02040502050505030304" pitchFamily="18" charset="0"/>
+              <a:latin typeface="Aptos" panose="020B0004020202020204" pitchFamily="34" charset="0"/>
             </a:endParaRPr>
           </a:p>
         </p:txBody>
@@ -8266,18 +8577,26 @@
           <a:lstStyle/>
           <a:p>
             <a:r>
-              <a:rPr lang="it-IT" dirty="0"/>
+              <a:rPr lang="it-IT" dirty="0">
+                <a:latin typeface="Aptos" panose="020B0004020202020204" pitchFamily="34" charset="0"/>
+              </a:rPr>
               <a:t>The TCP/IP </a:t>
             </a:r>
             <a:r>
-              <a:rPr lang="it-IT" dirty="0" err="1"/>
+              <a:rPr lang="it-IT" dirty="0" err="1">
+                <a:latin typeface="Aptos" panose="020B0004020202020204" pitchFamily="34" charset="0"/>
+              </a:rPr>
               <a:t>reference</a:t>
             </a:r>
             <a:r>
-              <a:rPr lang="it-IT" dirty="0"/>
+              <a:rPr lang="it-IT" dirty="0">
+                <a:latin typeface="Aptos" panose="020B0004020202020204" pitchFamily="34" charset="0"/>
+              </a:rPr>
               <a:t> model</a:t>
             </a:r>
-            <a:endParaRPr lang="en-GB" dirty="0"/>
+            <a:endParaRPr lang="en-GB" dirty="0">
+              <a:latin typeface="Aptos" panose="020B0004020202020204" pitchFamily="34" charset="0"/>
+            </a:endParaRPr>
           </a:p>
         </p:txBody>
       </p:sp>
@@ -8297,10 +8616,14 @@
           <a:lstStyle/>
           <a:p>
             <a:fld id="{31DE2C5B-556E-47B8-A792-024C2FCA4ACC}" type="slidenum">
-              <a:rPr lang="en-GB" smtClean="0"/>
+              <a:rPr lang="en-GB" smtClean="0">
+                <a:latin typeface="Aptos" panose="020B0004020202020204" pitchFamily="34" charset="0"/>
+              </a:rPr>
               <a:t>19</a:t>
             </a:fld>
-            <a:endParaRPr lang="en-GB" dirty="0"/>
+            <a:endParaRPr lang="en-GB" dirty="0">
+              <a:latin typeface="Aptos" panose="020B0004020202020204" pitchFamily="34" charset="0"/>
+            </a:endParaRPr>
           </a:p>
         </p:txBody>
       </p:sp>
@@ -8354,7 +8677,7 @@
                 <a:solidFill>
                   <a:schemeClr val="tx1"/>
                 </a:solidFill>
-                <a:latin typeface="Palatino Linotype" panose="02040502050505030304" pitchFamily="18" charset="0"/>
+                <a:latin typeface="Aptos" panose="020B0004020202020204" pitchFamily="34" charset="0"/>
               </a:rPr>
               <a:t>It</a:t>
             </a:r>
@@ -8363,7 +8686,7 @@
                 <a:solidFill>
                   <a:schemeClr val="tx1"/>
                 </a:solidFill>
-                <a:latin typeface="Palatino Linotype" panose="02040502050505030304" pitchFamily="18" charset="0"/>
+                <a:latin typeface="Aptos" panose="020B0004020202020204" pitchFamily="34" charset="0"/>
               </a:rPr>
               <a:t> </a:t>
             </a:r>
@@ -8372,7 +8695,7 @@
                 <a:solidFill>
                   <a:schemeClr val="tx1"/>
                 </a:solidFill>
-                <a:latin typeface="Palatino Linotype" panose="02040502050505030304" pitchFamily="18" charset="0"/>
+                <a:latin typeface="Aptos" panose="020B0004020202020204" pitchFamily="34" charset="0"/>
               </a:rPr>
               <a:t>physically</a:t>
             </a:r>
@@ -8381,7 +8704,7 @@
                 <a:solidFill>
                   <a:schemeClr val="tx1"/>
                 </a:solidFill>
-                <a:latin typeface="Palatino Linotype" panose="02040502050505030304" pitchFamily="18" charset="0"/>
+                <a:latin typeface="Aptos" panose="020B0004020202020204" pitchFamily="34" charset="0"/>
               </a:rPr>
               <a:t> </a:t>
             </a:r>
@@ -8390,7 +8713,7 @@
                 <a:solidFill>
                   <a:schemeClr val="tx1"/>
                 </a:solidFill>
-                <a:latin typeface="Palatino Linotype" panose="02040502050505030304" pitchFamily="18" charset="0"/>
+                <a:latin typeface="Aptos" panose="020B0004020202020204" pitchFamily="34" charset="0"/>
               </a:rPr>
               <a:t>receives</a:t>
             </a:r>
@@ -8399,7 +8722,7 @@
                 <a:solidFill>
                   <a:schemeClr val="tx1"/>
                 </a:solidFill>
-                <a:latin typeface="Palatino Linotype" panose="02040502050505030304" pitchFamily="18" charset="0"/>
+                <a:latin typeface="Aptos" panose="020B0004020202020204" pitchFamily="34" charset="0"/>
               </a:rPr>
               <a:t> and </a:t>
             </a:r>
@@ -8408,7 +8731,7 @@
                 <a:solidFill>
                   <a:schemeClr val="tx1"/>
                 </a:solidFill>
-                <a:latin typeface="Palatino Linotype" panose="02040502050505030304" pitchFamily="18" charset="0"/>
+                <a:latin typeface="Aptos" panose="020B0004020202020204" pitchFamily="34" charset="0"/>
               </a:rPr>
               <a:t>transmit</a:t>
             </a:r>
@@ -8417,7 +8740,7 @@
                 <a:solidFill>
                   <a:schemeClr val="tx1"/>
                 </a:solidFill>
-                <a:latin typeface="Palatino Linotype" panose="02040502050505030304" pitchFamily="18" charset="0"/>
+                <a:latin typeface="Aptos" panose="020B0004020202020204" pitchFamily="34" charset="0"/>
               </a:rPr>
               <a:t> </a:t>
             </a:r>
@@ -8426,7 +8749,7 @@
                 <a:solidFill>
                   <a:schemeClr val="tx1"/>
                 </a:solidFill>
-                <a:latin typeface="Palatino Linotype" panose="02040502050505030304" pitchFamily="18" charset="0"/>
+                <a:latin typeface="Aptos" panose="020B0004020202020204" pitchFamily="34" charset="0"/>
               </a:rPr>
               <a:t>raw bits over a communication channel.</a:t>
             </a:r>
@@ -8444,7 +8767,7 @@
                 <a:solidFill>
                   <a:schemeClr val="tx1"/>
                 </a:solidFill>
-                <a:latin typeface="Palatino Linotype" panose="02040502050505030304" pitchFamily="18" charset="0"/>
+                <a:latin typeface="Aptos" panose="020B0004020202020204" pitchFamily="34" charset="0"/>
               </a:rPr>
               <a:t>A standardized interface to the transmission medium (electrical, optical, or wireless communication).</a:t>
             </a:r>
@@ -8534,7 +8857,7 @@
                 <a:solidFill>
                   <a:sysClr val="windowText" lastClr="000000"/>
                 </a:solidFill>
-                <a:latin typeface="Palatino Linotype" panose="02040502050505030304" pitchFamily="18" charset="0"/>
+                <a:latin typeface="Aptos" panose="020B0004020202020204" pitchFamily="34" charset="0"/>
               </a:rPr>
               <a:t>Link </a:t>
             </a:r>
@@ -8543,7 +8866,7 @@
                 <a:solidFill>
                   <a:sysClr val="windowText" lastClr="000000"/>
                 </a:solidFill>
-                <a:latin typeface="Palatino Linotype" panose="02040502050505030304" pitchFamily="18" charset="0"/>
+                <a:latin typeface="Aptos" panose="020B0004020202020204" pitchFamily="34" charset="0"/>
               </a:rPr>
               <a:t>layer</a:t>
             </a:r>
@@ -8551,7 +8874,7 @@
               <a:solidFill>
                 <a:sysClr val="windowText" lastClr="000000"/>
               </a:solidFill>
-              <a:latin typeface="Palatino Linotype" panose="02040502050505030304" pitchFamily="18" charset="0"/>
+              <a:latin typeface="Aptos" panose="020B0004020202020204" pitchFamily="34" charset="0"/>
             </a:endParaRPr>
           </a:p>
         </p:txBody>
@@ -8603,7 +8926,7 @@
                 <a:solidFill>
                   <a:sysClr val="windowText" lastClr="000000"/>
                 </a:solidFill>
-                <a:latin typeface="Palatino Linotype" panose="02040502050505030304" pitchFamily="18" charset="0"/>
+                <a:latin typeface="Aptos" panose="020B0004020202020204" pitchFamily="34" charset="0"/>
               </a:rPr>
               <a:t>Network </a:t>
             </a:r>
@@ -8612,7 +8935,7 @@
                 <a:solidFill>
                   <a:sysClr val="windowText" lastClr="000000"/>
                 </a:solidFill>
-                <a:latin typeface="Palatino Linotype" panose="02040502050505030304" pitchFamily="18" charset="0"/>
+                <a:latin typeface="Aptos" panose="020B0004020202020204" pitchFamily="34" charset="0"/>
               </a:rPr>
               <a:t>layer</a:t>
             </a:r>
@@ -8620,7 +8943,7 @@
               <a:solidFill>
                 <a:sysClr val="windowText" lastClr="000000"/>
               </a:solidFill>
-              <a:latin typeface="Palatino Linotype" panose="02040502050505030304" pitchFamily="18" charset="0"/>
+              <a:latin typeface="Aptos" panose="020B0004020202020204" pitchFamily="34" charset="0"/>
             </a:endParaRPr>
           </a:p>
         </p:txBody>
@@ -8672,7 +8995,7 @@
                 <a:solidFill>
                   <a:sysClr val="windowText" lastClr="000000"/>
                 </a:solidFill>
-                <a:latin typeface="Palatino Linotype" panose="02040502050505030304" pitchFamily="18" charset="0"/>
+                <a:latin typeface="Aptos" panose="020B0004020202020204" pitchFamily="34" charset="0"/>
               </a:rPr>
               <a:t>Transport</a:t>
             </a:r>
@@ -8681,7 +9004,7 @@
                 <a:solidFill>
                   <a:sysClr val="windowText" lastClr="000000"/>
                 </a:solidFill>
-                <a:latin typeface="Palatino Linotype" panose="02040502050505030304" pitchFamily="18" charset="0"/>
+                <a:latin typeface="Aptos" panose="020B0004020202020204" pitchFamily="34" charset="0"/>
               </a:rPr>
               <a:t> </a:t>
             </a:r>
@@ -8690,7 +9013,7 @@
                 <a:solidFill>
                   <a:sysClr val="windowText" lastClr="000000"/>
                 </a:solidFill>
-                <a:latin typeface="Palatino Linotype" panose="02040502050505030304" pitchFamily="18" charset="0"/>
+                <a:latin typeface="Aptos" panose="020B0004020202020204" pitchFamily="34" charset="0"/>
               </a:rPr>
               <a:t>layer</a:t>
             </a:r>
@@ -8698,7 +9021,7 @@
               <a:solidFill>
                 <a:sysClr val="windowText" lastClr="000000"/>
               </a:solidFill>
-              <a:latin typeface="Palatino Linotype" panose="02040502050505030304" pitchFamily="18" charset="0"/>
+              <a:latin typeface="Aptos" panose="020B0004020202020204" pitchFamily="34" charset="0"/>
             </a:endParaRPr>
           </a:p>
         </p:txBody>
@@ -8750,7 +9073,7 @@
                 <a:solidFill>
                   <a:sysClr val="windowText" lastClr="000000"/>
                 </a:solidFill>
-                <a:latin typeface="Palatino Linotype" panose="02040502050505030304" pitchFamily="18" charset="0"/>
+                <a:latin typeface="Aptos" panose="020B0004020202020204" pitchFamily="34" charset="0"/>
               </a:rPr>
               <a:t>Application </a:t>
             </a:r>
@@ -8759,7 +9082,7 @@
                 <a:solidFill>
                   <a:sysClr val="windowText" lastClr="000000"/>
                 </a:solidFill>
-                <a:latin typeface="Palatino Linotype" panose="02040502050505030304" pitchFamily="18" charset="0"/>
+                <a:latin typeface="Aptos" panose="020B0004020202020204" pitchFamily="34" charset="0"/>
               </a:rPr>
               <a:t>layer</a:t>
             </a:r>
@@ -8767,7 +9090,7 @@
               <a:solidFill>
                 <a:sysClr val="windowText" lastClr="000000"/>
               </a:solidFill>
-              <a:latin typeface="Palatino Linotype" panose="02040502050505030304" pitchFamily="18" charset="0"/>
+              <a:latin typeface="Aptos" panose="020B0004020202020204" pitchFamily="34" charset="0"/>
             </a:endParaRPr>
           </a:p>
         </p:txBody>
@@ -8819,7 +9142,7 @@
                 <a:solidFill>
                   <a:sysClr val="windowText" lastClr="000000"/>
                 </a:solidFill>
-                <a:latin typeface="Palatino Linotype" panose="02040502050505030304" pitchFamily="18" charset="0"/>
+                <a:latin typeface="Aptos" panose="020B0004020202020204" pitchFamily="34" charset="0"/>
               </a:rPr>
               <a:t>Physical</a:t>
             </a:r>
@@ -8828,7 +9151,7 @@
                 <a:solidFill>
                   <a:sysClr val="windowText" lastClr="000000"/>
                 </a:solidFill>
-                <a:latin typeface="Palatino Linotype" panose="02040502050505030304" pitchFamily="18" charset="0"/>
+                <a:latin typeface="Aptos" panose="020B0004020202020204" pitchFamily="34" charset="0"/>
               </a:rPr>
               <a:t> </a:t>
             </a:r>
@@ -8837,7 +9160,7 @@
                 <a:solidFill>
                   <a:sysClr val="windowText" lastClr="000000"/>
                 </a:solidFill>
-                <a:latin typeface="Palatino Linotype" panose="02040502050505030304" pitchFamily="18" charset="0"/>
+                <a:latin typeface="Aptos" panose="020B0004020202020204" pitchFamily="34" charset="0"/>
               </a:rPr>
               <a:t>layer</a:t>
             </a:r>
@@ -8845,7 +9168,7 @@
               <a:solidFill>
                 <a:sysClr val="windowText" lastClr="000000"/>
               </a:solidFill>
-              <a:latin typeface="Palatino Linotype" panose="02040502050505030304" pitchFamily="18" charset="0"/>
+              <a:latin typeface="Aptos" panose="020B0004020202020204" pitchFamily="34" charset="0"/>
             </a:endParaRPr>
           </a:p>
         </p:txBody>
@@ -8889,7 +9212,9 @@
           <a:lstStyle/>
           <a:p>
             <a:pPr algn="ctr"/>
-            <a:endParaRPr lang="en-GB"/>
+            <a:endParaRPr lang="en-GB">
+              <a:latin typeface="Aptos" panose="020B0004020202020204" pitchFamily="34" charset="0"/>
+            </a:endParaRPr>
           </a:p>
         </p:txBody>
       </p:sp>
@@ -8902,7 +9227,7 @@
         <p:spPr>
           <a:xfrm>
             <a:off x="5448773" y="3709830"/>
-            <a:ext cx="5029201" cy="400110"/>
+            <a:ext cx="5029201" cy="707886"/>
           </a:xfrm>
           <a:prstGeom prst="rect">
             <a:avLst/>
@@ -8921,7 +9246,7 @@
                 <a:solidFill>
                   <a:schemeClr val="bg1"/>
                 </a:solidFill>
-                <a:latin typeface="Palatino Linotype" panose="02040502050505030304" pitchFamily="18" charset="0"/>
+                <a:latin typeface="Aptos" panose="020B0004020202020204" pitchFamily="34" charset="0"/>
               </a:rPr>
               <a:t>00010101110110101001100110101111010101</a:t>
             </a:r>
@@ -8929,7 +9254,7 @@
               <a:solidFill>
                 <a:schemeClr val="bg1"/>
               </a:solidFill>
-              <a:latin typeface="Palatino Linotype" panose="02040502050505030304" pitchFamily="18" charset="0"/>
+              <a:latin typeface="Aptos" panose="020B0004020202020204" pitchFamily="34" charset="0"/>
             </a:endParaRPr>
           </a:p>
         </p:txBody>
@@ -8980,10 +9305,14 @@
           <a:lstStyle/>
           <a:p>
             <a:r>
-              <a:rPr lang="it-IT" dirty="0"/>
+              <a:rPr lang="it-IT" dirty="0">
+                <a:latin typeface="Aptos" panose="020B0004020202020204" pitchFamily="34" charset="0"/>
+              </a:rPr>
               <a:t>Computer networks</a:t>
             </a:r>
-            <a:endParaRPr lang="en-GB" dirty="0"/>
+            <a:endParaRPr lang="en-GB" dirty="0">
+              <a:latin typeface="Aptos" panose="020B0004020202020204" pitchFamily="34" charset="0"/>
+            </a:endParaRPr>
           </a:p>
         </p:txBody>
       </p:sp>
@@ -9010,58 +9339,79 @@
           <a:lstStyle/>
           <a:p>
             <a:r>
-              <a:rPr lang="en-US" dirty="0"/>
+              <a:rPr lang="en-US" dirty="0">
+                <a:latin typeface="Aptos" panose="020B0004020202020204" pitchFamily="34" charset="0"/>
+              </a:rPr>
               <a:t>Data collected by wearable IoT sensors are shared among different devices running over a computer network, typically the Internet.</a:t>
             </a:r>
           </a:p>
           <a:p>
-            <a:endParaRPr lang="en-US" dirty="0"/>
-          </a:p>
-          <a:p>
-            <a:r>
-              <a:rPr lang="en-US" b="1" dirty="0"/>
+            <a:endParaRPr lang="en-US" dirty="0">
+              <a:latin typeface="Aptos" panose="020B0004020202020204" pitchFamily="34" charset="0"/>
+            </a:endParaRPr>
+          </a:p>
+          <a:p>
+            <a:r>
+              <a:rPr lang="en-US" b="1" dirty="0">
+                <a:latin typeface="Aptos" panose="020B0004020202020204" pitchFamily="34" charset="0"/>
+              </a:rPr>
               <a:t>Computer network: </a:t>
             </a:r>
             <a:r>
-              <a:rPr lang="en-US" dirty="0"/>
+              <a:rPr lang="en-US" dirty="0">
+                <a:latin typeface="Aptos" panose="020B0004020202020204" pitchFamily="34" charset="0"/>
+              </a:rPr>
               <a:t>a collection of autonomous computers (</a:t>
             </a:r>
             <a:r>
-              <a:rPr lang="en-US" b="1" dirty="0"/>
+              <a:rPr lang="en-US" b="1" dirty="0">
+                <a:latin typeface="Aptos" panose="020B0004020202020204" pitchFamily="34" charset="0"/>
+              </a:rPr>
               <a:t>hosts</a:t>
             </a:r>
             <a:r>
-              <a:rPr lang="en-US" dirty="0"/>
+              <a:rPr lang="en-US" dirty="0">
+                <a:latin typeface="Aptos" panose="020B0004020202020204" pitchFamily="34" charset="0"/>
+              </a:rPr>
               <a:t>) interconnected by a single technology. </a:t>
             </a:r>
           </a:p>
           <a:p>
-            <a:endParaRPr lang="en-US" dirty="0"/>
-          </a:p>
-          <a:p>
-            <a:r>
-              <a:rPr lang="en-US" dirty="0"/>
+            <a:endParaRPr lang="en-US" dirty="0">
+              <a:latin typeface="Aptos" panose="020B0004020202020204" pitchFamily="34" charset="0"/>
+            </a:endParaRPr>
+          </a:p>
+          <a:p>
+            <a:r>
+              <a:rPr lang="en-US" dirty="0">
+                <a:latin typeface="Aptos" panose="020B0004020202020204" pitchFamily="34" charset="0"/>
+              </a:rPr>
               <a:t>Two computers are said to be interconnected if they are able to exchange information.</a:t>
             </a:r>
           </a:p>
           <a:p>
-            <a:endParaRPr lang="en-US" dirty="0"/>
+            <a:endParaRPr lang="en-US" dirty="0">
+              <a:latin typeface="Aptos" panose="020B0004020202020204" pitchFamily="34" charset="0"/>
+            </a:endParaRPr>
           </a:p>
           <a:p>
             <a:r>
               <a:rPr lang="en-US" dirty="0">
+                <a:latin typeface="Aptos" panose="020B0004020202020204" pitchFamily="34" charset="0"/>
                 <a:sym typeface="Wingdings" panose="05000000000000000000" pitchFamily="2" charset="2"/>
               </a:rPr>
               <a:t>Purpose of computer networks: to </a:t>
             </a:r>
             <a:r>
               <a:rPr lang="en-US" b="1" dirty="0">
+                <a:latin typeface="Aptos" panose="020B0004020202020204" pitchFamily="34" charset="0"/>
                 <a:sym typeface="Wingdings" panose="05000000000000000000" pitchFamily="2" charset="2"/>
               </a:rPr>
               <a:t>share resources </a:t>
             </a:r>
             <a:r>
               <a:rPr lang="en-US" dirty="0">
+                <a:latin typeface="Aptos" panose="020B0004020202020204" pitchFamily="34" charset="0"/>
                 <a:sym typeface="Wingdings" panose="05000000000000000000" pitchFamily="2" charset="2"/>
               </a:rPr>
               <a:t>(e.g. data and applications). </a:t>
@@ -9085,10 +9435,14 @@
           <a:lstStyle/>
           <a:p>
             <a:fld id="{31DE2C5B-556E-47B8-A792-024C2FCA4ACC}" type="slidenum">
-              <a:rPr lang="en-GB" smtClean="0"/>
+              <a:rPr lang="en-GB" smtClean="0">
+                <a:latin typeface="Aptos" panose="020B0004020202020204" pitchFamily="34" charset="0"/>
+              </a:rPr>
               <a:t>2</a:t>
             </a:fld>
-            <a:endParaRPr lang="en-GB"/>
+            <a:endParaRPr lang="en-GB">
+              <a:latin typeface="Aptos" panose="020B0004020202020204" pitchFamily="34" charset="0"/>
+            </a:endParaRPr>
           </a:p>
         </p:txBody>
       </p:sp>
@@ -9328,10 +9682,14 @@
           <a:lstStyle/>
           <a:p>
             <a:r>
-              <a:rPr lang="it-IT" dirty="0"/>
+              <a:rPr lang="it-IT" dirty="0">
+                <a:latin typeface="Aptos" panose="020B0004020202020204" pitchFamily="34" charset="0"/>
+              </a:rPr>
               <a:t>World Wide Web</a:t>
             </a:r>
-            <a:endParaRPr lang="en-GB" dirty="0"/>
+            <a:endParaRPr lang="en-GB" dirty="0">
+              <a:latin typeface="Aptos" panose="020B0004020202020204" pitchFamily="34" charset="0"/>
+            </a:endParaRPr>
           </a:p>
         </p:txBody>
       </p:sp>
@@ -9358,92 +9716,128 @@
           <a:lstStyle/>
           <a:p>
             <a:r>
-              <a:rPr lang="en-GB" sz="2200" dirty="0"/>
+              <a:rPr lang="en-GB" sz="2200" dirty="0">
+                <a:latin typeface="Aptos" panose="020B0004020202020204" pitchFamily="34" charset="0"/>
+              </a:rPr>
               <a:t>An architectural framework for accessing linked content spread out over millions of machines all over the Internet.</a:t>
             </a:r>
           </a:p>
           <a:p>
             <a:r>
-              <a:rPr lang="it-IT" sz="2200" dirty="0"/>
+              <a:rPr lang="it-IT" sz="2200" dirty="0">
+                <a:latin typeface="Aptos" panose="020B0004020202020204" pitchFamily="34" charset="0"/>
+              </a:rPr>
               <a:t>How the Web </a:t>
             </a:r>
             <a:r>
-              <a:rPr lang="it-IT" sz="2200" dirty="0" err="1"/>
+              <a:rPr lang="it-IT" sz="2200" dirty="0" err="1">
+                <a:latin typeface="Aptos" panose="020B0004020202020204" pitchFamily="34" charset="0"/>
+              </a:rPr>
               <a:t>was</a:t>
             </a:r>
             <a:r>
-              <a:rPr lang="it-IT" sz="2200" dirty="0"/>
+              <a:rPr lang="it-IT" sz="2200" dirty="0">
+                <a:latin typeface="Aptos" panose="020B0004020202020204" pitchFamily="34" charset="0"/>
+              </a:rPr>
               <a:t> </a:t>
             </a:r>
             <a:r>
-              <a:rPr lang="it-IT" sz="2200" dirty="0" err="1"/>
+              <a:rPr lang="it-IT" sz="2200" dirty="0" err="1">
+                <a:latin typeface="Aptos" panose="020B0004020202020204" pitchFamily="34" charset="0"/>
+              </a:rPr>
               <a:t>born</a:t>
             </a:r>
             <a:r>
-              <a:rPr lang="it-IT" sz="2200" dirty="0"/>
+              <a:rPr lang="it-IT" sz="2200" dirty="0">
+                <a:latin typeface="Aptos" panose="020B0004020202020204" pitchFamily="34" charset="0"/>
+              </a:rPr>
               <a:t>: </a:t>
             </a:r>
-            <a:endParaRPr lang="en-GB" sz="2200" dirty="0"/>
+            <a:endParaRPr lang="en-GB" sz="2200" dirty="0">
+              <a:latin typeface="Aptos" panose="020B0004020202020204" pitchFamily="34" charset="0"/>
+            </a:endParaRPr>
           </a:p>
           <a:p>
             <a:pPr lvl="1"/>
             <a:r>
-              <a:rPr lang="en-GB" sz="2200" dirty="0"/>
+              <a:rPr lang="en-GB" sz="2200" dirty="0">
+                <a:latin typeface="Aptos" panose="020B0004020202020204" pitchFamily="34" charset="0"/>
+              </a:rPr>
               <a:t>1989, Geneva, CERN: the physicist Tim Berners-Lee proposed to develop a web of linked documents to help large research teams</a:t>
             </a:r>
           </a:p>
           <a:p>
             <a:pPr lvl="1"/>
             <a:r>
-              <a:rPr lang="en-GB" sz="2200" dirty="0"/>
+              <a:rPr lang="en-GB" sz="2200" dirty="0">
+                <a:latin typeface="Aptos" panose="020B0004020202020204" pitchFamily="34" charset="0"/>
+              </a:rPr>
               <a:t>1991, San Antonio, Texas: First prototype of Web presented at the Hypertext ’91 conference </a:t>
             </a:r>
           </a:p>
           <a:p>
             <a:pPr lvl="1"/>
             <a:r>
-              <a:rPr lang="it-IT" sz="2200" dirty="0"/>
+              <a:rPr lang="it-IT" sz="2200" dirty="0">
+                <a:latin typeface="Aptos" panose="020B0004020202020204" pitchFamily="34" charset="0"/>
+              </a:rPr>
               <a:t>1993, </a:t>
             </a:r>
             <a:r>
-              <a:rPr lang="en-GB" sz="2200" dirty="0"/>
+              <a:rPr lang="en-GB" sz="2200" dirty="0">
+                <a:latin typeface="Aptos" panose="020B0004020202020204" pitchFamily="34" charset="0"/>
+              </a:rPr>
               <a:t>Champaign, Illinois: First graphical browser (Mosaic) developed by Marc Andreessen (University of Illinois).</a:t>
             </a:r>
           </a:p>
           <a:p>
             <a:pPr lvl="1"/>
             <a:r>
-              <a:rPr lang="it-IT" sz="2200" dirty="0"/>
+              <a:rPr lang="it-IT" sz="2200" dirty="0">
+                <a:latin typeface="Aptos" panose="020B0004020202020204" pitchFamily="34" charset="0"/>
+              </a:rPr>
               <a:t>1994, Mountain </a:t>
             </a:r>
             <a:r>
-              <a:rPr lang="it-IT" sz="2200" dirty="0" err="1"/>
+              <a:rPr lang="it-IT" sz="2200" dirty="0" err="1">
+                <a:latin typeface="Aptos" panose="020B0004020202020204" pitchFamily="34" charset="0"/>
+              </a:rPr>
               <a:t>View</a:t>
             </a:r>
             <a:r>
-              <a:rPr lang="it-IT" sz="2200" dirty="0"/>
+              <a:rPr lang="it-IT" sz="2200" dirty="0">
+                <a:latin typeface="Aptos" panose="020B0004020202020204" pitchFamily="34" charset="0"/>
+              </a:rPr>
               <a:t>, California: </a:t>
             </a:r>
             <a:r>
-              <a:rPr lang="en-GB" sz="2200" dirty="0"/>
+              <a:rPr lang="en-GB" sz="2200" dirty="0">
+                <a:latin typeface="Aptos" panose="020B0004020202020204" pitchFamily="34" charset="0"/>
+              </a:rPr>
               <a:t>Marc Andreessen found the company Netscape Communications Corp., whose goal was to develop Web software. </a:t>
             </a:r>
           </a:p>
           <a:p>
             <a:pPr lvl="1"/>
             <a:r>
-              <a:rPr lang="it-IT" sz="2200" dirty="0"/>
+              <a:rPr lang="it-IT" sz="2200" dirty="0">
+                <a:latin typeface="Aptos" panose="020B0004020202020204" pitchFamily="34" charset="0"/>
+              </a:rPr>
               <a:t>1994: </a:t>
             </a:r>
             <a:r>
-              <a:rPr lang="en-GB" sz="2200" dirty="0"/>
+              <a:rPr lang="en-GB" sz="2200" dirty="0">
+                <a:latin typeface="Aptos" panose="020B0004020202020204" pitchFamily="34" charset="0"/>
+              </a:rPr>
               <a:t>CERN and M.I.T. Foundation of the World Wide Web Consortium (W3C), an organization devoted to further developing the Web, standardizing protocols, and encouraging interoperability between sites. </a:t>
             </a:r>
           </a:p>
           <a:p>
             <a:pPr lvl="1"/>
             <a:r>
-              <a:rPr lang="en-GB" sz="2200" dirty="0"/>
+              <a:rPr lang="en-GB" sz="2200" dirty="0">
+                <a:latin typeface="Aptos" panose="020B0004020202020204" pitchFamily="34" charset="0"/>
+              </a:rPr>
               <a:t>1994 - today: The Web has grown exponentially…</a:t>
             </a:r>
           </a:p>
@@ -9465,10 +9859,14 @@
           <a:lstStyle/>
           <a:p>
             <a:fld id="{31DE2C5B-556E-47B8-A792-024C2FCA4ACC}" type="slidenum">
-              <a:rPr lang="en-GB" smtClean="0"/>
+              <a:rPr lang="en-GB" smtClean="0">
+                <a:latin typeface="Aptos" panose="020B0004020202020204" pitchFamily="34" charset="0"/>
+              </a:rPr>
               <a:t>20</a:t>
             </a:fld>
-            <a:endParaRPr lang="en-GB"/>
+            <a:endParaRPr lang="en-GB">
+              <a:latin typeface="Aptos" panose="020B0004020202020204" pitchFamily="34" charset="0"/>
+            </a:endParaRPr>
           </a:p>
         </p:txBody>
       </p:sp>
@@ -9518,18 +9916,26 @@
           <a:lstStyle/>
           <a:p>
             <a:r>
-              <a:rPr lang="it-IT" dirty="0" err="1"/>
+              <a:rPr lang="it-IT" dirty="0" err="1">
+                <a:latin typeface="Aptos" panose="020B0004020202020204" pitchFamily="34" charset="0"/>
+              </a:rPr>
               <a:t>Architectural</a:t>
             </a:r>
             <a:r>
-              <a:rPr lang="it-IT" dirty="0"/>
+              <a:rPr lang="it-IT" dirty="0">
+                <a:latin typeface="Aptos" panose="020B0004020202020204" pitchFamily="34" charset="0"/>
+              </a:rPr>
               <a:t> </a:t>
             </a:r>
             <a:r>
-              <a:rPr lang="it-IT" dirty="0" err="1"/>
+              <a:rPr lang="it-IT" dirty="0" err="1">
+                <a:latin typeface="Aptos" panose="020B0004020202020204" pitchFamily="34" charset="0"/>
+              </a:rPr>
               <a:t>overview</a:t>
             </a:r>
-            <a:endParaRPr lang="en-GB" dirty="0"/>
+            <a:endParaRPr lang="en-GB" dirty="0">
+              <a:latin typeface="Aptos" panose="020B0004020202020204" pitchFamily="34" charset="0"/>
+            </a:endParaRPr>
           </a:p>
         </p:txBody>
       </p:sp>
@@ -9556,91 +9962,129 @@
           <a:lstStyle/>
           <a:p>
             <a:r>
-              <a:rPr lang="en-US" dirty="0"/>
+              <a:rPr lang="en-US" dirty="0">
+                <a:latin typeface="Aptos" panose="020B0004020202020204" pitchFamily="34" charset="0"/>
+              </a:rPr>
               <a:t>The Web is a vast, worldwide collection of contents in the form of </a:t>
             </a:r>
             <a:r>
-              <a:rPr lang="en-US" b="1" dirty="0"/>
+              <a:rPr lang="en-US" b="1" dirty="0">
+                <a:latin typeface="Aptos" panose="020B0004020202020204" pitchFamily="34" charset="0"/>
+              </a:rPr>
               <a:t>Web pages</a:t>
             </a:r>
             <a:r>
-              <a:rPr lang="en-US" dirty="0"/>
+              <a:rPr lang="en-US" dirty="0">
+                <a:latin typeface="Aptos" panose="020B0004020202020204" pitchFamily="34" charset="0"/>
+              </a:rPr>
               <a:t>, accessed and shared through the Internet according to a </a:t>
             </a:r>
             <a:r>
-              <a:rPr lang="en-US" b="1" dirty="0"/>
+              <a:rPr lang="en-US" b="1" dirty="0">
+                <a:latin typeface="Aptos" panose="020B0004020202020204" pitchFamily="34" charset="0"/>
+              </a:rPr>
               <a:t>client-server architecture </a:t>
             </a:r>
             <a:r>
-              <a:rPr lang="en-US" dirty="0"/>
+              <a:rPr lang="en-US" dirty="0">
+                <a:latin typeface="Aptos" panose="020B0004020202020204" pitchFamily="34" charset="0"/>
+              </a:rPr>
               <a:t>model. </a:t>
             </a:r>
           </a:p>
           <a:p>
             <a:pPr lvl="1"/>
             <a:r>
-              <a:rPr lang="en-US" sz="2200" dirty="0"/>
+              <a:rPr lang="en-US" sz="2200" dirty="0">
+                <a:latin typeface="Aptos" panose="020B0004020202020204" pitchFamily="34" charset="0"/>
+              </a:rPr>
               <a:t>Pages can contain text, images, videos, programs that produce a graphical interface with which users can interact, etc.</a:t>
             </a:r>
-            <a:endParaRPr lang="en-US" sz="2200" b="1" dirty="0"/>
-          </a:p>
-          <a:p>
-            <a:r>
-              <a:rPr lang="en-US" dirty="0"/>
+            <a:endParaRPr lang="en-US" sz="2200" b="1" dirty="0">
+              <a:latin typeface="Aptos" panose="020B0004020202020204" pitchFamily="34" charset="0"/>
+            </a:endParaRPr>
+          </a:p>
+          <a:p>
+            <a:r>
+              <a:rPr lang="en-US" dirty="0">
+                <a:latin typeface="Aptos" panose="020B0004020202020204" pitchFamily="34" charset="0"/>
+              </a:rPr>
               <a:t>Each page may contain </a:t>
             </a:r>
             <a:r>
-              <a:rPr lang="en-US" b="1" dirty="0"/>
+              <a:rPr lang="en-US" b="1" dirty="0">
+                <a:latin typeface="Aptos" panose="020B0004020202020204" pitchFamily="34" charset="0"/>
+              </a:rPr>
               <a:t>links</a:t>
             </a:r>
             <a:r>
-              <a:rPr lang="en-US" dirty="0"/>
+              <a:rPr lang="en-US" dirty="0">
+                <a:latin typeface="Aptos" panose="020B0004020202020204" pitchFamily="34" charset="0"/>
+              </a:rPr>
               <a:t> to other pages. A piece of text, icon, image, etc. associated with another page is called a </a:t>
             </a:r>
             <a:r>
-              <a:rPr lang="en-US" b="1" dirty="0"/>
+              <a:rPr lang="en-US" b="1" dirty="0">
+                <a:latin typeface="Aptos" panose="020B0004020202020204" pitchFamily="34" charset="0"/>
+              </a:rPr>
               <a:t>hyperlink. </a:t>
             </a:r>
           </a:p>
           <a:p>
             <a:r>
-              <a:rPr lang="en-US" dirty="0"/>
+              <a:rPr lang="en-US" dirty="0">
+                <a:latin typeface="Aptos" panose="020B0004020202020204" pitchFamily="34" charset="0"/>
+              </a:rPr>
               <a:t>A page can be static or dynamic.</a:t>
             </a:r>
           </a:p>
           <a:p>
             <a:pPr lvl="1"/>
             <a:r>
-              <a:rPr lang="en-US" sz="2200" b="1" dirty="0"/>
+              <a:rPr lang="en-US" sz="2200" b="1" dirty="0">
+                <a:latin typeface="Aptos" panose="020B0004020202020204" pitchFamily="34" charset="0"/>
+              </a:rPr>
               <a:t>Static page</a:t>
             </a:r>
             <a:r>
-              <a:rPr lang="en-US" sz="2200" dirty="0"/>
+              <a:rPr lang="en-US" sz="2200" dirty="0">
+                <a:latin typeface="Aptos" panose="020B0004020202020204" pitchFamily="34" charset="0"/>
+              </a:rPr>
               <a:t>: a document that is the same every time it is displayed.</a:t>
             </a:r>
           </a:p>
           <a:p>
             <a:pPr lvl="1"/>
             <a:r>
-              <a:rPr lang="en-US" sz="2200" b="1" dirty="0"/>
+              <a:rPr lang="en-US" sz="2200" b="1" dirty="0">
+                <a:latin typeface="Aptos" panose="020B0004020202020204" pitchFamily="34" charset="0"/>
+              </a:rPr>
               <a:t>Dynamic page</a:t>
             </a:r>
             <a:r>
-              <a:rPr lang="en-US" sz="2200" dirty="0"/>
+              <a:rPr lang="en-US" sz="2200" dirty="0">
+                <a:latin typeface="Aptos" panose="020B0004020202020204" pitchFamily="34" charset="0"/>
+              </a:rPr>
               <a:t>: a page that contains a program generating dynamic content or that is generated on demand by a program.</a:t>
             </a:r>
           </a:p>
           <a:p>
             <a:r>
-              <a:rPr lang="en-US" dirty="0"/>
+              <a:rPr lang="en-US" dirty="0">
+                <a:latin typeface="Aptos" panose="020B0004020202020204" pitchFamily="34" charset="0"/>
+              </a:rPr>
               <a:t>A </a:t>
             </a:r>
             <a:r>
-              <a:rPr lang="en-US" b="1" dirty="0"/>
+              <a:rPr lang="en-US" b="1" dirty="0">
+                <a:latin typeface="Aptos" panose="020B0004020202020204" pitchFamily="34" charset="0"/>
+              </a:rPr>
               <a:t>Web site </a:t>
             </a:r>
             <a:r>
-              <a:rPr lang="en-US" dirty="0"/>
+              <a:rPr lang="en-US" dirty="0">
+                <a:latin typeface="Aptos" panose="020B0004020202020204" pitchFamily="34" charset="0"/>
+              </a:rPr>
               <a:t>is a collection of Web pages.</a:t>
             </a:r>
           </a:p>
@@ -9662,10 +10106,14 @@
           <a:lstStyle/>
           <a:p>
             <a:fld id="{31DE2C5B-556E-47B8-A792-024C2FCA4ACC}" type="slidenum">
-              <a:rPr lang="en-GB" smtClean="0"/>
+              <a:rPr lang="en-GB" smtClean="0">
+                <a:latin typeface="Aptos" panose="020B0004020202020204" pitchFamily="34" charset="0"/>
+              </a:rPr>
               <a:t>21</a:t>
             </a:fld>
-            <a:endParaRPr lang="en-GB"/>
+            <a:endParaRPr lang="en-GB">
+              <a:latin typeface="Aptos" panose="020B0004020202020204" pitchFamily="34" charset="0"/>
+            </a:endParaRPr>
           </a:p>
         </p:txBody>
       </p:sp>
@@ -9715,18 +10163,26 @@
           <a:lstStyle/>
           <a:p>
             <a:r>
-              <a:rPr lang="it-IT" dirty="0" err="1"/>
+              <a:rPr lang="it-IT" dirty="0" err="1">
+                <a:latin typeface="Aptos" panose="020B0004020202020204" pitchFamily="34" charset="0"/>
+              </a:rPr>
               <a:t>Architectural</a:t>
             </a:r>
             <a:r>
-              <a:rPr lang="it-IT" dirty="0"/>
+              <a:rPr lang="it-IT" dirty="0">
+                <a:latin typeface="Aptos" panose="020B0004020202020204" pitchFamily="34" charset="0"/>
+              </a:rPr>
               <a:t> </a:t>
             </a:r>
             <a:r>
-              <a:rPr lang="it-IT" dirty="0" err="1"/>
+              <a:rPr lang="it-IT" dirty="0" err="1">
+                <a:latin typeface="Aptos" panose="020B0004020202020204" pitchFamily="34" charset="0"/>
+              </a:rPr>
               <a:t>overview</a:t>
             </a:r>
-            <a:endParaRPr lang="en-GB" dirty="0"/>
+            <a:endParaRPr lang="en-GB" dirty="0">
+              <a:latin typeface="Aptos" panose="020B0004020202020204" pitchFamily="34" charset="0"/>
+            </a:endParaRPr>
           </a:p>
         </p:txBody>
       </p:sp>
@@ -9753,42 +10209,60 @@
           <a:lstStyle/>
           <a:p>
             <a:r>
-              <a:rPr lang="en-GB" sz="2200" b="1" dirty="0"/>
+              <a:rPr lang="en-GB" sz="2200" b="1" dirty="0">
+                <a:latin typeface="Aptos" panose="020B0004020202020204" pitchFamily="34" charset="0"/>
+              </a:rPr>
               <a:t>Browser</a:t>
             </a:r>
             <a:r>
-              <a:rPr lang="en-GB" sz="2200" dirty="0"/>
+              <a:rPr lang="en-GB" sz="2200" dirty="0">
+                <a:latin typeface="Aptos" panose="020B0004020202020204" pitchFamily="34" charset="0"/>
+              </a:rPr>
               <a:t>: program running on the client to view Web pages </a:t>
             </a:r>
           </a:p>
           <a:p>
-            <a:endParaRPr lang="en-GB" sz="2200" dirty="0"/>
-          </a:p>
-          <a:p>
-            <a:r>
-              <a:rPr lang="en-GB" sz="2200" dirty="0"/>
+            <a:endParaRPr lang="en-GB" sz="2200" dirty="0">
+              <a:latin typeface="Aptos" panose="020B0004020202020204" pitchFamily="34" charset="0"/>
+            </a:endParaRPr>
+          </a:p>
+          <a:p>
+            <a:r>
+              <a:rPr lang="en-GB" sz="2200" dirty="0">
+                <a:latin typeface="Aptos" panose="020B0004020202020204" pitchFamily="34" charset="0"/>
+              </a:rPr>
               <a:t>The browser requests the page to the server, receives it, interprets the content, and displays the page, properly formatted, on the screen.</a:t>
             </a:r>
           </a:p>
           <a:p>
-            <a:endParaRPr lang="en-GB" sz="2200" dirty="0"/>
-          </a:p>
-          <a:p>
-            <a:r>
-              <a:rPr lang="en-GB" sz="2200" dirty="0"/>
+            <a:endParaRPr lang="en-GB" sz="2200" dirty="0">
+              <a:latin typeface="Aptos" panose="020B0004020202020204" pitchFamily="34" charset="0"/>
+            </a:endParaRPr>
+          </a:p>
+          <a:p>
+            <a:r>
+              <a:rPr lang="en-GB" sz="2200" dirty="0">
+                <a:latin typeface="Aptos" panose="020B0004020202020204" pitchFamily="34" charset="0"/>
+              </a:rPr>
               <a:t>The request-response application protocol for fetching pages is a simple text-based protocol that runs over TCP, called </a:t>
             </a:r>
             <a:r>
-              <a:rPr lang="en-GB" sz="2200" b="1" dirty="0" err="1"/>
+              <a:rPr lang="en-GB" sz="2200" b="1" dirty="0" err="1">
+                <a:latin typeface="Aptos" panose="020B0004020202020204" pitchFamily="34" charset="0"/>
+              </a:rPr>
               <a:t>HyperText</a:t>
             </a:r>
             <a:r>
-              <a:rPr lang="en-GB" sz="2200" b="1" dirty="0"/>
+              <a:rPr lang="en-GB" sz="2200" b="1" dirty="0">
+                <a:latin typeface="Aptos" panose="020B0004020202020204" pitchFamily="34" charset="0"/>
+              </a:rPr>
               <a:t> Transfer Protocol (HTTP).</a:t>
             </a:r>
           </a:p>
           <a:p>
-            <a:endParaRPr lang="en-GB" sz="2200" dirty="0"/>
+            <a:endParaRPr lang="en-GB" sz="2200" dirty="0">
+              <a:latin typeface="Aptos" panose="020B0004020202020204" pitchFamily="34" charset="0"/>
+            </a:endParaRPr>
           </a:p>
         </p:txBody>
       </p:sp>
@@ -9838,10 +10312,14 @@
           <a:lstStyle/>
           <a:p>
             <a:fld id="{31DE2C5B-556E-47B8-A792-024C2FCA4ACC}" type="slidenum">
-              <a:rPr lang="en-GB" smtClean="0"/>
+              <a:rPr lang="en-GB" smtClean="0">
+                <a:latin typeface="Aptos" panose="020B0004020202020204" pitchFamily="34" charset="0"/>
+              </a:rPr>
               <a:t>22</a:t>
             </a:fld>
-            <a:endParaRPr lang="en-GB"/>
+            <a:endParaRPr lang="en-GB">
+              <a:latin typeface="Aptos" panose="020B0004020202020204" pitchFamily="34" charset="0"/>
+            </a:endParaRPr>
           </a:p>
         </p:txBody>
       </p:sp>
@@ -9891,14 +10369,20 @@
           <a:lstStyle/>
           <a:p>
             <a:r>
-              <a:rPr lang="it-IT" dirty="0"/>
+              <a:rPr lang="it-IT" dirty="0">
+                <a:latin typeface="Aptos" panose="020B0004020202020204" pitchFamily="34" charset="0"/>
+              </a:rPr>
               <a:t>The server </a:t>
             </a:r>
             <a:r>
-              <a:rPr lang="it-IT" dirty="0" err="1"/>
+              <a:rPr lang="it-IT" dirty="0" err="1">
+                <a:latin typeface="Aptos" panose="020B0004020202020204" pitchFamily="34" charset="0"/>
+              </a:rPr>
               <a:t>structure</a:t>
             </a:r>
-            <a:endParaRPr lang="en-GB" dirty="0"/>
+            <a:endParaRPr lang="en-GB" dirty="0">
+              <a:latin typeface="Aptos" panose="020B0004020202020204" pitchFamily="34" charset="0"/>
+            </a:endParaRPr>
           </a:p>
         </p:txBody>
       </p:sp>
@@ -9925,50 +10409,70 @@
           <a:lstStyle/>
           <a:p>
             <a:r>
-              <a:rPr lang="en-US" sz="2600" dirty="0"/>
+              <a:rPr lang="en-US" sz="2600" dirty="0">
+                <a:latin typeface="Aptos" panose="020B0004020202020204" pitchFamily="34" charset="0"/>
+              </a:rPr>
               <a:t>Web servers are designed with a </a:t>
             </a:r>
             <a:r>
-              <a:rPr lang="en-US" sz="2600" b="1" dirty="0"/>
+              <a:rPr lang="en-US" sz="2600" b="1" dirty="0">
+                <a:latin typeface="Aptos" panose="020B0004020202020204" pitchFamily="34" charset="0"/>
+              </a:rPr>
               <a:t>multithreaded design </a:t>
             </a:r>
             <a:r>
-              <a:rPr lang="en-US" sz="2600" dirty="0"/>
+              <a:rPr lang="en-US" sz="2600" dirty="0">
+                <a:latin typeface="Aptos" panose="020B0004020202020204" pitchFamily="34" charset="0"/>
+              </a:rPr>
               <a:t>to manage multiple requests at a time. </a:t>
             </a:r>
           </a:p>
           <a:p>
             <a:pPr lvl="1"/>
             <a:r>
-              <a:rPr lang="en-GB" sz="2600" dirty="0"/>
+              <a:rPr lang="en-GB" sz="2600" dirty="0">
+                <a:latin typeface="Aptos" panose="020B0004020202020204" pitchFamily="34" charset="0"/>
+              </a:rPr>
               <a:t>A front-end module that accepts all incoming requests and </a:t>
             </a:r>
             <a:r>
-              <a:rPr lang="en-GB" sz="2600" i="1" dirty="0"/>
+              <a:rPr lang="en-GB" sz="2600" i="1" dirty="0">
+                <a:latin typeface="Aptos" panose="020B0004020202020204" pitchFamily="34" charset="0"/>
+              </a:rPr>
               <a:t>k </a:t>
             </a:r>
             <a:r>
-              <a:rPr lang="en-GB" sz="2600" dirty="0"/>
+              <a:rPr lang="en-GB" sz="2600" dirty="0">
+                <a:latin typeface="Aptos" panose="020B0004020202020204" pitchFamily="34" charset="0"/>
+              </a:rPr>
               <a:t>parallel</a:t>
             </a:r>
             <a:r>
-              <a:rPr lang="en-GB" sz="2600" i="1" dirty="0"/>
+              <a:rPr lang="en-GB" sz="2600" i="1" dirty="0">
+                <a:latin typeface="Aptos" panose="020B0004020202020204" pitchFamily="34" charset="0"/>
+              </a:rPr>
               <a:t> </a:t>
             </a:r>
             <a:r>
-              <a:rPr lang="en-GB" sz="2600" dirty="0"/>
+              <a:rPr lang="en-GB" sz="2600" dirty="0">
+                <a:latin typeface="Aptos" panose="020B0004020202020204" pitchFamily="34" charset="0"/>
+              </a:rPr>
               <a:t>processing modules.</a:t>
             </a:r>
           </a:p>
           <a:p>
             <a:pPr lvl="1"/>
             <a:r>
-              <a:rPr lang="en-US" sz="2600" dirty="0"/>
+              <a:rPr lang="en-US" sz="2600" dirty="0">
+                <a:latin typeface="Aptos" panose="020B0004020202020204" pitchFamily="34" charset="0"/>
+              </a:rPr>
               <a:t>The cache stores the most-recently read files. </a:t>
             </a:r>
           </a:p>
           <a:p>
-            <a:endParaRPr lang="en-GB" dirty="0"/>
+            <a:endParaRPr lang="en-GB" dirty="0">
+              <a:latin typeface="Aptos" panose="020B0004020202020204" pitchFamily="34" charset="0"/>
+            </a:endParaRPr>
           </a:p>
         </p:txBody>
       </p:sp>
@@ -10018,10 +10522,14 @@
           <a:lstStyle/>
           <a:p>
             <a:fld id="{31DE2C5B-556E-47B8-A792-024C2FCA4ACC}" type="slidenum">
-              <a:rPr lang="en-GB" smtClean="0"/>
+              <a:rPr lang="en-GB" smtClean="0">
+                <a:latin typeface="Aptos" panose="020B0004020202020204" pitchFamily="34" charset="0"/>
+              </a:rPr>
               <a:t>23</a:t>
             </a:fld>
-            <a:endParaRPr lang="en-GB"/>
+            <a:endParaRPr lang="en-GB">
+              <a:latin typeface="Aptos" panose="020B0004020202020204" pitchFamily="34" charset="0"/>
+            </a:endParaRPr>
           </a:p>
         </p:txBody>
       </p:sp>
@@ -10071,19 +10579,27 @@
           <a:lstStyle/>
           <a:p>
             <a:r>
-              <a:rPr lang="en-GB" dirty="0" err="1"/>
+              <a:rPr lang="en-GB" dirty="0" err="1">
+                <a:latin typeface="Aptos" panose="020B0004020202020204" pitchFamily="34" charset="0"/>
+              </a:rPr>
               <a:t>HyperText</a:t>
             </a:r>
             <a:r>
-              <a:rPr lang="en-GB" dirty="0"/>
+              <a:rPr lang="en-GB" dirty="0">
+                <a:latin typeface="Aptos" panose="020B0004020202020204" pitchFamily="34" charset="0"/>
+              </a:rPr>
               <a:t> </a:t>
             </a:r>
             <a:r>
-              <a:rPr lang="en-GB" dirty="0" err="1"/>
+              <a:rPr lang="en-GB" dirty="0" err="1">
+                <a:latin typeface="Aptos" panose="020B0004020202020204" pitchFamily="34" charset="0"/>
+              </a:rPr>
               <a:t>Markup</a:t>
             </a:r>
             <a:r>
-              <a:rPr lang="en-GB" dirty="0"/>
+              <a:rPr lang="en-GB" dirty="0">
+                <a:latin typeface="Aptos" panose="020B0004020202020204" pitchFamily="34" charset="0"/>
+              </a:rPr>
               <a:t> Language (HTML)</a:t>
             </a:r>
           </a:p>
@@ -10112,55 +10628,77 @@
           <a:lstStyle/>
           <a:p>
             <a:r>
-              <a:rPr lang="en-US" sz="2200" dirty="0"/>
+              <a:rPr lang="en-US" sz="2200" dirty="0">
+                <a:latin typeface="Aptos" panose="020B0004020202020204" pitchFamily="34" charset="0"/>
+              </a:rPr>
               <a:t>Web pages are written in a </a:t>
             </a:r>
             <a:r>
-              <a:rPr lang="en-US" sz="2200" b="1" dirty="0"/>
+              <a:rPr lang="en-US" sz="2200" b="1" dirty="0">
+                <a:latin typeface="Aptos" panose="020B0004020202020204" pitchFamily="34" charset="0"/>
+              </a:rPr>
               <a:t>HTML (</a:t>
             </a:r>
             <a:r>
-              <a:rPr lang="en-US" sz="2200" b="1" dirty="0" err="1"/>
+              <a:rPr lang="en-US" sz="2200" b="1" dirty="0" err="1">
+                <a:latin typeface="Aptos" panose="020B0004020202020204" pitchFamily="34" charset="0"/>
+              </a:rPr>
               <a:t>HyperText</a:t>
             </a:r>
             <a:r>
-              <a:rPr lang="en-US" sz="2200" b="1" dirty="0"/>
+              <a:rPr lang="en-US" sz="2200" b="1" dirty="0">
+                <a:latin typeface="Aptos" panose="020B0004020202020204" pitchFamily="34" charset="0"/>
+              </a:rPr>
               <a:t> Markup Language). </a:t>
             </a:r>
             <a:r>
-              <a:rPr lang="en-US" sz="2200" dirty="0"/>
+              <a:rPr lang="en-US" sz="2200" dirty="0">
+                <a:latin typeface="Aptos" panose="020B0004020202020204" pitchFamily="34" charset="0"/>
+              </a:rPr>
               <a:t>HTML is a markup language: language for describing how documents are to be formatted.</a:t>
             </a:r>
           </a:p>
           <a:p>
             <a:r>
-              <a:rPr lang="en-US" sz="2200" dirty="0"/>
+              <a:rPr lang="en-US" sz="2200" dirty="0">
+                <a:latin typeface="Aptos" panose="020B0004020202020204" pitchFamily="34" charset="0"/>
+              </a:rPr>
               <a:t>A browser is basically an HTML interpreter</a:t>
             </a:r>
           </a:p>
           <a:p>
             <a:r>
-              <a:rPr lang="en-US" sz="2200" dirty="0"/>
+              <a:rPr lang="en-US" sz="2200" dirty="0">
+                <a:latin typeface="Aptos" panose="020B0004020202020204" pitchFamily="34" charset="0"/>
+              </a:rPr>
               <a:t>HTML pages can contain text and rich content elements (e.g., MPEG, JPEG, mp3).</a:t>
             </a:r>
           </a:p>
           <a:p>
             <a:r>
-              <a:rPr lang="en-US" sz="2200" dirty="0"/>
+              <a:rPr lang="en-US" sz="2200" dirty="0">
+                <a:latin typeface="Aptos" panose="020B0004020202020204" pitchFamily="34" charset="0"/>
+              </a:rPr>
               <a:t>When a server returns a page, it also returns some information about the type of contents in the page (MIME type).</a:t>
             </a:r>
           </a:p>
           <a:p>
             <a:r>
-              <a:rPr lang="en-US" sz="2200" dirty="0"/>
+              <a:rPr lang="en-US" sz="2200" dirty="0">
+                <a:latin typeface="Aptos" panose="020B0004020202020204" pitchFamily="34" charset="0"/>
+              </a:rPr>
               <a:t>If the page content is different from text/html, the browser resorts to a </a:t>
             </a:r>
             <a:r>
-              <a:rPr lang="en-US" sz="2200" b="1" dirty="0"/>
+              <a:rPr lang="en-US" sz="2200" b="1" dirty="0">
+                <a:latin typeface="Aptos" panose="020B0004020202020204" pitchFamily="34" charset="0"/>
+              </a:rPr>
               <a:t>plug-in</a:t>
             </a:r>
             <a:r>
-              <a:rPr lang="en-US" sz="2200" dirty="0"/>
+              <a:rPr lang="en-US" sz="2200" dirty="0">
+                <a:latin typeface="Aptos" panose="020B0004020202020204" pitchFamily="34" charset="0"/>
+              </a:rPr>
               <a:t>, i.e., a third-party code module that is installed as an extension to the browser, to interpret that content (e.g., plug-in for PDF). </a:t>
             </a:r>
           </a:p>
@@ -10212,10 +10750,14 @@
           <a:lstStyle/>
           <a:p>
             <a:fld id="{31DE2C5B-556E-47B8-A792-024C2FCA4ACC}" type="slidenum">
-              <a:rPr lang="en-GB" smtClean="0"/>
+              <a:rPr lang="en-GB" smtClean="0">
+                <a:latin typeface="Aptos" panose="020B0004020202020204" pitchFamily="34" charset="0"/>
+              </a:rPr>
               <a:t>24</a:t>
             </a:fld>
-            <a:endParaRPr lang="en-GB"/>
+            <a:endParaRPr lang="en-GB">
+              <a:latin typeface="Aptos" panose="020B0004020202020204" pitchFamily="34" charset="0"/>
+            </a:endParaRPr>
           </a:p>
         </p:txBody>
       </p:sp>
@@ -10265,10 +10807,14 @@
           <a:lstStyle/>
           <a:p>
             <a:r>
-              <a:rPr lang="it-IT" dirty="0"/>
+              <a:rPr lang="it-IT" dirty="0">
+                <a:latin typeface="Aptos" panose="020B0004020202020204" pitchFamily="34" charset="0"/>
+              </a:rPr>
               <a:t>The client side</a:t>
             </a:r>
-            <a:endParaRPr lang="en-GB" dirty="0"/>
+            <a:endParaRPr lang="en-GB" dirty="0">
+              <a:latin typeface="Aptos" panose="020B0004020202020204" pitchFamily="34" charset="0"/>
+            </a:endParaRPr>
           </a:p>
         </p:txBody>
       </p:sp>
@@ -10293,52 +10839,70 @@
           <a:lstStyle/>
           <a:p>
             <a:r>
-              <a:rPr lang="en-US" sz="2000" dirty="0"/>
+              <a:rPr lang="en-US" sz="2000" dirty="0">
+                <a:latin typeface="Aptos" panose="020B0004020202020204" pitchFamily="34" charset="0"/>
+              </a:rPr>
               <a:t>How can the browser retrieve a page? </a:t>
             </a:r>
           </a:p>
           <a:p>
             <a:r>
-              <a:rPr lang="en-US" sz="2000" dirty="0"/>
+              <a:rPr lang="en-US" sz="2000" dirty="0">
+                <a:latin typeface="Aptos" panose="020B0004020202020204" pitchFamily="34" charset="0"/>
+              </a:rPr>
               <a:t>Each page is assigned an identifier called </a:t>
             </a:r>
             <a:r>
-              <a:rPr lang="en-US" sz="2000" b="1" dirty="0"/>
+              <a:rPr lang="en-US" sz="2000" b="1" dirty="0">
+                <a:latin typeface="Aptos" panose="020B0004020202020204" pitchFamily="34" charset="0"/>
+              </a:rPr>
               <a:t>Uniform </a:t>
             </a:r>
             <a:r>
-              <a:rPr lang="en-US" sz="2000" b="1" dirty="0" err="1"/>
+              <a:rPr lang="en-US" sz="2000" b="1" dirty="0" err="1">
+                <a:latin typeface="Aptos" panose="020B0004020202020204" pitchFamily="34" charset="0"/>
+              </a:rPr>
               <a:t>Resourse</a:t>
             </a:r>
             <a:r>
-              <a:rPr lang="en-US" sz="2000" b="1" dirty="0"/>
+              <a:rPr lang="en-US" sz="2000" b="1" dirty="0">
+                <a:latin typeface="Aptos" panose="020B0004020202020204" pitchFamily="34" charset="0"/>
+              </a:rPr>
               <a:t> Locator (URL)</a:t>
             </a:r>
           </a:p>
           <a:p>
             <a:r>
-              <a:rPr lang="en-US" sz="2000" dirty="0"/>
+              <a:rPr lang="en-US" sz="2000" dirty="0">
+                <a:latin typeface="Aptos" panose="020B0004020202020204" pitchFamily="34" charset="0"/>
+              </a:rPr>
               <a:t>The URL includes three components: </a:t>
             </a:r>
           </a:p>
           <a:p>
             <a:pPr lvl="1"/>
             <a:r>
-              <a:rPr lang="en-US" dirty="0"/>
+              <a:rPr lang="en-US" dirty="0">
+                <a:latin typeface="Aptos" panose="020B0004020202020204" pitchFamily="34" charset="0"/>
+              </a:rPr>
               <a:t>the communication protocol to access to the page</a:t>
             </a:r>
           </a:p>
           <a:p>
             <a:pPr lvl="1"/>
             <a:r>
-              <a:rPr lang="en-US" dirty="0"/>
+              <a:rPr lang="en-US" dirty="0">
+                <a:latin typeface="Aptos" panose="020B0004020202020204" pitchFamily="34" charset="0"/>
+              </a:rPr>
               <a:t>the name of the server where the page is located</a:t>
             </a:r>
           </a:p>
           <a:p>
             <a:pPr lvl="1"/>
             <a:r>
-              <a:rPr lang="en-US" dirty="0"/>
+              <a:rPr lang="en-US" dirty="0">
+                <a:latin typeface="Aptos" panose="020B0004020202020204" pitchFamily="34" charset="0"/>
+              </a:rPr>
               <a:t>the path identifying the page file on the server</a:t>
             </a:r>
           </a:p>
@@ -10367,30 +10931,30 @@
           <a:p>
             <a:r>
               <a:rPr lang="en-GB" sz="2000" b="1" dirty="0">
-                <a:latin typeface="Palatino Linotype" panose="02040502050505030304" pitchFamily="18" charset="0"/>
+                <a:latin typeface="Aptos" panose="020B0004020202020204" pitchFamily="34" charset="0"/>
               </a:rPr>
               <a:t>http://</a:t>
             </a:r>
             <a:r>
               <a:rPr lang="en-GB" sz="2000" b="1" dirty="0" err="1">
-                <a:latin typeface="Palatino Linotype" panose="02040502050505030304" pitchFamily="18" charset="0"/>
+                <a:latin typeface="Aptos" panose="020B0004020202020204" pitchFamily="34" charset="0"/>
               </a:rPr>
               <a:t>www.dei.unipd.it</a:t>
             </a:r>
             <a:r>
               <a:rPr lang="en-GB" sz="2000" b="1" dirty="0">
-                <a:latin typeface="Palatino Linotype" panose="02040502050505030304" pitchFamily="18" charset="0"/>
+                <a:latin typeface="Aptos" panose="020B0004020202020204" pitchFamily="34" charset="0"/>
               </a:rPr>
               <a:t>/</a:t>
             </a:r>
             <a:r>
               <a:rPr lang="en-GB" sz="2000" b="1" dirty="0" err="1">
-                <a:latin typeface="Palatino Linotype" panose="02040502050505030304" pitchFamily="18" charset="0"/>
+                <a:latin typeface="Aptos" panose="020B0004020202020204" pitchFamily="34" charset="0"/>
               </a:rPr>
               <a:t>index.html</a:t>
             </a:r>
             <a:endParaRPr lang="en-GB" sz="2000" b="1" dirty="0">
-              <a:latin typeface="Palatino Linotype" panose="02040502050505030304" pitchFamily="18" charset="0"/>
+              <a:latin typeface="Aptos" panose="020B0004020202020204" pitchFamily="34" charset="0"/>
             </a:endParaRPr>
           </a:p>
         </p:txBody>
@@ -10404,7 +10968,7 @@
           <p:nvPr>
             <p:extLst>
               <p:ext uri="{D42A27DB-BD31-4B8C-83A1-F6EECF244321}">
-                <p14:modId xmlns:p14="http://schemas.microsoft.com/office/powerpoint/2010/main" val="1433282899"/>
+                <p14:modId xmlns:p14="http://schemas.microsoft.com/office/powerpoint/2010/main" val="3854839490"/>
               </p:ext>
             </p:extLst>
           </p:nvPr>
@@ -10451,12 +11015,12 @@
                       <a:pPr algn="ctr"/>
                       <a:r>
                         <a:rPr lang="it-IT" dirty="0">
-                          <a:latin typeface="Palatino Linotype" panose="02040502050505030304" pitchFamily="18" charset="0"/>
+                          <a:latin typeface="Aptos" panose="020B0004020202020204" pitchFamily="34" charset="0"/>
                         </a:rPr>
                         <a:t>http</a:t>
                       </a:r>
                       <a:endParaRPr lang="en-GB" dirty="0">
-                        <a:latin typeface="Palatino Linotype" panose="02040502050505030304" pitchFamily="18" charset="0"/>
+                        <a:latin typeface="Aptos" panose="020B0004020202020204" pitchFamily="34" charset="0"/>
                       </a:endParaRPr>
                     </a:p>
                   </a:txBody>
@@ -10470,12 +11034,12 @@
                       <a:pPr algn="ctr"/>
                       <a:r>
                         <a:rPr lang="en-GB" sz="1800" dirty="0" err="1">
-                          <a:latin typeface="Palatino Linotype" panose="02040502050505030304" pitchFamily="18" charset="0"/>
+                          <a:latin typeface="Aptos" panose="020B0004020202020204" pitchFamily="34" charset="0"/>
                         </a:rPr>
                         <a:t>www.dei.unipd.it</a:t>
                       </a:r>
                       <a:endParaRPr lang="en-GB" dirty="0">
-                        <a:latin typeface="Palatino Linotype" panose="02040502050505030304" pitchFamily="18" charset="0"/>
+                        <a:latin typeface="Aptos" panose="020B0004020202020204" pitchFamily="34" charset="0"/>
                       </a:endParaRPr>
                     </a:p>
                   </a:txBody>
@@ -10489,12 +11053,12 @@
                       <a:pPr algn="ctr"/>
                       <a:r>
                         <a:rPr lang="en-GB" sz="1800" dirty="0">
-                          <a:latin typeface="Palatino Linotype" panose="02040502050505030304" pitchFamily="18" charset="0"/>
+                          <a:latin typeface="Aptos" panose="020B0004020202020204" pitchFamily="34" charset="0"/>
                         </a:rPr>
                         <a:t>index.html</a:t>
                       </a:r>
                       <a:endParaRPr lang="en-GB" dirty="0">
-                        <a:latin typeface="Palatino Linotype" panose="02040502050505030304" pitchFamily="18" charset="0"/>
+                        <a:latin typeface="Aptos" panose="020B0004020202020204" pitchFamily="34" charset="0"/>
                       </a:endParaRPr>
                     </a:p>
                   </a:txBody>
@@ -10515,12 +11079,12 @@
                       <a:pPr algn="ctr"/>
                       <a:r>
                         <a:rPr lang="it-IT" dirty="0" err="1">
-                          <a:latin typeface="Palatino Linotype" panose="02040502050505030304" pitchFamily="18" charset="0"/>
+                          <a:latin typeface="Aptos" panose="020B0004020202020204" pitchFamily="34" charset="0"/>
                         </a:rPr>
                         <a:t>Protocol</a:t>
                       </a:r>
                       <a:endParaRPr lang="en-GB" dirty="0">
-                        <a:latin typeface="Palatino Linotype" panose="02040502050505030304" pitchFamily="18" charset="0"/>
+                        <a:latin typeface="Aptos" panose="020B0004020202020204" pitchFamily="34" charset="0"/>
                       </a:endParaRPr>
                     </a:p>
                   </a:txBody>
@@ -10534,18 +11098,18 @@
                       <a:pPr algn="ctr"/>
                       <a:r>
                         <a:rPr lang="it-IT" dirty="0" err="1">
-                          <a:latin typeface="Palatino Linotype" panose="02040502050505030304" pitchFamily="18" charset="0"/>
+                          <a:latin typeface="Aptos" panose="020B0004020202020204" pitchFamily="34" charset="0"/>
                         </a:rPr>
                         <a:t>Name</a:t>
                       </a:r>
                       <a:r>
                         <a:rPr lang="it-IT" dirty="0">
-                          <a:latin typeface="Palatino Linotype" panose="02040502050505030304" pitchFamily="18" charset="0"/>
+                          <a:latin typeface="Aptos" panose="020B0004020202020204" pitchFamily="34" charset="0"/>
                         </a:rPr>
                         <a:t> of the server</a:t>
                       </a:r>
                       <a:endParaRPr lang="en-GB" dirty="0">
-                        <a:latin typeface="Palatino Linotype" panose="02040502050505030304" pitchFamily="18" charset="0"/>
+                        <a:latin typeface="Aptos" panose="020B0004020202020204" pitchFamily="34" charset="0"/>
                       </a:endParaRPr>
                     </a:p>
                   </a:txBody>
@@ -10559,18 +11123,18 @@
                       <a:pPr algn="ctr"/>
                       <a:r>
                         <a:rPr lang="it-IT" dirty="0" err="1">
-                          <a:latin typeface="Palatino Linotype" panose="02040502050505030304" pitchFamily="18" charset="0"/>
+                          <a:latin typeface="Aptos" panose="020B0004020202020204" pitchFamily="34" charset="0"/>
                         </a:rPr>
                         <a:t>Path</a:t>
                       </a:r>
                       <a:r>
                         <a:rPr lang="it-IT" dirty="0">
-                          <a:latin typeface="Palatino Linotype" panose="02040502050505030304" pitchFamily="18" charset="0"/>
+                          <a:latin typeface="Aptos" panose="020B0004020202020204" pitchFamily="34" charset="0"/>
                         </a:rPr>
                         <a:t> of the page</a:t>
                       </a:r>
                       <a:endParaRPr lang="en-GB" dirty="0">
-                        <a:latin typeface="Palatino Linotype" panose="02040502050505030304" pitchFamily="18" charset="0"/>
+                        <a:latin typeface="Aptos" panose="020B0004020202020204" pitchFamily="34" charset="0"/>
                       </a:endParaRPr>
                     </a:p>
                   </a:txBody>
@@ -10788,24 +11352,34 @@
           </a:lstStyle>
           <a:p>
             <a:r>
-              <a:rPr lang="en-US" sz="2000" dirty="0"/>
+              <a:rPr lang="en-US" sz="2000" dirty="0">
+                <a:latin typeface="Aptos" panose="020B0004020202020204" pitchFamily="34" charset="0"/>
+              </a:rPr>
               <a:t>But in order to send the request the browser needs to know the IP address of the server. </a:t>
             </a:r>
           </a:p>
           <a:p>
             <a:r>
-              <a:rPr lang="en-US" sz="2000" dirty="0"/>
+              <a:rPr lang="en-US" sz="2000" dirty="0">
+                <a:latin typeface="Aptos" panose="020B0004020202020204" pitchFamily="34" charset="0"/>
+              </a:rPr>
               <a:t>This information is stored in a </a:t>
             </a:r>
             <a:r>
-              <a:rPr lang="en-US" sz="2000" b="1" dirty="0"/>
+              <a:rPr lang="en-US" sz="2000" b="1" dirty="0">
+                <a:latin typeface="Aptos" panose="020B0004020202020204" pitchFamily="34" charset="0"/>
+              </a:rPr>
               <a:t>name server</a:t>
             </a:r>
             <a:r>
-              <a:rPr lang="en-US" sz="2000" dirty="0"/>
+              <a:rPr lang="en-US" sz="2000" dirty="0">
+                <a:latin typeface="Aptos" panose="020B0004020202020204" pitchFamily="34" charset="0"/>
+              </a:rPr>
               <a:t>…</a:t>
             </a:r>
-            <a:endParaRPr lang="en-US" sz="2000" b="1" dirty="0"/>
+            <a:endParaRPr lang="en-US" sz="2000" b="1" dirty="0">
+              <a:latin typeface="Aptos" panose="020B0004020202020204" pitchFamily="34" charset="0"/>
+            </a:endParaRPr>
           </a:p>
         </p:txBody>
       </p:sp>
@@ -10853,7 +11427,7 @@
                 <a:solidFill>
                   <a:schemeClr val="tx1"/>
                 </a:solidFill>
-                <a:latin typeface="Palatino Linotype" panose="02040502050505030304" pitchFamily="18" charset="0"/>
+                <a:latin typeface="Aptos" panose="020B0004020202020204" pitchFamily="34" charset="0"/>
               </a:rPr>
               <a:t>Remember</a:t>
             </a:r>
@@ -10862,7 +11436,7 @@
                 <a:solidFill>
                   <a:schemeClr val="tx1"/>
                 </a:solidFill>
-                <a:latin typeface="Palatino Linotype" panose="02040502050505030304" pitchFamily="18" charset="0"/>
+                <a:latin typeface="Aptos" panose="020B0004020202020204" pitchFamily="34" charset="0"/>
               </a:rPr>
               <a:t>: The </a:t>
             </a:r>
@@ -10871,7 +11445,7 @@
                 <a:solidFill>
                   <a:schemeClr val="tx1"/>
                 </a:solidFill>
-                <a:latin typeface="Palatino Linotype" panose="02040502050505030304" pitchFamily="18" charset="0"/>
+                <a:latin typeface="Aptos" panose="020B0004020202020204" pitchFamily="34" charset="0"/>
               </a:rPr>
               <a:t>IP </a:t>
             </a:r>
@@ -10880,7 +11454,7 @@
                 <a:solidFill>
                   <a:schemeClr val="tx1"/>
                 </a:solidFill>
-                <a:latin typeface="Palatino Linotype" panose="02040502050505030304" pitchFamily="18" charset="0"/>
+                <a:latin typeface="Aptos" panose="020B0004020202020204" pitchFamily="34" charset="0"/>
               </a:rPr>
               <a:t>address</a:t>
             </a:r>
@@ -10889,7 +11463,7 @@
                 <a:solidFill>
                   <a:schemeClr val="tx1"/>
                 </a:solidFill>
-                <a:latin typeface="Palatino Linotype" panose="02040502050505030304" pitchFamily="18" charset="0"/>
+                <a:latin typeface="Aptos" panose="020B0004020202020204" pitchFamily="34" charset="0"/>
               </a:rPr>
               <a:t> </a:t>
             </a:r>
@@ -10898,7 +11472,7 @@
                 <a:solidFill>
                   <a:schemeClr val="tx1"/>
                 </a:solidFill>
-                <a:latin typeface="Palatino Linotype" panose="02040502050505030304" pitchFamily="18" charset="0"/>
+                <a:latin typeface="Aptos" panose="020B0004020202020204" pitchFamily="34" charset="0"/>
               </a:rPr>
               <a:t>is</a:t>
             </a:r>
@@ -10907,7 +11481,7 @@
                 <a:solidFill>
                   <a:schemeClr val="tx1"/>
                 </a:solidFill>
-                <a:latin typeface="Palatino Linotype" panose="02040502050505030304" pitchFamily="18" charset="0"/>
+                <a:latin typeface="Aptos" panose="020B0004020202020204" pitchFamily="34" charset="0"/>
               </a:rPr>
               <a:t> </a:t>
             </a:r>
@@ -10916,7 +11490,7 @@
                 <a:solidFill>
                   <a:schemeClr val="tx1"/>
                 </a:solidFill>
-                <a:latin typeface="Palatino Linotype" panose="02040502050505030304" pitchFamily="18" charset="0"/>
+                <a:latin typeface="Aptos" panose="020B0004020202020204" pitchFamily="34" charset="0"/>
               </a:rPr>
               <a:t>that label (e.g. 192.0.2.1) which uniquely identifies a host connected to a computer network using the IP protocol.</a:t>
             </a:r>
@@ -10924,7 +11498,7 @@
               <a:solidFill>
                 <a:schemeClr val="tx1"/>
               </a:solidFill>
-              <a:latin typeface="Palatino Linotype" panose="02040502050505030304" pitchFamily="18" charset="0"/>
+              <a:latin typeface="Aptos" panose="020B0004020202020204" pitchFamily="34" charset="0"/>
             </a:endParaRPr>
           </a:p>
         </p:txBody>
@@ -10945,10 +11519,14 @@
           <a:lstStyle/>
           <a:p>
             <a:fld id="{31DE2C5B-556E-47B8-A792-024C2FCA4ACC}" type="slidenum">
-              <a:rPr lang="en-GB" smtClean="0"/>
+              <a:rPr lang="en-GB" smtClean="0">
+                <a:latin typeface="Aptos" panose="020B0004020202020204" pitchFamily="34" charset="0"/>
+              </a:rPr>
               <a:t>25</a:t>
             </a:fld>
-            <a:endParaRPr lang="en-GB"/>
+            <a:endParaRPr lang="en-GB">
+              <a:latin typeface="Aptos" panose="020B0004020202020204" pitchFamily="34" charset="0"/>
+            </a:endParaRPr>
           </a:p>
         </p:txBody>
       </p:sp>
@@ -10998,18 +11576,26 @@
           <a:lstStyle/>
           <a:p>
             <a:r>
-              <a:rPr lang="it-IT" dirty="0"/>
+              <a:rPr lang="it-IT" dirty="0">
+                <a:latin typeface="Aptos" panose="020B0004020202020204" pitchFamily="34" charset="0"/>
+              </a:rPr>
               <a:t>Domain </a:t>
             </a:r>
             <a:r>
-              <a:rPr lang="it-IT" dirty="0" err="1"/>
+              <a:rPr lang="it-IT" dirty="0" err="1">
+                <a:latin typeface="Aptos" panose="020B0004020202020204" pitchFamily="34" charset="0"/>
+              </a:rPr>
               <a:t>Name</a:t>
             </a:r>
             <a:r>
-              <a:rPr lang="it-IT" dirty="0"/>
+              <a:rPr lang="it-IT" dirty="0">
+                <a:latin typeface="Aptos" panose="020B0004020202020204" pitchFamily="34" charset="0"/>
+              </a:rPr>
               <a:t> Space (DNS)</a:t>
             </a:r>
-            <a:endParaRPr lang="en-GB" dirty="0"/>
+            <a:endParaRPr lang="en-GB" dirty="0">
+              <a:latin typeface="Aptos" panose="020B0004020202020204" pitchFamily="34" charset="0"/>
+            </a:endParaRPr>
           </a:p>
         </p:txBody>
       </p:sp>
@@ -11036,51 +11622,73 @@
           <a:lstStyle/>
           <a:p>
             <a:r>
-              <a:rPr lang="en-GB" dirty="0"/>
+              <a:rPr lang="en-GB" dirty="0">
+                <a:latin typeface="Aptos" panose="020B0004020202020204" pitchFamily="34" charset="0"/>
+              </a:rPr>
               <a:t>The </a:t>
             </a:r>
             <a:r>
-              <a:rPr lang="en-GB" b="1" dirty="0"/>
+              <a:rPr lang="en-GB" b="1" dirty="0">
+                <a:latin typeface="Aptos" panose="020B0004020202020204" pitchFamily="34" charset="0"/>
+              </a:rPr>
               <a:t>Domain Name Space (DNS) </a:t>
             </a:r>
             <a:r>
-              <a:rPr lang="en-GB" dirty="0"/>
+              <a:rPr lang="en-GB" dirty="0">
+                <a:latin typeface="Aptos" panose="020B0004020202020204" pitchFamily="34" charset="0"/>
+              </a:rPr>
               <a:t>is a hierarchical, domain-based naming scheme and a distributed database system used for mapping server names with their IP address. </a:t>
             </a:r>
           </a:p>
           <a:p>
             <a:r>
-              <a:rPr lang="en-GB" dirty="0"/>
+              <a:rPr lang="en-GB" dirty="0">
+                <a:latin typeface="Aptos" panose="020B0004020202020204" pitchFamily="34" charset="0"/>
+              </a:rPr>
               <a:t>The DNS is managed by an organization called </a:t>
             </a:r>
             <a:r>
-              <a:rPr lang="en-GB" b="1" dirty="0"/>
+              <a:rPr lang="en-GB" b="1" dirty="0">
+                <a:latin typeface="Aptos" panose="020B0004020202020204" pitchFamily="34" charset="0"/>
+              </a:rPr>
               <a:t>ICANN </a:t>
             </a:r>
             <a:r>
-              <a:rPr lang="en-GB" dirty="0"/>
+              <a:rPr lang="en-GB" dirty="0">
+                <a:latin typeface="Aptos" panose="020B0004020202020204" pitchFamily="34" charset="0"/>
+              </a:rPr>
               <a:t>(</a:t>
             </a:r>
             <a:r>
-              <a:rPr lang="en-GB" b="1" dirty="0"/>
+              <a:rPr lang="en-GB" b="1" dirty="0">
+                <a:latin typeface="Aptos" panose="020B0004020202020204" pitchFamily="34" charset="0"/>
+              </a:rPr>
               <a:t>Internet Corporation for Assigned Names and Numbers</a:t>
             </a:r>
             <a:r>
-              <a:rPr lang="en-GB" dirty="0"/>
+              <a:rPr lang="en-GB" dirty="0">
+                <a:latin typeface="Aptos" panose="020B0004020202020204" pitchFamily="34" charset="0"/>
+              </a:rPr>
               <a:t>). </a:t>
             </a:r>
           </a:p>
           <a:p>
             <a:r>
-              <a:rPr lang="en-GB" dirty="0"/>
+              <a:rPr lang="en-GB" dirty="0">
+                <a:latin typeface="Aptos" panose="020B0004020202020204" pitchFamily="34" charset="0"/>
+              </a:rPr>
               <a:t>There are top-level domains, each divided into subdomains according to a </a:t>
             </a:r>
             <a:r>
-              <a:rPr lang="en-GB" dirty="0" err="1"/>
+              <a:rPr lang="en-GB" dirty="0" err="1">
+                <a:latin typeface="Aptos" panose="020B0004020202020204" pitchFamily="34" charset="0"/>
+              </a:rPr>
               <a:t>hieararchical</a:t>
             </a:r>
             <a:r>
-              <a:rPr lang="en-GB" dirty="0"/>
+              <a:rPr lang="en-GB" dirty="0">
+                <a:latin typeface="Aptos" panose="020B0004020202020204" pitchFamily="34" charset="0"/>
+              </a:rPr>
               <a:t> structure.</a:t>
             </a:r>
           </a:p>
@@ -11132,10 +11740,14 @@
           <a:lstStyle/>
           <a:p>
             <a:fld id="{31DE2C5B-556E-47B8-A792-024C2FCA4ACC}" type="slidenum">
-              <a:rPr lang="en-GB" smtClean="0"/>
+              <a:rPr lang="en-GB" smtClean="0">
+                <a:latin typeface="Aptos" panose="020B0004020202020204" pitchFamily="34" charset="0"/>
+              </a:rPr>
               <a:t>26</a:t>
             </a:fld>
-            <a:endParaRPr lang="en-GB"/>
+            <a:endParaRPr lang="en-GB">
+              <a:latin typeface="Aptos" panose="020B0004020202020204" pitchFamily="34" charset="0"/>
+            </a:endParaRPr>
           </a:p>
         </p:txBody>
       </p:sp>
@@ -11185,10 +11797,14 @@
           <a:lstStyle/>
           <a:p>
             <a:r>
-              <a:rPr lang="it-IT" dirty="0"/>
+              <a:rPr lang="it-IT" dirty="0">
+                <a:latin typeface="Aptos" panose="020B0004020202020204" pitchFamily="34" charset="0"/>
+              </a:rPr>
               <a:t>The DNS database</a:t>
             </a:r>
-            <a:endParaRPr lang="en-GB" dirty="0"/>
+            <a:endParaRPr lang="en-GB" dirty="0">
+              <a:latin typeface="Aptos" panose="020B0004020202020204" pitchFamily="34" charset="0"/>
+            </a:endParaRPr>
           </a:p>
         </p:txBody>
       </p:sp>
@@ -11215,51 +11831,73 @@
           <a:lstStyle/>
           <a:p>
             <a:r>
-              <a:rPr lang="en-US" sz="2200" dirty="0"/>
+              <a:rPr lang="en-US" sz="2200" dirty="0">
+                <a:latin typeface="Aptos" panose="020B0004020202020204" pitchFamily="34" charset="0"/>
+              </a:rPr>
               <a:t>The DNS database stores information about each registered domain, including the IP address.</a:t>
             </a:r>
           </a:p>
           <a:p>
             <a:r>
-              <a:rPr lang="en-US" sz="2200" dirty="0"/>
+              <a:rPr lang="en-US" sz="2200" dirty="0">
+                <a:latin typeface="Aptos" panose="020B0004020202020204" pitchFamily="34" charset="0"/>
+              </a:rPr>
               <a:t>The DNS database is not stored in a single server. It is divided into non-overlapping </a:t>
             </a:r>
             <a:r>
-              <a:rPr lang="en-US" sz="2200" b="1" dirty="0"/>
+              <a:rPr lang="en-US" sz="2200" b="1" dirty="0">
+                <a:latin typeface="Aptos" panose="020B0004020202020204" pitchFamily="34" charset="0"/>
+              </a:rPr>
               <a:t>zones</a:t>
             </a:r>
             <a:r>
-              <a:rPr lang="en-US" sz="2200" dirty="0"/>
+              <a:rPr lang="en-US" sz="2200" dirty="0">
+                <a:latin typeface="Aptos" panose="020B0004020202020204" pitchFamily="34" charset="0"/>
+              </a:rPr>
               <a:t> and each zone is associated to multiple servers.</a:t>
             </a:r>
           </a:p>
           <a:p>
             <a:r>
-              <a:rPr lang="en-US" sz="2200" dirty="0"/>
+              <a:rPr lang="en-US" sz="2200" dirty="0">
+                <a:latin typeface="Aptos" panose="020B0004020202020204" pitchFamily="34" charset="0"/>
+              </a:rPr>
               <a:t>The process of looking up a domain name in the DNS database and finding its resource records (e.g., IP address) is called </a:t>
             </a:r>
             <a:r>
-              <a:rPr lang="en-US" sz="2200" b="1" dirty="0"/>
+              <a:rPr lang="en-US" sz="2200" b="1" dirty="0">
+                <a:latin typeface="Aptos" panose="020B0004020202020204" pitchFamily="34" charset="0"/>
+              </a:rPr>
               <a:t>name resolution </a:t>
             </a:r>
             <a:r>
-              <a:rPr lang="en-US" sz="2200" dirty="0"/>
+              <a:rPr lang="en-US" sz="2200" dirty="0">
+                <a:latin typeface="Aptos" panose="020B0004020202020204" pitchFamily="34" charset="0"/>
+              </a:rPr>
               <a:t>and it is performed by a program called </a:t>
             </a:r>
             <a:r>
-              <a:rPr lang="en-US" sz="2200" b="1" dirty="0"/>
+              <a:rPr lang="en-US" sz="2200" b="1" dirty="0">
+                <a:latin typeface="Aptos" panose="020B0004020202020204" pitchFamily="34" charset="0"/>
+              </a:rPr>
               <a:t>resolver</a:t>
             </a:r>
             <a:r>
-              <a:rPr lang="en-US" sz="2200" dirty="0"/>
+              <a:rPr lang="en-US" sz="2200" dirty="0">
+                <a:latin typeface="Aptos" panose="020B0004020202020204" pitchFamily="34" charset="0"/>
+              </a:rPr>
               <a:t>. </a:t>
             </a:r>
           </a:p>
           <a:p>
-            <a:endParaRPr lang="en-US" sz="2200" dirty="0"/>
-          </a:p>
-          <a:p>
-            <a:endParaRPr lang="en-US" dirty="0"/>
+            <a:endParaRPr lang="en-US" sz="2200" dirty="0">
+              <a:latin typeface="Aptos" panose="020B0004020202020204" pitchFamily="34" charset="0"/>
+            </a:endParaRPr>
+          </a:p>
+          <a:p>
+            <a:endParaRPr lang="en-US" dirty="0">
+              <a:latin typeface="Aptos" panose="020B0004020202020204" pitchFamily="34" charset="0"/>
+            </a:endParaRPr>
           </a:p>
         </p:txBody>
       </p:sp>
@@ -11309,10 +11947,14 @@
           <a:lstStyle/>
           <a:p>
             <a:fld id="{31DE2C5B-556E-47B8-A792-024C2FCA4ACC}" type="slidenum">
-              <a:rPr lang="en-GB" smtClean="0"/>
+              <a:rPr lang="en-GB" smtClean="0">
+                <a:latin typeface="Aptos" panose="020B0004020202020204" pitchFamily="34" charset="0"/>
+              </a:rPr>
               <a:t>27</a:t>
             </a:fld>
-            <a:endParaRPr lang="en-GB"/>
+            <a:endParaRPr lang="en-GB">
+              <a:latin typeface="Aptos" panose="020B0004020202020204" pitchFamily="34" charset="0"/>
+            </a:endParaRPr>
           </a:p>
         </p:txBody>
       </p:sp>
@@ -11362,7 +12004,9 @@
           <a:lstStyle/>
           <a:p>
             <a:r>
-              <a:rPr lang="en-US" dirty="0"/>
+              <a:rPr lang="en-US" dirty="0">
+                <a:latin typeface="Aptos" panose="020B0004020202020204" pitchFamily="34" charset="0"/>
+              </a:rPr>
               <a:t>Browsing - the client side</a:t>
             </a:r>
           </a:p>
@@ -11386,7 +12030,7 @@
         </p:spPr>
         <p:txBody>
           <a:bodyPr>
-            <a:normAutofit fontScale="92500"/>
+            <a:normAutofit lnSpcReduction="10000"/>
           </a:bodyPr>
           <a:lstStyle/>
           <a:p>
@@ -11394,7 +12038,9 @@
               <a:buNone/>
             </a:pPr>
             <a:r>
-              <a:rPr lang="en-US" dirty="0"/>
+              <a:rPr lang="en-US" dirty="0">
+                <a:latin typeface="Aptos" panose="020B0004020202020204" pitchFamily="34" charset="0"/>
+              </a:rPr>
               <a:t>When the user click on a hyperlink linking the URL: </a:t>
             </a:r>
           </a:p>
@@ -11403,140 +12049,200 @@
               <a:buNone/>
             </a:pPr>
             <a:r>
-              <a:rPr lang="en-US" dirty="0"/>
+              <a:rPr lang="en-US" dirty="0">
+                <a:latin typeface="Aptos" panose="020B0004020202020204" pitchFamily="34" charset="0"/>
+              </a:rPr>
               <a:t>                                   </a:t>
             </a:r>
             <a:r>
-              <a:rPr lang="en-US" b="1" dirty="0"/>
+              <a:rPr lang="en-US" b="1" dirty="0">
+                <a:latin typeface="Aptos" panose="020B0004020202020204" pitchFamily="34" charset="0"/>
+              </a:rPr>
               <a:t>http://</a:t>
             </a:r>
             <a:r>
-              <a:rPr lang="en-US" b="1" dirty="0" err="1"/>
+              <a:rPr lang="en-US" b="1" dirty="0" err="1">
+                <a:latin typeface="Aptos" panose="020B0004020202020204" pitchFamily="34" charset="0"/>
+              </a:rPr>
               <a:t>www.dei.unipd.it</a:t>
             </a:r>
             <a:r>
-              <a:rPr lang="en-US" b="1" dirty="0"/>
+              <a:rPr lang="en-US" b="1" dirty="0">
+                <a:latin typeface="Aptos" panose="020B0004020202020204" pitchFamily="34" charset="0"/>
+              </a:rPr>
               <a:t>/</a:t>
             </a:r>
             <a:r>
-              <a:rPr lang="en-US" b="1" dirty="0" err="1"/>
+              <a:rPr lang="en-US" b="1" dirty="0" err="1">
+                <a:latin typeface="Aptos" panose="020B0004020202020204" pitchFamily="34" charset="0"/>
+              </a:rPr>
               <a:t>index.html</a:t>
             </a:r>
-            <a:endParaRPr lang="en-US" b="1" dirty="0"/>
-          </a:p>
-          <a:p>
-            <a:r>
-              <a:rPr lang="en-US" dirty="0"/>
+            <a:endParaRPr lang="en-US" b="1" dirty="0">
+              <a:latin typeface="Aptos" panose="020B0004020202020204" pitchFamily="34" charset="0"/>
+            </a:endParaRPr>
+          </a:p>
+          <a:p>
+            <a:r>
+              <a:rPr lang="en-US" dirty="0">
+                <a:latin typeface="Aptos" panose="020B0004020202020204" pitchFamily="34" charset="0"/>
+              </a:rPr>
               <a:t>The browser determines the linked URL (by seeing what was selected).</a:t>
             </a:r>
           </a:p>
           <a:p>
             <a:r>
-              <a:rPr lang="en-US" dirty="0"/>
+              <a:rPr lang="en-US" dirty="0">
+                <a:latin typeface="Aptos" panose="020B0004020202020204" pitchFamily="34" charset="0"/>
+              </a:rPr>
               <a:t>The browser asks to the DNS resolver the IP address of the server </a:t>
             </a:r>
             <a:r>
-              <a:rPr lang="en-US" i="1" dirty="0"/>
+              <a:rPr lang="en-US" i="1" dirty="0">
+                <a:latin typeface="Aptos" panose="020B0004020202020204" pitchFamily="34" charset="0"/>
+              </a:rPr>
               <a:t>www.dei.unipd.it</a:t>
             </a:r>
           </a:p>
           <a:p>
             <a:r>
-              <a:rPr lang="en-US" dirty="0"/>
+              <a:rPr lang="en-US" dirty="0">
+                <a:latin typeface="Aptos" panose="020B0004020202020204" pitchFamily="34" charset="0"/>
+              </a:rPr>
               <a:t>The resolver replies with 147.162.2.199.</a:t>
             </a:r>
           </a:p>
           <a:p>
             <a:r>
-              <a:rPr lang="en-US" dirty="0"/>
+              <a:rPr lang="en-US" dirty="0">
+                <a:latin typeface="Aptos" panose="020B0004020202020204" pitchFamily="34" charset="0"/>
+              </a:rPr>
               <a:t>The browser makes a TCP connection to 147.162.2.199 on port 80 (port for HTTP).</a:t>
             </a:r>
           </a:p>
           <a:p>
             <a:r>
-              <a:rPr lang="en-US" dirty="0"/>
+              <a:rPr lang="en-US" dirty="0">
+                <a:latin typeface="Aptos" panose="020B0004020202020204" pitchFamily="34" charset="0"/>
+              </a:rPr>
               <a:t>It sends over an HTTP request asking for the page </a:t>
             </a:r>
             <a:r>
-              <a:rPr lang="en-US" i="1" dirty="0"/>
+              <a:rPr lang="en-US" i="1" dirty="0">
+                <a:latin typeface="Aptos" panose="020B0004020202020204" pitchFamily="34" charset="0"/>
+              </a:rPr>
               <a:t>/</a:t>
             </a:r>
             <a:r>
-              <a:rPr lang="en-US" i="1" dirty="0" err="1"/>
+              <a:rPr lang="en-US" i="1" dirty="0" err="1">
+                <a:latin typeface="Aptos" panose="020B0004020202020204" pitchFamily="34" charset="0"/>
+              </a:rPr>
               <a:t>index.html</a:t>
             </a:r>
             <a:r>
-              <a:rPr lang="en-US" dirty="0"/>
+              <a:rPr lang="en-US" dirty="0">
+                <a:latin typeface="Aptos" panose="020B0004020202020204" pitchFamily="34" charset="0"/>
+              </a:rPr>
               <a:t>.</a:t>
             </a:r>
           </a:p>
           <a:p>
             <a:r>
-              <a:rPr lang="en-US" dirty="0"/>
+              <a:rPr lang="en-US" dirty="0">
+                <a:latin typeface="Aptos" panose="020B0004020202020204" pitchFamily="34" charset="0"/>
+              </a:rPr>
               <a:t>The server </a:t>
             </a:r>
             <a:r>
-              <a:rPr lang="en-US" i="1" dirty="0"/>
+              <a:rPr lang="en-US" i="1" dirty="0">
+                <a:latin typeface="Aptos" panose="020B0004020202020204" pitchFamily="34" charset="0"/>
+              </a:rPr>
               <a:t>www.dei.unipd.it </a:t>
             </a:r>
             <a:r>
-              <a:rPr lang="en-US" dirty="0"/>
+              <a:rPr lang="en-US" dirty="0">
+                <a:latin typeface="Aptos" panose="020B0004020202020204" pitchFamily="34" charset="0"/>
+              </a:rPr>
               <a:t>sends the page </a:t>
             </a:r>
             <a:r>
-              <a:rPr lang="en-US" i="1" dirty="0"/>
+              <a:rPr lang="en-US" i="1" dirty="0">
+                <a:latin typeface="Aptos" panose="020B0004020202020204" pitchFamily="34" charset="0"/>
+              </a:rPr>
               <a:t>/</a:t>
             </a:r>
             <a:r>
-              <a:rPr lang="en-US" i="1" dirty="0" err="1"/>
+              <a:rPr lang="en-US" i="1" dirty="0" err="1">
+                <a:latin typeface="Aptos" panose="020B0004020202020204" pitchFamily="34" charset="0"/>
+              </a:rPr>
               <a:t>index.html</a:t>
             </a:r>
             <a:r>
-              <a:rPr lang="en-US" i="1" dirty="0"/>
+              <a:rPr lang="en-US" i="1" dirty="0">
+                <a:latin typeface="Aptos" panose="020B0004020202020204" pitchFamily="34" charset="0"/>
+              </a:rPr>
               <a:t> </a:t>
             </a:r>
             <a:r>
-              <a:rPr lang="en-US" dirty="0"/>
+              <a:rPr lang="en-US" dirty="0">
+                <a:latin typeface="Aptos" panose="020B0004020202020204" pitchFamily="34" charset="0"/>
+              </a:rPr>
               <a:t>as an HTTP response.</a:t>
             </a:r>
           </a:p>
           <a:p>
             <a:r>
-              <a:rPr lang="en-US" dirty="0"/>
+              <a:rPr lang="en-US" dirty="0">
+                <a:latin typeface="Aptos" panose="020B0004020202020204" pitchFamily="34" charset="0"/>
+              </a:rPr>
               <a:t>If the page includes URLs that are needed for display, the browser fetches the other URLs using the same process.</a:t>
             </a:r>
           </a:p>
           <a:p>
             <a:r>
-              <a:rPr lang="en-US" dirty="0"/>
+              <a:rPr lang="en-US" dirty="0">
+                <a:latin typeface="Aptos" panose="020B0004020202020204" pitchFamily="34" charset="0"/>
+              </a:rPr>
               <a:t>The browser displays the page. </a:t>
             </a:r>
           </a:p>
           <a:p>
             <a:r>
-              <a:rPr lang="en-US" dirty="0"/>
+              <a:rPr lang="en-US" dirty="0">
+                <a:latin typeface="Aptos" panose="020B0004020202020204" pitchFamily="34" charset="0"/>
+              </a:rPr>
               <a:t>The TCP connection with </a:t>
             </a:r>
             <a:r>
-              <a:rPr lang="en-US" i="1" dirty="0"/>
+              <a:rPr lang="en-US" i="1" dirty="0">
+                <a:latin typeface="Aptos" panose="020B0004020202020204" pitchFamily="34" charset="0"/>
+              </a:rPr>
               <a:t>www.dei.unipd.it </a:t>
             </a:r>
             <a:r>
-              <a:rPr lang="en-US" dirty="0"/>
+              <a:rPr lang="en-US" dirty="0">
+                <a:latin typeface="Aptos" panose="020B0004020202020204" pitchFamily="34" charset="0"/>
+              </a:rPr>
               <a:t>is closed if there are no other requests for the same server for a short period.  </a:t>
             </a:r>
           </a:p>
           <a:p>
-            <a:endParaRPr lang="en-GB" dirty="0"/>
+            <a:endParaRPr lang="en-GB" dirty="0">
+              <a:latin typeface="Aptos" panose="020B0004020202020204" pitchFamily="34" charset="0"/>
+            </a:endParaRPr>
           </a:p>
           <a:p>
             <a:pPr marL="0" indent="0">
               <a:buNone/>
             </a:pPr>
-            <a:endParaRPr lang="en-GB" dirty="0"/>
-          </a:p>
-          <a:p>
-            <a:endParaRPr lang="it-IT" dirty="0"/>
+            <a:endParaRPr lang="en-GB" dirty="0">
+              <a:latin typeface="Aptos" panose="020B0004020202020204" pitchFamily="34" charset="0"/>
+            </a:endParaRPr>
+          </a:p>
+          <a:p>
+            <a:endParaRPr lang="it-IT" dirty="0">
+              <a:latin typeface="Aptos" panose="020B0004020202020204" pitchFamily="34" charset="0"/>
+            </a:endParaRPr>
           </a:p>
         </p:txBody>
       </p:sp>
@@ -11556,10 +12262,14 @@
           <a:lstStyle/>
           <a:p>
             <a:fld id="{31DE2C5B-556E-47B8-A792-024C2FCA4ACC}" type="slidenum">
-              <a:rPr lang="en-GB" smtClean="0"/>
+              <a:rPr lang="en-GB" smtClean="0">
+                <a:latin typeface="Aptos" panose="020B0004020202020204" pitchFamily="34" charset="0"/>
+              </a:rPr>
               <a:t>28</a:t>
             </a:fld>
-            <a:endParaRPr lang="en-GB"/>
+            <a:endParaRPr lang="en-GB">
+              <a:latin typeface="Aptos" panose="020B0004020202020204" pitchFamily="34" charset="0"/>
+            </a:endParaRPr>
           </a:p>
         </p:txBody>
       </p:sp>
@@ -11609,14 +12319,20 @@
           <a:lstStyle/>
           <a:p>
             <a:r>
-              <a:rPr lang="it-IT" dirty="0" err="1"/>
+              <a:rPr lang="it-IT" dirty="0" err="1">
+                <a:latin typeface="Aptos" panose="020B0004020202020204" pitchFamily="34" charset="0"/>
+              </a:rPr>
               <a:t>Browsing</a:t>
             </a:r>
             <a:r>
-              <a:rPr lang="it-IT" dirty="0"/>
+              <a:rPr lang="it-IT" dirty="0">
+                <a:latin typeface="Aptos" panose="020B0004020202020204" pitchFamily="34" charset="0"/>
+              </a:rPr>
               <a:t> – The server side</a:t>
             </a:r>
-            <a:endParaRPr lang="en-GB" dirty="0"/>
+            <a:endParaRPr lang="en-GB" dirty="0">
+              <a:latin typeface="Aptos" panose="020B0004020202020204" pitchFamily="34" charset="0"/>
+            </a:endParaRPr>
           </a:p>
         </p:txBody>
       </p:sp>
@@ -11646,53 +12362,70 @@
               <a:buNone/>
             </a:pPr>
             <a:r>
-              <a:rPr lang="en-US" dirty="0"/>
+              <a:rPr lang="en-US" dirty="0">
+                <a:latin typeface="Aptos" panose="020B0004020202020204" pitchFamily="34" charset="0"/>
+              </a:rPr>
               <a:t>When the client sends a connection request to a server, the server:</a:t>
             </a:r>
           </a:p>
           <a:p>
             <a:r>
-              <a:rPr lang="en-US" dirty="0"/>
+              <a:rPr lang="en-US" dirty="0">
+                <a:latin typeface="Aptos" panose="020B0004020202020204" pitchFamily="34" charset="0"/>
+              </a:rPr>
               <a:t>Accepts a TCP connection from a client (a browser).</a:t>
             </a:r>
           </a:p>
           <a:p>
             <a:r>
-              <a:rPr lang="en-US" dirty="0"/>
+              <a:rPr lang="en-US" dirty="0">
+                <a:latin typeface="Aptos" panose="020B0004020202020204" pitchFamily="34" charset="0"/>
+              </a:rPr>
               <a:t>Resolves the name of the Web page requested (some incoming paths may contain build-in shortcuts that need to be parsed, e.g., empty file names to be expanded to a default file name). </a:t>
             </a:r>
           </a:p>
           <a:p>
             <a:r>
-              <a:rPr lang="en-US" dirty="0"/>
+              <a:rPr lang="en-US" dirty="0">
+                <a:latin typeface="Aptos" panose="020B0004020202020204" pitchFamily="34" charset="0"/>
+              </a:rPr>
               <a:t>Performs access control on the Web page </a:t>
             </a:r>
             <a:r>
               <a:rPr lang="en-US" dirty="0">
+                <a:latin typeface="Aptos" panose="020B0004020202020204" pitchFamily="34" charset="0"/>
                 <a:sym typeface="Wingdings" panose="05000000000000000000" pitchFamily="2" charset="2"/>
               </a:rPr>
               <a:t></a:t>
             </a:r>
             <a:r>
-              <a:rPr lang="en-US" dirty="0"/>
+              <a:rPr lang="en-US" dirty="0">
+                <a:latin typeface="Aptos" panose="020B0004020202020204" pitchFamily="34" charset="0"/>
+              </a:rPr>
               <a:t> checking access restrictions for the requested page. </a:t>
             </a:r>
           </a:p>
           <a:p>
             <a:r>
-              <a:rPr lang="en-US" dirty="0"/>
+              <a:rPr lang="en-US" dirty="0">
+                <a:latin typeface="Aptos" panose="020B0004020202020204" pitchFamily="34" charset="0"/>
+              </a:rPr>
               <a:t>Fetches the requested page from disk or run a program to build it.</a:t>
             </a:r>
           </a:p>
           <a:p>
             <a:r>
-              <a:rPr lang="en-US" dirty="0"/>
+              <a:rPr lang="en-US" dirty="0">
+                <a:latin typeface="Aptos" panose="020B0004020202020204" pitchFamily="34" charset="0"/>
+              </a:rPr>
               <a:t>Returns the response to the client. </a:t>
             </a:r>
           </a:p>
           <a:p>
             <a:r>
-              <a:rPr lang="en-US" dirty="0"/>
+              <a:rPr lang="en-US" dirty="0">
+                <a:latin typeface="Aptos" panose="020B0004020202020204" pitchFamily="34" charset="0"/>
+              </a:rPr>
               <a:t>Makes an entry in the server log for administrative purposes. </a:t>
             </a:r>
           </a:p>
@@ -11701,12 +12434,16 @@
               <a:buNone/>
             </a:pPr>
             <a:r>
-              <a:rPr lang="en-US" dirty="0"/>
+              <a:rPr lang="en-US" dirty="0">
+                <a:latin typeface="Aptos" panose="020B0004020202020204" pitchFamily="34" charset="0"/>
+              </a:rPr>
               <a:t>To increase performance, a single TCP connection may be used by a client and server for multiple page fetches.</a:t>
             </a:r>
           </a:p>
           <a:p>
-            <a:endParaRPr lang="en-GB" dirty="0"/>
+            <a:endParaRPr lang="en-GB" dirty="0">
+              <a:latin typeface="Aptos" panose="020B0004020202020204" pitchFamily="34" charset="0"/>
+            </a:endParaRPr>
           </a:p>
         </p:txBody>
       </p:sp>
@@ -11726,10 +12463,14 @@
           <a:lstStyle/>
           <a:p>
             <a:fld id="{31DE2C5B-556E-47B8-A792-024C2FCA4ACC}" type="slidenum">
-              <a:rPr lang="en-GB" smtClean="0"/>
+              <a:rPr lang="en-GB" smtClean="0">
+                <a:latin typeface="Aptos" panose="020B0004020202020204" pitchFamily="34" charset="0"/>
+              </a:rPr>
               <a:t>29</a:t>
             </a:fld>
-            <a:endParaRPr lang="en-GB"/>
+            <a:endParaRPr lang="en-GB">
+              <a:latin typeface="Aptos" panose="020B0004020202020204" pitchFamily="34" charset="0"/>
+            </a:endParaRPr>
           </a:p>
         </p:txBody>
       </p:sp>
@@ -11779,26 +12520,38 @@
           <a:lstStyle/>
           <a:p>
             <a:r>
-              <a:rPr lang="it-IT" dirty="0" err="1"/>
+              <a:rPr lang="it-IT" dirty="0" err="1">
+                <a:latin typeface="Aptos" panose="020B0004020202020204" pitchFamily="34" charset="0"/>
+              </a:rPr>
               <a:t>Types</a:t>
             </a:r>
             <a:r>
-              <a:rPr lang="it-IT" dirty="0"/>
+              <a:rPr lang="it-IT" dirty="0">
+                <a:latin typeface="Aptos" panose="020B0004020202020204" pitchFamily="34" charset="0"/>
+              </a:rPr>
               <a:t> of computer networks by </a:t>
             </a:r>
             <a:r>
-              <a:rPr lang="it-IT" dirty="0" err="1"/>
+              <a:rPr lang="it-IT" dirty="0" err="1">
+                <a:latin typeface="Aptos" panose="020B0004020202020204" pitchFamily="34" charset="0"/>
+              </a:rPr>
               <a:t>their</a:t>
             </a:r>
             <a:r>
-              <a:rPr lang="it-IT" dirty="0"/>
+              <a:rPr lang="it-IT" dirty="0">
+                <a:latin typeface="Aptos" panose="020B0004020202020204" pitchFamily="34" charset="0"/>
+              </a:rPr>
               <a:t> </a:t>
             </a:r>
             <a:r>
-              <a:rPr lang="it-IT" dirty="0" err="1"/>
+              <a:rPr lang="it-IT" dirty="0" err="1">
+                <a:latin typeface="Aptos" panose="020B0004020202020204" pitchFamily="34" charset="0"/>
+              </a:rPr>
               <a:t>extention</a:t>
             </a:r>
-            <a:endParaRPr lang="en-GB" dirty="0"/>
+            <a:endParaRPr lang="en-GB" dirty="0">
+              <a:latin typeface="Aptos" panose="020B0004020202020204" pitchFamily="34" charset="0"/>
+            </a:endParaRPr>
           </a:p>
         </p:txBody>
       </p:sp>
@@ -11830,11 +12583,15 @@
               </a:spcAft>
             </a:pPr>
             <a:r>
-              <a:rPr lang="en-GB" sz="2200" b="1" dirty="0"/>
+              <a:rPr lang="en-GB" sz="2200" b="1" dirty="0">
+                <a:latin typeface="Aptos" panose="020B0004020202020204" pitchFamily="34" charset="0"/>
+              </a:rPr>
               <a:t>Personal Area Network (PAN)</a:t>
             </a:r>
             <a:r>
-              <a:rPr lang="en-GB" sz="2200" dirty="0"/>
+              <a:rPr lang="en-GB" sz="2200" dirty="0">
+                <a:latin typeface="Aptos" panose="020B0004020202020204" pitchFamily="34" charset="0"/>
+              </a:rPr>
               <a:t>: it lets devices communicate over the range of a person (e.g., short-range Bluetooth networks).</a:t>
             </a:r>
           </a:p>
@@ -11845,11 +12602,15 @@
               </a:spcAft>
             </a:pPr>
             <a:r>
-              <a:rPr lang="en-GB" sz="2200" b="1" dirty="0"/>
+              <a:rPr lang="en-GB" sz="2200" b="1" dirty="0">
+                <a:latin typeface="Aptos" panose="020B0004020202020204" pitchFamily="34" charset="0"/>
+              </a:rPr>
               <a:t>Local Area Network (LAN)</a:t>
             </a:r>
             <a:r>
-              <a:rPr lang="en-GB" sz="2200" dirty="0"/>
+              <a:rPr lang="en-GB" sz="2200" dirty="0">
+                <a:latin typeface="Aptos" panose="020B0004020202020204" pitchFamily="34" charset="0"/>
+              </a:rPr>
               <a:t>: a privately owned network that operates within and nearby a single building (e.g., the network of a company).</a:t>
             </a:r>
           </a:p>
@@ -11860,11 +12621,15 @@
               </a:spcAft>
             </a:pPr>
             <a:r>
-              <a:rPr lang="en-GB" sz="2200" b="1" dirty="0"/>
+              <a:rPr lang="en-GB" sz="2200" b="1" dirty="0">
+                <a:latin typeface="Aptos" panose="020B0004020202020204" pitchFamily="34" charset="0"/>
+              </a:rPr>
               <a:t>Metropolitan Area Network (MAN)</a:t>
             </a:r>
             <a:r>
-              <a:rPr lang="en-GB" sz="2200" dirty="0"/>
+              <a:rPr lang="en-GB" sz="2200" dirty="0">
+                <a:latin typeface="Aptos" panose="020B0004020202020204" pitchFamily="34" charset="0"/>
+              </a:rPr>
               <a:t>: it covers a city (e.g. cable television networks available in many cities with poor over-the-air television reception).</a:t>
             </a:r>
           </a:p>
@@ -11875,11 +12640,15 @@
               </a:spcAft>
             </a:pPr>
             <a:r>
-              <a:rPr lang="en-GB" sz="2200" b="1" dirty="0"/>
+              <a:rPr lang="en-GB" sz="2200" b="1" dirty="0">
+                <a:latin typeface="Aptos" panose="020B0004020202020204" pitchFamily="34" charset="0"/>
+              </a:rPr>
               <a:t>Wide Area Network (WAN)</a:t>
             </a:r>
             <a:r>
-              <a:rPr lang="en-GB" sz="2200" dirty="0"/>
+              <a:rPr lang="en-GB" sz="2200" dirty="0">
+                <a:latin typeface="Aptos" panose="020B0004020202020204" pitchFamily="34" charset="0"/>
+              </a:rPr>
               <a:t>: it spans a large geographical area, often a country or continent (e.g., a network of a company that has offices in different cities)</a:t>
             </a:r>
           </a:p>
@@ -11890,11 +12659,15 @@
               </a:spcAft>
             </a:pPr>
             <a:r>
-              <a:rPr lang="en-GB" sz="2200" b="1" dirty="0"/>
+              <a:rPr lang="en-GB" sz="2200" b="1" dirty="0">
+                <a:latin typeface="Aptos" panose="020B0004020202020204" pitchFamily="34" charset="0"/>
+              </a:rPr>
               <a:t>Internetworks (internet): </a:t>
             </a:r>
             <a:r>
-              <a:rPr lang="en-GB" sz="2200" dirty="0"/>
+              <a:rPr lang="en-GB" sz="2200" dirty="0">
+                <a:latin typeface="Aptos" panose="020B0004020202020204" pitchFamily="34" charset="0"/>
+              </a:rPr>
               <a:t>a collection of interconnected networks, in which devices of different networks can exchange messages regardless of their underling network hardware</a:t>
             </a:r>
           </a:p>
@@ -11905,11 +12678,15 @@
               </a:spcAft>
             </a:pPr>
             <a:r>
-              <a:rPr lang="en-GB" b="1" dirty="0"/>
+              <a:rPr lang="en-GB" b="1" dirty="0">
+                <a:latin typeface="Aptos" panose="020B0004020202020204" pitchFamily="34" charset="0"/>
+              </a:rPr>
               <a:t>Gateway</a:t>
             </a:r>
             <a:r>
-              <a:rPr lang="en-GB" dirty="0"/>
+              <a:rPr lang="en-GB" dirty="0">
+                <a:latin typeface="Aptos" panose="020B0004020202020204" pitchFamily="34" charset="0"/>
+              </a:rPr>
               <a:t>: a machine that makes a connection between two or more networks and provides the necessary translation, both in terms of hardware and software</a:t>
             </a:r>
           </a:p>
@@ -11920,70 +12697,106 @@
               </a:spcAft>
             </a:pPr>
             <a:r>
-              <a:rPr lang="it-IT" dirty="0"/>
+              <a:rPr lang="it-IT" dirty="0">
+                <a:latin typeface="Aptos" panose="020B0004020202020204" pitchFamily="34" charset="0"/>
+              </a:rPr>
               <a:t>The </a:t>
             </a:r>
             <a:r>
-              <a:rPr lang="it-IT" dirty="0" err="1"/>
+              <a:rPr lang="it-IT" dirty="0" err="1">
+                <a:latin typeface="Aptos" panose="020B0004020202020204" pitchFamily="34" charset="0"/>
+              </a:rPr>
               <a:t>worldwide</a:t>
             </a:r>
             <a:r>
-              <a:rPr lang="it-IT" dirty="0"/>
+              <a:rPr lang="it-IT" dirty="0">
+                <a:latin typeface="Aptos" panose="020B0004020202020204" pitchFamily="34" charset="0"/>
+              </a:rPr>
               <a:t> </a:t>
             </a:r>
             <a:r>
-              <a:rPr lang="it-IT" b="1" dirty="0"/>
+              <a:rPr lang="it-IT" b="1" dirty="0">
+                <a:latin typeface="Aptos" panose="020B0004020202020204" pitchFamily="34" charset="0"/>
+              </a:rPr>
               <a:t>Internet</a:t>
             </a:r>
             <a:r>
-              <a:rPr lang="it-IT" dirty="0"/>
+              <a:rPr lang="it-IT" dirty="0">
+                <a:latin typeface="Aptos" panose="020B0004020202020204" pitchFamily="34" charset="0"/>
+              </a:rPr>
               <a:t> (with capital I) </a:t>
             </a:r>
             <a:r>
-              <a:rPr lang="it-IT" dirty="0" err="1"/>
+              <a:rPr lang="it-IT" dirty="0" err="1">
+                <a:latin typeface="Aptos" panose="020B0004020202020204" pitchFamily="34" charset="0"/>
+              </a:rPr>
               <a:t>is</a:t>
             </a:r>
             <a:r>
-              <a:rPr lang="it-IT" dirty="0"/>
+              <a:rPr lang="it-IT" dirty="0">
+                <a:latin typeface="Aptos" panose="020B0004020202020204" pitchFamily="34" charset="0"/>
+              </a:rPr>
               <a:t> the </a:t>
             </a:r>
             <a:r>
-              <a:rPr lang="it-IT" dirty="0" err="1"/>
+              <a:rPr lang="it-IT" dirty="0" err="1">
+                <a:latin typeface="Aptos" panose="020B0004020202020204" pitchFamily="34" charset="0"/>
+              </a:rPr>
               <a:t>most</a:t>
             </a:r>
             <a:r>
-              <a:rPr lang="it-IT" dirty="0"/>
+              <a:rPr lang="it-IT" dirty="0">
+                <a:latin typeface="Aptos" panose="020B0004020202020204" pitchFamily="34" charset="0"/>
+              </a:rPr>
               <a:t> </a:t>
             </a:r>
             <a:r>
-              <a:rPr lang="it-IT" dirty="0" err="1"/>
+              <a:rPr lang="it-IT" dirty="0" err="1">
+                <a:latin typeface="Aptos" panose="020B0004020202020204" pitchFamily="34" charset="0"/>
+              </a:rPr>
               <a:t>popular</a:t>
             </a:r>
             <a:r>
-              <a:rPr lang="it-IT" dirty="0"/>
+              <a:rPr lang="it-IT" dirty="0">
+                <a:latin typeface="Aptos" panose="020B0004020202020204" pitchFamily="34" charset="0"/>
+              </a:rPr>
               <a:t> </a:t>
             </a:r>
             <a:r>
-              <a:rPr lang="it-IT" dirty="0" err="1"/>
+              <a:rPr lang="it-IT" dirty="0" err="1">
+                <a:latin typeface="Aptos" panose="020B0004020202020204" pitchFamily="34" charset="0"/>
+              </a:rPr>
               <a:t>example</a:t>
             </a:r>
             <a:r>
-              <a:rPr lang="it-IT" dirty="0"/>
+              <a:rPr lang="it-IT" dirty="0">
+                <a:latin typeface="Aptos" panose="020B0004020202020204" pitchFamily="34" charset="0"/>
+              </a:rPr>
               <a:t> of internet</a:t>
             </a:r>
-            <a:endParaRPr lang="en-GB" dirty="0"/>
-          </a:p>
-          <a:p>
-            <a:endParaRPr lang="it-IT" dirty="0"/>
-          </a:p>
-          <a:p>
-            <a:endParaRPr lang="en-GB" dirty="0"/>
-          </a:p>
-          <a:p>
-            <a:endParaRPr lang="en-GB" dirty="0"/>
-          </a:p>
-          <a:p>
-            <a:endParaRPr lang="it-IT" dirty="0"/>
+            <a:endParaRPr lang="en-GB" dirty="0">
+              <a:latin typeface="Aptos" panose="020B0004020202020204" pitchFamily="34" charset="0"/>
+            </a:endParaRPr>
+          </a:p>
+          <a:p>
+            <a:endParaRPr lang="it-IT" dirty="0">
+              <a:latin typeface="Aptos" panose="020B0004020202020204" pitchFamily="34" charset="0"/>
+            </a:endParaRPr>
+          </a:p>
+          <a:p>
+            <a:endParaRPr lang="en-GB" dirty="0">
+              <a:latin typeface="Aptos" panose="020B0004020202020204" pitchFamily="34" charset="0"/>
+            </a:endParaRPr>
+          </a:p>
+          <a:p>
+            <a:endParaRPr lang="en-GB" dirty="0">
+              <a:latin typeface="Aptos" panose="020B0004020202020204" pitchFamily="34" charset="0"/>
+            </a:endParaRPr>
+          </a:p>
+          <a:p>
+            <a:endParaRPr lang="it-IT" dirty="0">
+              <a:latin typeface="Aptos" panose="020B0004020202020204" pitchFamily="34" charset="0"/>
+            </a:endParaRPr>
           </a:p>
         </p:txBody>
       </p:sp>
@@ -12003,10 +12816,14 @@
           <a:lstStyle/>
           <a:p>
             <a:fld id="{31DE2C5B-556E-47B8-A792-024C2FCA4ACC}" type="slidenum">
-              <a:rPr lang="en-GB" smtClean="0"/>
+              <a:rPr lang="en-GB" smtClean="0">
+                <a:latin typeface="Aptos" panose="020B0004020202020204" pitchFamily="34" charset="0"/>
+              </a:rPr>
               <a:t>3</a:t>
             </a:fld>
-            <a:endParaRPr lang="en-GB" dirty="0"/>
+            <a:endParaRPr lang="en-GB" dirty="0">
+              <a:latin typeface="Aptos" panose="020B0004020202020204" pitchFamily="34" charset="0"/>
+            </a:endParaRPr>
           </a:p>
         </p:txBody>
       </p:sp>
@@ -12063,7 +12880,7 @@
                 <a:solidFill>
                   <a:schemeClr val="tx1"/>
                 </a:solidFill>
-                <a:latin typeface="Palatino Linotype" panose="02040502050505030304" pitchFamily="18" charset="0"/>
+                <a:latin typeface="Aptos" panose="020B0004020202020204" pitchFamily="34" charset="0"/>
               </a:rPr>
               <a:t>WAN</a:t>
             </a:r>
@@ -12123,7 +12940,7 @@
                 <a:solidFill>
                   <a:schemeClr val="tx1"/>
                 </a:solidFill>
-                <a:latin typeface="Palatino Linotype" panose="02040502050505030304" pitchFamily="18" charset="0"/>
+                <a:latin typeface="Aptos" panose="020B0004020202020204" pitchFamily="34" charset="0"/>
               </a:rPr>
               <a:t>MAN</a:t>
             </a:r>
@@ -12183,7 +13000,7 @@
                 <a:solidFill>
                   <a:schemeClr val="tx1"/>
                 </a:solidFill>
-                <a:latin typeface="Palatino Linotype" panose="02040502050505030304" pitchFamily="18" charset="0"/>
+                <a:latin typeface="Aptos" panose="020B0004020202020204" pitchFamily="34" charset="0"/>
               </a:rPr>
               <a:t>LAN</a:t>
             </a:r>
@@ -12243,7 +13060,7 @@
                 <a:solidFill>
                   <a:schemeClr val="tx1"/>
                 </a:solidFill>
-                <a:latin typeface="Palatino Linotype" panose="02040502050505030304" pitchFamily="18" charset="0"/>
+                <a:latin typeface="Aptos" panose="020B0004020202020204" pitchFamily="34" charset="0"/>
               </a:rPr>
               <a:t>PAN</a:t>
             </a:r>
@@ -12302,7 +13119,7 @@
                 <a:solidFill>
                   <a:schemeClr val="tx1"/>
                 </a:solidFill>
-                <a:latin typeface="Palatino Linotype" panose="02040502050505030304" pitchFamily="18" charset="0"/>
+                <a:latin typeface="Aptos" panose="020B0004020202020204" pitchFamily="34" charset="0"/>
               </a:rPr>
               <a:t>internet</a:t>
             </a:r>
@@ -12359,7 +13176,7 @@
                 <a:solidFill>
                   <a:schemeClr val="tx1"/>
                 </a:solidFill>
-                <a:latin typeface="Palatino Linotype" panose="02040502050505030304" pitchFamily="18" charset="0"/>
+                <a:latin typeface="Aptos" panose="020B0004020202020204" pitchFamily="34" charset="0"/>
               </a:rPr>
               <a:t>N1</a:t>
             </a:r>
@@ -12416,7 +13233,7 @@
                 <a:solidFill>
                   <a:schemeClr val="tx1"/>
                 </a:solidFill>
-                <a:latin typeface="Palatino Linotype" panose="02040502050505030304" pitchFamily="18" charset="0"/>
+                <a:latin typeface="Aptos" panose="020B0004020202020204" pitchFamily="34" charset="0"/>
               </a:rPr>
               <a:t>N2</a:t>
             </a:r>
@@ -12561,10 +13378,14 @@
           <a:lstStyle/>
           <a:p>
             <a:r>
-              <a:rPr lang="it-IT" dirty="0" err="1"/>
+              <a:rPr lang="it-IT" dirty="0" err="1">
+                <a:latin typeface="Aptos" panose="020B0004020202020204" pitchFamily="34" charset="0"/>
+              </a:rPr>
               <a:t>References</a:t>
             </a:r>
-            <a:endParaRPr lang="it-IT" dirty="0"/>
+            <a:endParaRPr lang="it-IT" dirty="0">
+              <a:latin typeface="Aptos" panose="020B0004020202020204" pitchFamily="34" charset="0"/>
+            </a:endParaRPr>
           </a:p>
         </p:txBody>
       </p:sp>
@@ -12590,67 +13411,97 @@
           <a:lstStyle/>
           <a:p>
             <a:r>
-              <a:rPr lang="it-IT" dirty="0" err="1"/>
+              <a:rPr lang="it-IT" dirty="0" err="1">
+                <a:latin typeface="Aptos" panose="020B0004020202020204" pitchFamily="34" charset="0"/>
+              </a:rPr>
               <a:t>Tanenbaum</a:t>
             </a:r>
             <a:r>
-              <a:rPr lang="it-IT" dirty="0"/>
+              <a:rPr lang="it-IT" dirty="0">
+                <a:latin typeface="Aptos" panose="020B0004020202020204" pitchFamily="34" charset="0"/>
+              </a:rPr>
               <a:t>, </a:t>
             </a:r>
             <a:r>
-              <a:rPr lang="it-IT" dirty="0" err="1"/>
+              <a:rPr lang="it-IT" dirty="0" err="1">
+                <a:latin typeface="Aptos" panose="020B0004020202020204" pitchFamily="34" charset="0"/>
+              </a:rPr>
               <a:t>Wetherall</a:t>
             </a:r>
             <a:r>
-              <a:rPr lang="it-IT" dirty="0"/>
+              <a:rPr lang="it-IT" dirty="0">
+                <a:latin typeface="Aptos" panose="020B0004020202020204" pitchFamily="34" charset="0"/>
+              </a:rPr>
               <a:t> – Computer Networks – Fifth Edition</a:t>
             </a:r>
           </a:p>
           <a:p>
             <a:pPr lvl="1"/>
             <a:r>
-              <a:rPr lang="it-IT" dirty="0" err="1"/>
+              <a:rPr lang="it-IT" dirty="0" err="1">
+                <a:latin typeface="Aptos" panose="020B0004020202020204" pitchFamily="34" charset="0"/>
+              </a:rPr>
               <a:t>Chapter</a:t>
             </a:r>
             <a:r>
-              <a:rPr lang="it-IT" dirty="0"/>
+              <a:rPr lang="it-IT" dirty="0">
+                <a:latin typeface="Aptos" panose="020B0004020202020204" pitchFamily="34" charset="0"/>
+              </a:rPr>
               <a:t> 1 – </a:t>
             </a:r>
             <a:r>
-              <a:rPr lang="it-IT" dirty="0" err="1"/>
+              <a:rPr lang="it-IT" dirty="0" err="1">
+                <a:latin typeface="Aptos" panose="020B0004020202020204" pitchFamily="34" charset="0"/>
+              </a:rPr>
               <a:t>Introduction</a:t>
             </a:r>
-            <a:endParaRPr lang="it-IT" dirty="0"/>
+            <a:endParaRPr lang="it-IT" dirty="0">
+              <a:latin typeface="Aptos" panose="020B0004020202020204" pitchFamily="34" charset="0"/>
+            </a:endParaRPr>
           </a:p>
           <a:p>
             <a:pPr lvl="1"/>
             <a:r>
-              <a:rPr lang="it-IT" dirty="0" err="1"/>
+              <a:rPr lang="it-IT" dirty="0" err="1">
+                <a:latin typeface="Aptos" panose="020B0004020202020204" pitchFamily="34" charset="0"/>
+              </a:rPr>
               <a:t>Chapter</a:t>
             </a:r>
             <a:r>
-              <a:rPr lang="it-IT" dirty="0"/>
+              <a:rPr lang="it-IT" dirty="0">
+                <a:latin typeface="Aptos" panose="020B0004020202020204" pitchFamily="34" charset="0"/>
+              </a:rPr>
               <a:t> 7 – The </a:t>
             </a:r>
             <a:r>
-              <a:rPr lang="it-IT" dirty="0" err="1"/>
+              <a:rPr lang="it-IT" dirty="0" err="1">
+                <a:latin typeface="Aptos" panose="020B0004020202020204" pitchFamily="34" charset="0"/>
+              </a:rPr>
               <a:t>application</a:t>
             </a:r>
             <a:r>
-              <a:rPr lang="it-IT" dirty="0"/>
+              <a:rPr lang="it-IT" dirty="0">
+                <a:latin typeface="Aptos" panose="020B0004020202020204" pitchFamily="34" charset="0"/>
+              </a:rPr>
               <a:t> </a:t>
             </a:r>
             <a:r>
-              <a:rPr lang="it-IT" dirty="0" err="1"/>
+              <a:rPr lang="it-IT" dirty="0" err="1">
+                <a:latin typeface="Aptos" panose="020B0004020202020204" pitchFamily="34" charset="0"/>
+              </a:rPr>
               <a:t>layer</a:t>
             </a:r>
             <a:r>
-              <a:rPr lang="it-IT" dirty="0"/>
+              <a:rPr lang="it-IT" dirty="0">
+                <a:latin typeface="Aptos" panose="020B0004020202020204" pitchFamily="34" charset="0"/>
+              </a:rPr>
               <a:t> </a:t>
             </a:r>
           </a:p>
           <a:p>
-            <a:endParaRPr lang="it-IT" dirty="0"/>
+            <a:endParaRPr lang="it-IT" dirty="0">
+              <a:latin typeface="Aptos" panose="020B0004020202020204" pitchFamily="34" charset="0"/>
+            </a:endParaRPr>
           </a:p>
         </p:txBody>
       </p:sp>
@@ -12676,10 +13527,14 @@
           <a:lstStyle/>
           <a:p>
             <a:fld id="{31DE2C5B-556E-47B8-A792-024C2FCA4ACC}" type="slidenum">
-              <a:rPr lang="en-GB" smtClean="0"/>
+              <a:rPr lang="en-GB" smtClean="0">
+                <a:latin typeface="Aptos" panose="020B0004020202020204" pitchFamily="34" charset="0"/>
+              </a:rPr>
               <a:t>30</a:t>
             </a:fld>
-            <a:endParaRPr lang="en-GB"/>
+            <a:endParaRPr lang="en-GB">
+              <a:latin typeface="Aptos" panose="020B0004020202020204" pitchFamily="34" charset="0"/>
+            </a:endParaRPr>
           </a:p>
         </p:txBody>
       </p:sp>
@@ -12729,14 +13584,20 @@
           <a:lstStyle/>
           <a:p>
             <a:r>
-              <a:rPr lang="it-IT" dirty="0" err="1"/>
+              <a:rPr lang="it-IT" dirty="0" err="1">
+                <a:latin typeface="Aptos" panose="020B0004020202020204" pitchFamily="34" charset="0"/>
+              </a:rPr>
               <a:t>Client-server</a:t>
             </a:r>
             <a:r>
-              <a:rPr lang="it-IT" dirty="0"/>
+              <a:rPr lang="it-IT" dirty="0">
+                <a:latin typeface="Aptos" panose="020B0004020202020204" pitchFamily="34" charset="0"/>
+              </a:rPr>
               <a:t> model</a:t>
             </a:r>
-            <a:endParaRPr lang="en-GB" dirty="0"/>
+            <a:endParaRPr lang="en-GB" dirty="0">
+              <a:latin typeface="Aptos" panose="020B0004020202020204" pitchFamily="34" charset="0"/>
+            </a:endParaRPr>
           </a:p>
         </p:txBody>
       </p:sp>
@@ -12756,22 +13617,30 @@
           <a:lstStyle/>
           <a:p>
             <a:r>
-              <a:rPr lang="en-GB" b="1" dirty="0"/>
+              <a:rPr lang="en-GB" b="1" dirty="0">
+                <a:latin typeface="Aptos" panose="020B0004020202020204" pitchFamily="34" charset="0"/>
+              </a:rPr>
               <a:t>Client-server model: </a:t>
             </a:r>
             <a:r>
-              <a:rPr lang="en-GB" dirty="0"/>
+              <a:rPr lang="en-GB" dirty="0">
+                <a:latin typeface="Aptos" panose="020B0004020202020204" pitchFamily="34" charset="0"/>
+              </a:rPr>
               <a:t>a network structure that partitions tasks between the providers of a resource or service, called servers, and service requesters, called clients.</a:t>
             </a:r>
           </a:p>
           <a:p>
             <a:r>
-              <a:rPr lang="en-GB" dirty="0"/>
+              <a:rPr lang="en-GB" dirty="0">
+                <a:latin typeface="Aptos" panose="020B0004020202020204" pitchFamily="34" charset="0"/>
+              </a:rPr>
               <a:t>The server is often designed to operate as a centralized system that serves many clients. The computing power, memory and storage requirements of a server must be scaled appropriately to the expected workload. </a:t>
             </a:r>
           </a:p>
           <a:p>
-            <a:endParaRPr lang="en-GB" dirty="0"/>
+            <a:endParaRPr lang="en-GB" dirty="0">
+              <a:latin typeface="Aptos" panose="020B0004020202020204" pitchFamily="34" charset="0"/>
+            </a:endParaRPr>
           </a:p>
         </p:txBody>
       </p:sp>
@@ -12791,10 +13660,14 @@
           <a:lstStyle/>
           <a:p>
             <a:fld id="{31DE2C5B-556E-47B8-A792-024C2FCA4ACC}" type="slidenum">
-              <a:rPr lang="en-GB" smtClean="0"/>
+              <a:rPr lang="en-GB" smtClean="0">
+                <a:latin typeface="Aptos" panose="020B0004020202020204" pitchFamily="34" charset="0"/>
+              </a:rPr>
               <a:t>4</a:t>
             </a:fld>
-            <a:endParaRPr lang="en-GB"/>
+            <a:endParaRPr lang="en-GB">
+              <a:latin typeface="Aptos" panose="020B0004020202020204" pitchFamily="34" charset="0"/>
+            </a:endParaRPr>
           </a:p>
         </p:txBody>
       </p:sp>
@@ -12874,10 +13747,14 @@
           <a:lstStyle/>
           <a:p>
             <a:r>
-              <a:rPr lang="it-IT" dirty="0"/>
+              <a:rPr lang="it-IT" dirty="0">
+                <a:latin typeface="Aptos" panose="020B0004020202020204" pitchFamily="34" charset="0"/>
+              </a:rPr>
               <a:t>Peer-to-peer model</a:t>
             </a:r>
-            <a:endParaRPr lang="en-GB" dirty="0"/>
+            <a:endParaRPr lang="en-GB" dirty="0">
+              <a:latin typeface="Aptos" panose="020B0004020202020204" pitchFamily="34" charset="0"/>
+            </a:endParaRPr>
           </a:p>
         </p:txBody>
       </p:sp>
@@ -12897,23 +13774,31 @@
           <a:lstStyle/>
           <a:p>
             <a:r>
-              <a:rPr lang="en-GB" b="1" dirty="0"/>
+              <a:rPr lang="en-GB" b="1" dirty="0">
+                <a:latin typeface="Aptos" panose="020B0004020202020204" pitchFamily="34" charset="0"/>
+              </a:rPr>
               <a:t>Peer-to-peer model: </a:t>
             </a:r>
             <a:r>
-              <a:rPr lang="en-GB" dirty="0"/>
+              <a:rPr lang="en-GB" dirty="0">
+                <a:latin typeface="Aptos" panose="020B0004020202020204" pitchFamily="34" charset="0"/>
+              </a:rPr>
               <a:t>a network structure that partitions tasks or workloads between peers. Peers are equally privileged, equipotent participants in the application.</a:t>
             </a:r>
           </a:p>
           <a:p>
             <a:r>
-              <a:rPr lang="en-GB" dirty="0"/>
+              <a:rPr lang="en-GB" dirty="0">
+                <a:latin typeface="Aptos" panose="020B0004020202020204" pitchFamily="34" charset="0"/>
+              </a:rPr>
               <a:t>Every hosts can communicate with one or more other hosts.</a:t>
             </a:r>
           </a:p>
           <a:p>
             <a:r>
-              <a:rPr lang="en-GB" dirty="0"/>
+              <a:rPr lang="en-GB" dirty="0">
+                <a:latin typeface="Aptos" panose="020B0004020202020204" pitchFamily="34" charset="0"/>
+              </a:rPr>
               <a:t>No fixed division into clients and servers (they are all peers).</a:t>
             </a:r>
           </a:p>
@@ -12935,10 +13820,14 @@
           <a:lstStyle/>
           <a:p>
             <a:fld id="{31DE2C5B-556E-47B8-A792-024C2FCA4ACC}" type="slidenum">
-              <a:rPr lang="en-GB" smtClean="0"/>
+              <a:rPr lang="en-GB" smtClean="0">
+                <a:latin typeface="Aptos" panose="020B0004020202020204" pitchFamily="34" charset="0"/>
+              </a:rPr>
               <a:t>5</a:t>
             </a:fld>
-            <a:endParaRPr lang="en-GB"/>
+            <a:endParaRPr lang="en-GB">
+              <a:latin typeface="Aptos" panose="020B0004020202020204" pitchFamily="34" charset="0"/>
+            </a:endParaRPr>
           </a:p>
         </p:txBody>
       </p:sp>
@@ -13018,22 +13907,32 @@
           <a:lstStyle/>
           <a:p>
             <a:r>
-              <a:rPr lang="it-IT" dirty="0"/>
+              <a:rPr lang="it-IT" dirty="0">
+                <a:latin typeface="Aptos" panose="020B0004020202020204" pitchFamily="34" charset="0"/>
+              </a:rPr>
               <a:t>Network software: </a:t>
             </a:r>
             <a:r>
-              <a:rPr lang="it-IT" dirty="0" err="1"/>
+              <a:rPr lang="it-IT" dirty="0" err="1">
+                <a:latin typeface="Aptos" panose="020B0004020202020204" pitchFamily="34" charset="0"/>
+              </a:rPr>
               <a:t>protocol</a:t>
             </a:r>
             <a:r>
-              <a:rPr lang="it-IT" dirty="0"/>
+              <a:rPr lang="it-IT" dirty="0">
+                <a:latin typeface="Aptos" panose="020B0004020202020204" pitchFamily="34" charset="0"/>
+              </a:rPr>
               <a:t> </a:t>
             </a:r>
             <a:r>
-              <a:rPr lang="it-IT" dirty="0" err="1"/>
+              <a:rPr lang="it-IT" dirty="0" err="1">
+                <a:latin typeface="Aptos" panose="020B0004020202020204" pitchFamily="34" charset="0"/>
+              </a:rPr>
               <a:t>hierarchies</a:t>
             </a:r>
-            <a:endParaRPr lang="en-GB" dirty="0"/>
+            <a:endParaRPr lang="en-GB" dirty="0">
+              <a:latin typeface="Aptos" panose="020B0004020202020204" pitchFamily="34" charset="0"/>
+            </a:endParaRPr>
           </a:p>
         </p:txBody>
       </p:sp>
@@ -13060,29 +13959,41 @@
           <a:lstStyle/>
           <a:p>
             <a:r>
-              <a:rPr lang="en-GB" dirty="0"/>
+              <a:rPr lang="en-GB" dirty="0">
+                <a:latin typeface="Aptos" panose="020B0004020202020204" pitchFamily="34" charset="0"/>
+              </a:rPr>
               <a:t>To reduce their design complexity, most networks are organized as a stack of </a:t>
             </a:r>
             <a:r>
-              <a:rPr lang="en-GB" b="1" dirty="0"/>
+              <a:rPr lang="en-GB" b="1" dirty="0">
+                <a:latin typeface="Aptos" panose="020B0004020202020204" pitchFamily="34" charset="0"/>
+              </a:rPr>
               <a:t>layers </a:t>
             </a:r>
             <a:r>
-              <a:rPr lang="en-GB" dirty="0"/>
+              <a:rPr lang="en-GB" dirty="0">
+                <a:latin typeface="Aptos" panose="020B0004020202020204" pitchFamily="34" charset="0"/>
+              </a:rPr>
               <a:t>or </a:t>
             </a:r>
             <a:r>
-              <a:rPr lang="en-GB" b="1" dirty="0"/>
+              <a:rPr lang="en-GB" b="1" dirty="0">
+                <a:latin typeface="Aptos" panose="020B0004020202020204" pitchFamily="34" charset="0"/>
+              </a:rPr>
               <a:t>levels</a:t>
             </a:r>
             <a:r>
-              <a:rPr lang="en-GB" dirty="0"/>
+              <a:rPr lang="en-GB" dirty="0">
+                <a:latin typeface="Aptos" panose="020B0004020202020204" pitchFamily="34" charset="0"/>
+              </a:rPr>
               <a:t>, each one built upon the one below it.</a:t>
             </a:r>
           </a:p>
           <a:p>
             <a:r>
-              <a:rPr lang="en-GB" dirty="0"/>
+              <a:rPr lang="en-GB" dirty="0">
+                <a:latin typeface="Aptos" panose="020B0004020202020204" pitchFamily="34" charset="0"/>
+              </a:rPr>
               <a:t>The purpose of each layer is to offer certain services to the higher layers while shielding those layers from the details of how the offered services are actually implemented.</a:t>
             </a:r>
           </a:p>
@@ -13134,10 +14045,14 @@
           <a:lstStyle/>
           <a:p>
             <a:fld id="{31DE2C5B-556E-47B8-A792-024C2FCA4ACC}" type="slidenum">
-              <a:rPr lang="en-GB" smtClean="0"/>
+              <a:rPr lang="en-GB" smtClean="0">
+                <a:latin typeface="Aptos" panose="020B0004020202020204" pitchFamily="34" charset="0"/>
+              </a:rPr>
               <a:t>6</a:t>
             </a:fld>
-            <a:endParaRPr lang="en-GB"/>
+            <a:endParaRPr lang="en-GB">
+              <a:latin typeface="Aptos" panose="020B0004020202020204" pitchFamily="34" charset="0"/>
+            </a:endParaRPr>
           </a:p>
         </p:txBody>
       </p:sp>
@@ -13187,22 +14102,32 @@
           <a:lstStyle/>
           <a:p>
             <a:r>
-              <a:rPr lang="it-IT" dirty="0"/>
+              <a:rPr lang="it-IT" dirty="0">
+                <a:latin typeface="Aptos" panose="020B0004020202020204" pitchFamily="34" charset="0"/>
+              </a:rPr>
               <a:t>Network software: </a:t>
             </a:r>
             <a:r>
-              <a:rPr lang="it-IT" dirty="0" err="1"/>
+              <a:rPr lang="it-IT" dirty="0" err="1">
+                <a:latin typeface="Aptos" panose="020B0004020202020204" pitchFamily="34" charset="0"/>
+              </a:rPr>
               <a:t>protocol</a:t>
             </a:r>
             <a:r>
-              <a:rPr lang="it-IT" dirty="0"/>
+              <a:rPr lang="it-IT" dirty="0">
+                <a:latin typeface="Aptos" panose="020B0004020202020204" pitchFamily="34" charset="0"/>
+              </a:rPr>
               <a:t> </a:t>
             </a:r>
             <a:r>
-              <a:rPr lang="it-IT" dirty="0" err="1"/>
+              <a:rPr lang="it-IT" dirty="0" err="1">
+                <a:latin typeface="Aptos" panose="020B0004020202020204" pitchFamily="34" charset="0"/>
+              </a:rPr>
               <a:t>hierarchies</a:t>
             </a:r>
-            <a:endParaRPr lang="en-GB" dirty="0"/>
+            <a:endParaRPr lang="en-GB" dirty="0">
+              <a:latin typeface="Aptos" panose="020B0004020202020204" pitchFamily="34" charset="0"/>
+            </a:endParaRPr>
           </a:p>
         </p:txBody>
       </p:sp>
@@ -13229,42 +14154,60 @@
           <a:lstStyle/>
           <a:p>
             <a:r>
-              <a:rPr lang="en-GB" dirty="0"/>
+              <a:rPr lang="en-GB" dirty="0">
+                <a:latin typeface="Aptos" panose="020B0004020202020204" pitchFamily="34" charset="0"/>
+              </a:rPr>
               <a:t>Two entities of the same layer on different machines are called </a:t>
             </a:r>
             <a:r>
-              <a:rPr lang="en-GB" b="1" dirty="0"/>
+              <a:rPr lang="en-GB" b="1" dirty="0">
+                <a:latin typeface="Aptos" panose="020B0004020202020204" pitchFamily="34" charset="0"/>
+              </a:rPr>
               <a:t>peers.</a:t>
             </a:r>
-            <a:endParaRPr lang="en-GB" dirty="0"/>
-          </a:p>
-          <a:p>
-            <a:r>
-              <a:rPr lang="en-GB" dirty="0"/>
+            <a:endParaRPr lang="en-GB" dirty="0">
+              <a:latin typeface="Aptos" panose="020B0004020202020204" pitchFamily="34" charset="0"/>
+            </a:endParaRPr>
+          </a:p>
+          <a:p>
+            <a:r>
+              <a:rPr lang="en-GB" dirty="0">
+                <a:latin typeface="Aptos" panose="020B0004020202020204" pitchFamily="34" charset="0"/>
+              </a:rPr>
               <a:t>When two peers of layer n communicate, the rules and conventions used in this conversation constitute the layer n protocol.</a:t>
             </a:r>
           </a:p>
           <a:p>
             <a:r>
-              <a:rPr lang="en-GB" b="1" dirty="0"/>
+              <a:rPr lang="en-GB" b="1" dirty="0">
+                <a:latin typeface="Aptos" panose="020B0004020202020204" pitchFamily="34" charset="0"/>
+              </a:rPr>
               <a:t>Protocol: </a:t>
             </a:r>
             <a:r>
-              <a:rPr lang="en-GB" dirty="0"/>
+              <a:rPr lang="en-GB" dirty="0">
+                <a:latin typeface="Aptos" panose="020B0004020202020204" pitchFamily="34" charset="0"/>
+              </a:rPr>
               <a:t>agreement between the communicating parties on how communication is to proceed.</a:t>
             </a:r>
           </a:p>
           <a:p>
             <a:r>
-              <a:rPr lang="en-GB" dirty="0"/>
+              <a:rPr lang="en-GB" dirty="0">
+                <a:latin typeface="Aptos" panose="020B0004020202020204" pitchFamily="34" charset="0"/>
+              </a:rPr>
               <a:t>Layers and protocols form the </a:t>
             </a:r>
             <a:r>
-              <a:rPr lang="en-GB" b="1" dirty="0"/>
+              <a:rPr lang="en-GB" b="1" dirty="0">
+                <a:latin typeface="Aptos" panose="020B0004020202020204" pitchFamily="34" charset="0"/>
+              </a:rPr>
               <a:t>network architecture</a:t>
             </a:r>
             <a:r>
-              <a:rPr lang="en-GB" dirty="0"/>
+              <a:rPr lang="en-GB" dirty="0">
+                <a:latin typeface="Aptos" panose="020B0004020202020204" pitchFamily="34" charset="0"/>
+              </a:rPr>
               <a:t>.</a:t>
             </a:r>
           </a:p>
@@ -13350,6 +14293,7 @@
               <a:solidFill>
                 <a:schemeClr val="tx1"/>
               </a:solidFill>
+              <a:latin typeface="Aptos" panose="020B0004020202020204" pitchFamily="34" charset="0"/>
             </a:endParaRPr>
           </a:p>
         </p:txBody>
@@ -13370,10 +14314,14 @@
           <a:lstStyle/>
           <a:p>
             <a:fld id="{31DE2C5B-556E-47B8-A792-024C2FCA4ACC}" type="slidenum">
-              <a:rPr lang="en-GB" smtClean="0"/>
+              <a:rPr lang="en-GB" smtClean="0">
+                <a:latin typeface="Aptos" panose="020B0004020202020204" pitchFamily="34" charset="0"/>
+              </a:rPr>
               <a:t>7</a:t>
             </a:fld>
-            <a:endParaRPr lang="en-GB"/>
+            <a:endParaRPr lang="en-GB">
+              <a:latin typeface="Aptos" panose="020B0004020202020204" pitchFamily="34" charset="0"/>
+            </a:endParaRPr>
           </a:p>
         </p:txBody>
       </p:sp>
@@ -13423,22 +14371,32 @@
           <a:lstStyle/>
           <a:p>
             <a:r>
-              <a:rPr lang="it-IT" dirty="0"/>
+              <a:rPr lang="it-IT" dirty="0">
+                <a:latin typeface="Aptos" panose="020B0004020202020204" pitchFamily="34" charset="0"/>
+              </a:rPr>
               <a:t>Network software: </a:t>
             </a:r>
             <a:r>
-              <a:rPr lang="it-IT" dirty="0" err="1"/>
+              <a:rPr lang="it-IT" dirty="0" err="1">
+                <a:latin typeface="Aptos" panose="020B0004020202020204" pitchFamily="34" charset="0"/>
+              </a:rPr>
               <a:t>protocol</a:t>
             </a:r>
             <a:r>
-              <a:rPr lang="it-IT" dirty="0"/>
+              <a:rPr lang="it-IT" dirty="0">
+                <a:latin typeface="Aptos" panose="020B0004020202020204" pitchFamily="34" charset="0"/>
+              </a:rPr>
               <a:t> </a:t>
             </a:r>
             <a:r>
-              <a:rPr lang="it-IT" dirty="0" err="1"/>
+              <a:rPr lang="it-IT" dirty="0" err="1">
+                <a:latin typeface="Aptos" panose="020B0004020202020204" pitchFamily="34" charset="0"/>
+              </a:rPr>
               <a:t>hierarchies</a:t>
             </a:r>
-            <a:endParaRPr lang="en-GB" dirty="0"/>
+            <a:endParaRPr lang="en-GB" dirty="0">
+              <a:latin typeface="Aptos" panose="020B0004020202020204" pitchFamily="34" charset="0"/>
+            </a:endParaRPr>
           </a:p>
         </p:txBody>
       </p:sp>
@@ -13465,57 +14423,81 @@
           <a:lstStyle/>
           <a:p>
             <a:r>
-              <a:rPr lang="en-GB" dirty="0"/>
+              <a:rPr lang="en-GB" dirty="0">
+                <a:latin typeface="Aptos" panose="020B0004020202020204" pitchFamily="34" charset="0"/>
+              </a:rPr>
               <a:t>In reality, no data are directly transferred from layer </a:t>
             </a:r>
             <a:r>
-              <a:rPr lang="en-GB" i="1" dirty="0"/>
+              <a:rPr lang="en-GB" i="1" dirty="0">
+                <a:latin typeface="Aptos" panose="020B0004020202020204" pitchFamily="34" charset="0"/>
+              </a:rPr>
               <a:t>n </a:t>
             </a:r>
             <a:r>
-              <a:rPr lang="en-GB" dirty="0"/>
+              <a:rPr lang="en-GB" dirty="0">
+                <a:latin typeface="Aptos" panose="020B0004020202020204" pitchFamily="34" charset="0"/>
+              </a:rPr>
               <a:t>on one machine to layer </a:t>
             </a:r>
             <a:r>
-              <a:rPr lang="en-GB" i="1" dirty="0"/>
+              <a:rPr lang="en-GB" i="1" dirty="0">
+                <a:latin typeface="Aptos" panose="020B0004020202020204" pitchFamily="34" charset="0"/>
+              </a:rPr>
               <a:t>n </a:t>
             </a:r>
             <a:r>
-              <a:rPr lang="en-GB" dirty="0"/>
+              <a:rPr lang="en-GB" dirty="0">
+                <a:latin typeface="Aptos" panose="020B0004020202020204" pitchFamily="34" charset="0"/>
+              </a:rPr>
               <a:t>on another machine.</a:t>
             </a:r>
           </a:p>
           <a:p>
             <a:r>
-              <a:rPr lang="en-GB" dirty="0"/>
+              <a:rPr lang="en-GB" dirty="0">
+                <a:latin typeface="Aptos" panose="020B0004020202020204" pitchFamily="34" charset="0"/>
+              </a:rPr>
               <a:t>Each layer passes data to the layer immediately below it, until the lowest layer is reached. </a:t>
             </a:r>
           </a:p>
           <a:p>
             <a:r>
-              <a:rPr lang="en-GB" dirty="0"/>
+              <a:rPr lang="en-GB" dirty="0">
+                <a:latin typeface="Aptos" panose="020B0004020202020204" pitchFamily="34" charset="0"/>
+              </a:rPr>
               <a:t>Layer 1 passes data to the </a:t>
             </a:r>
             <a:r>
-              <a:rPr lang="en-GB" b="1" dirty="0"/>
+              <a:rPr lang="en-GB" b="1" dirty="0">
+                <a:latin typeface="Aptos" panose="020B0004020202020204" pitchFamily="34" charset="0"/>
+              </a:rPr>
               <a:t>physical medium </a:t>
             </a:r>
             <a:r>
-              <a:rPr lang="en-GB" dirty="0"/>
+              <a:rPr lang="en-GB" dirty="0">
+                <a:latin typeface="Aptos" panose="020B0004020202020204" pitchFamily="34" charset="0"/>
+              </a:rPr>
               <a:t>through which actual communication occurs.</a:t>
             </a:r>
           </a:p>
           <a:p>
             <a:r>
-              <a:rPr lang="en-GB" dirty="0"/>
+              <a:rPr lang="en-GB" dirty="0">
+                <a:latin typeface="Aptos" panose="020B0004020202020204" pitchFamily="34" charset="0"/>
+              </a:rPr>
               <a:t>An </a:t>
             </a:r>
             <a:r>
-              <a:rPr lang="en-GB" b="1" dirty="0"/>
+              <a:rPr lang="en-GB" b="1" dirty="0">
+                <a:latin typeface="Aptos" panose="020B0004020202020204" pitchFamily="34" charset="0"/>
+              </a:rPr>
               <a:t>interface</a:t>
             </a:r>
             <a:r>
-              <a:rPr lang="en-GB" dirty="0"/>
+              <a:rPr lang="en-GB" dirty="0">
+                <a:latin typeface="Aptos" panose="020B0004020202020204" pitchFamily="34" charset="0"/>
+              </a:rPr>
               <a:t> between each pair of adjacent layers defines which primitive operations and services the lower layer makes available to the upper one.</a:t>
             </a:r>
           </a:p>
@@ -13601,6 +14583,7 @@
               <a:solidFill>
                 <a:schemeClr val="tx1"/>
               </a:solidFill>
+              <a:latin typeface="Aptos" panose="020B0004020202020204" pitchFamily="34" charset="0"/>
             </a:endParaRPr>
           </a:p>
         </p:txBody>
@@ -13650,18 +14633,26 @@
           <a:p>
             <a:pPr algn="ctr"/>
             <a:r>
-              <a:rPr lang="it-IT" dirty="0" err="1"/>
+              <a:rPr lang="it-IT" dirty="0" err="1">
+                <a:latin typeface="Aptos" panose="020B0004020202020204" pitchFamily="34" charset="0"/>
+              </a:rPr>
               <a:t>Physical</a:t>
             </a:r>
             <a:r>
-              <a:rPr lang="it-IT" dirty="0"/>
+              <a:rPr lang="it-IT" dirty="0">
+                <a:latin typeface="Aptos" panose="020B0004020202020204" pitchFamily="34" charset="0"/>
+              </a:rPr>
               <a:t> </a:t>
             </a:r>
             <a:r>
-              <a:rPr lang="it-IT" dirty="0" err="1"/>
+              <a:rPr lang="it-IT" dirty="0" err="1">
+                <a:latin typeface="Aptos" panose="020B0004020202020204" pitchFamily="34" charset="0"/>
+              </a:rPr>
               <a:t>communication</a:t>
             </a:r>
-            <a:endParaRPr lang="en-GB" dirty="0"/>
+            <a:endParaRPr lang="en-GB" dirty="0">
+              <a:latin typeface="Aptos" panose="020B0004020202020204" pitchFamily="34" charset="0"/>
+            </a:endParaRPr>
           </a:p>
         </p:txBody>
       </p:sp>
@@ -13715,6 +14706,7 @@
               <a:solidFill>
                 <a:schemeClr val="tx1"/>
               </a:solidFill>
+              <a:latin typeface="Aptos" panose="020B0004020202020204" pitchFamily="34" charset="0"/>
             </a:endParaRPr>
           </a:p>
         </p:txBody>
@@ -13764,14 +14756,20 @@
           <a:p>
             <a:pPr algn="ctr"/>
             <a:r>
-              <a:rPr lang="it-IT" dirty="0"/>
+              <a:rPr lang="it-IT" dirty="0">
+                <a:latin typeface="Aptos" panose="020B0004020202020204" pitchFamily="34" charset="0"/>
+              </a:rPr>
               <a:t>Virtual </a:t>
             </a:r>
             <a:r>
-              <a:rPr lang="it-IT" dirty="0" err="1"/>
+              <a:rPr lang="it-IT" dirty="0" err="1">
+                <a:latin typeface="Aptos" panose="020B0004020202020204" pitchFamily="34" charset="0"/>
+              </a:rPr>
               <a:t>communication</a:t>
             </a:r>
-            <a:endParaRPr lang="en-GB" dirty="0"/>
+            <a:endParaRPr lang="en-GB" dirty="0">
+              <a:latin typeface="Aptos" panose="020B0004020202020204" pitchFamily="34" charset="0"/>
+            </a:endParaRPr>
           </a:p>
         </p:txBody>
       </p:sp>
@@ -13863,10 +14861,14 @@
           <a:lstStyle/>
           <a:p>
             <a:fld id="{31DE2C5B-556E-47B8-A792-024C2FCA4ACC}" type="slidenum">
-              <a:rPr lang="en-GB" smtClean="0"/>
+              <a:rPr lang="en-GB" smtClean="0">
+                <a:latin typeface="Aptos" panose="020B0004020202020204" pitchFamily="34" charset="0"/>
+              </a:rPr>
               <a:t>8</a:t>
             </a:fld>
-            <a:endParaRPr lang="en-GB"/>
+            <a:endParaRPr lang="en-GB">
+              <a:latin typeface="Aptos" panose="020B0004020202020204" pitchFamily="34" charset="0"/>
+            </a:endParaRPr>
           </a:p>
         </p:txBody>
       </p:sp>
@@ -13916,18 +14918,26 @@
           <a:lstStyle/>
           <a:p>
             <a:r>
-              <a:rPr lang="it-IT" dirty="0" err="1"/>
+              <a:rPr lang="it-IT" dirty="0" err="1">
+                <a:latin typeface="Aptos" panose="020B0004020202020204" pitchFamily="34" charset="0"/>
+              </a:rPr>
               <a:t>Example</a:t>
             </a:r>
             <a:r>
-              <a:rPr lang="it-IT" dirty="0"/>
+              <a:rPr lang="it-IT" dirty="0">
+                <a:latin typeface="Aptos" panose="020B0004020202020204" pitchFamily="34" charset="0"/>
+              </a:rPr>
               <a:t> of network </a:t>
             </a:r>
             <a:r>
-              <a:rPr lang="it-IT" dirty="0" err="1"/>
+              <a:rPr lang="it-IT" dirty="0" err="1">
+                <a:latin typeface="Aptos" panose="020B0004020202020204" pitchFamily="34" charset="0"/>
+              </a:rPr>
               <a:t>architecture</a:t>
             </a:r>
-            <a:endParaRPr lang="en-GB" dirty="0"/>
+            <a:endParaRPr lang="en-GB" dirty="0">
+              <a:latin typeface="Aptos" panose="020B0004020202020204" pitchFamily="34" charset="0"/>
+            </a:endParaRPr>
           </a:p>
         </p:txBody>
       </p:sp>
@@ -13947,10 +14957,14 @@
           <a:lstStyle/>
           <a:p>
             <a:fld id="{31DE2C5B-556E-47B8-A792-024C2FCA4ACC}" type="slidenum">
-              <a:rPr lang="en-GB" smtClean="0"/>
+              <a:rPr lang="en-GB" smtClean="0">
+                <a:latin typeface="Aptos" panose="020B0004020202020204" pitchFamily="34" charset="0"/>
+              </a:rPr>
               <a:t>9</a:t>
             </a:fld>
-            <a:endParaRPr lang="en-GB" dirty="0"/>
+            <a:endParaRPr lang="en-GB" dirty="0">
+              <a:latin typeface="Aptos" panose="020B0004020202020204" pitchFamily="34" charset="0"/>
+            </a:endParaRPr>
           </a:p>
         </p:txBody>
       </p:sp>
@@ -13993,14 +15007,14 @@
           <p:nvPr>
             <p:extLst>
               <p:ext uri="{D42A27DB-BD31-4B8C-83A1-F6EECF244321}">
-                <p14:modId xmlns:p14="http://schemas.microsoft.com/office/powerpoint/2010/main" val="1180388250"/>
+                <p14:modId xmlns:p14="http://schemas.microsoft.com/office/powerpoint/2010/main" val="2184364381"/>
               </p:ext>
             </p:extLst>
           </p:nvPr>
         </p:nvGraphicFramePr>
         <p:xfrm>
           <a:off x="271068" y="1361167"/>
-          <a:ext cx="3330413" cy="5029200"/>
+          <a:ext cx="3330413" cy="4754880"/>
         </p:xfrm>
         <a:graphic>
           <a:graphicData uri="http://schemas.openxmlformats.org/drawingml/2006/table">
@@ -14025,18 +15039,18 @@
                     <a:p>
                       <a:r>
                         <a:rPr lang="en-US" b="0" noProof="0" dirty="0">
-                          <a:latin typeface="Palatino Linotype" panose="02040502050505030304" pitchFamily="18" charset="0"/>
+                          <a:latin typeface="Aptos" panose="020B0004020202020204" pitchFamily="34" charset="0"/>
                         </a:rPr>
                         <a:t>A message M is produced</a:t>
                       </a:r>
                       <a:r>
                         <a:rPr lang="en-US" b="0" baseline="0" noProof="0" dirty="0">
-                          <a:latin typeface="Palatino Linotype" panose="02040502050505030304" pitchFamily="18" charset="0"/>
+                          <a:latin typeface="Aptos" panose="020B0004020202020204" pitchFamily="34" charset="0"/>
                         </a:rPr>
                         <a:t> by an application running on layer 5 and given to layer 4 for transmission.</a:t>
                       </a:r>
                       <a:endParaRPr lang="en-US" b="0" noProof="0" dirty="0">
-                        <a:latin typeface="Palatino Linotype" panose="02040502050505030304" pitchFamily="18" charset="0"/>
+                        <a:latin typeface="Aptos" panose="020B0004020202020204" pitchFamily="34" charset="0"/>
                       </a:endParaRPr>
                     </a:p>
                   </a:txBody>
@@ -14056,25 +15070,25 @@
                     <a:p>
                       <a:r>
                         <a:rPr lang="en-US" b="0" noProof="0" dirty="0">
-                          <a:latin typeface="Palatino Linotype" panose="02040502050505030304" pitchFamily="18" charset="0"/>
+                          <a:latin typeface="Aptos" panose="020B0004020202020204" pitchFamily="34" charset="0"/>
                         </a:rPr>
                         <a:t>Layer 4 puts a header (e.g. address)</a:t>
                       </a:r>
                       <a:r>
                         <a:rPr lang="en-US" b="0" baseline="0" noProof="0" dirty="0">
-                          <a:latin typeface="Palatino Linotype" panose="02040502050505030304" pitchFamily="18" charset="0"/>
+                          <a:latin typeface="Aptos" panose="020B0004020202020204" pitchFamily="34" charset="0"/>
                         </a:rPr>
                         <a:t> </a:t>
                       </a:r>
                       <a:r>
                         <a:rPr lang="en-US" b="0" noProof="0" dirty="0">
-                          <a:latin typeface="Palatino Linotype" panose="02040502050505030304" pitchFamily="18" charset="0"/>
+                          <a:latin typeface="Aptos" panose="020B0004020202020204" pitchFamily="34" charset="0"/>
                         </a:rPr>
                         <a:t>in front</a:t>
                       </a:r>
                       <a:r>
                         <a:rPr lang="en-US" b="0" baseline="0" noProof="0" dirty="0">
-                          <a:latin typeface="Palatino Linotype" panose="02040502050505030304" pitchFamily="18" charset="0"/>
+                          <a:latin typeface="Aptos" panose="020B0004020202020204" pitchFamily="34" charset="0"/>
                         </a:rPr>
                         <a:t> of M to identify it and then pass it to layer 3.</a:t>
                       </a:r>
@@ -14096,18 +15110,18 @@
                     <a:p>
                       <a:r>
                         <a:rPr lang="en-US" b="0" noProof="0" dirty="0">
-                          <a:latin typeface="Palatino Linotype" panose="02040502050505030304" pitchFamily="18" charset="0"/>
+                          <a:latin typeface="Aptos" panose="020B0004020202020204" pitchFamily="34" charset="0"/>
                         </a:rPr>
                         <a:t>Layer 3 breaks</a:t>
                       </a:r>
                       <a:r>
                         <a:rPr lang="en-US" b="0" baseline="0" noProof="0" dirty="0">
-                          <a:latin typeface="Palatino Linotype" panose="02040502050505030304" pitchFamily="18" charset="0"/>
+                          <a:latin typeface="Aptos" panose="020B0004020202020204" pitchFamily="34" charset="0"/>
                         </a:rPr>
                         <a:t> M into smaller packets (M1 and M2) and add headers to each packet which are passed to layer 2.</a:t>
                       </a:r>
                       <a:endParaRPr lang="en-US" b="0" noProof="0" dirty="0">
-                        <a:latin typeface="Palatino Linotype" panose="02040502050505030304" pitchFamily="18" charset="0"/>
+                        <a:latin typeface="Aptos" panose="020B0004020202020204" pitchFamily="34" charset="0"/>
                       </a:endParaRPr>
                     </a:p>
                   </a:txBody>
@@ -14127,18 +15141,18 @@
                     <a:p>
                       <a:r>
                         <a:rPr lang="en-US" b="0" noProof="0" dirty="0">
-                          <a:latin typeface="Palatino Linotype" panose="02040502050505030304" pitchFamily="18" charset="0"/>
+                          <a:latin typeface="Aptos" panose="020B0004020202020204" pitchFamily="34" charset="0"/>
                         </a:rPr>
                         <a:t>Layer 2 adds</a:t>
                       </a:r>
                       <a:r>
                         <a:rPr lang="en-US" b="0" baseline="0" noProof="0" dirty="0">
-                          <a:latin typeface="Palatino Linotype" panose="02040502050505030304" pitchFamily="18" charset="0"/>
+                          <a:latin typeface="Aptos" panose="020B0004020202020204" pitchFamily="34" charset="0"/>
                         </a:rPr>
                         <a:t> a header and a trailer to each packet and then pass them to layer 1 for physical transmission to the destination machine. </a:t>
                       </a:r>
                       <a:endParaRPr lang="en-US" b="0" noProof="0" dirty="0">
-                        <a:latin typeface="Palatino Linotype" panose="02040502050505030304" pitchFamily="18" charset="0"/>
+                        <a:latin typeface="Aptos" panose="020B0004020202020204" pitchFamily="34" charset="0"/>
                       </a:endParaRPr>
                     </a:p>
                   </a:txBody>
@@ -14186,30 +15200,30 @@
             <a:pPr algn="ctr"/>
             <a:r>
               <a:rPr lang="en-GB" dirty="0">
-                <a:latin typeface="Palatino Linotype" panose="02040502050505030304" pitchFamily="18" charset="0"/>
+                <a:latin typeface="Aptos" panose="020B0004020202020204" pitchFamily="34" charset="0"/>
               </a:rPr>
               <a:t>None of the headers for layers below </a:t>
             </a:r>
             <a:r>
               <a:rPr lang="en-GB" i="1" dirty="0">
-                <a:latin typeface="Palatino Linotype" panose="02040502050505030304" pitchFamily="18" charset="0"/>
+                <a:latin typeface="Aptos" panose="020B0004020202020204" pitchFamily="34" charset="0"/>
               </a:rPr>
               <a:t>n </a:t>
             </a:r>
             <a:r>
               <a:rPr lang="en-GB" dirty="0">
-                <a:latin typeface="Palatino Linotype" panose="02040502050505030304" pitchFamily="18" charset="0"/>
+                <a:latin typeface="Aptos" panose="020B0004020202020204" pitchFamily="34" charset="0"/>
               </a:rPr>
               <a:t>are passed up to layer </a:t>
             </a:r>
             <a:r>
               <a:rPr lang="en-GB" i="1" dirty="0">
-                <a:latin typeface="Palatino Linotype" panose="02040502050505030304" pitchFamily="18" charset="0"/>
+                <a:latin typeface="Aptos" panose="020B0004020202020204" pitchFamily="34" charset="0"/>
               </a:rPr>
               <a:t>n.</a:t>
             </a:r>
             <a:endParaRPr lang="en-GB" dirty="0">
-              <a:latin typeface="Palatino Linotype" panose="02040502050505030304" pitchFamily="18" charset="0"/>
+              <a:latin typeface="Aptos" panose="020B0004020202020204" pitchFamily="34" charset="0"/>
             </a:endParaRPr>
           </a:p>
         </p:txBody>

--- a/theory_04-fundamentals_of_computer_networks/theory_04-fundamentals_of_computer_networks.pptx
+++ b/theory_04-fundamentals_of_computer_networks/theory_04-fundamentals_of_computer_networks.pptx
@@ -140,6 +140,9 @@
     <p:ext uri="{EFAFB233-063F-42B5-8137-9DF3F51BA10A}">
       <p15:sldGuideLst xmlns:p15="http://schemas.microsoft.com/office/powerpoint/2012/main"/>
     </p:ext>
+    <p:ext uri="{2D200454-40CA-4A62-9FC3-DE9A4176ACB9}">
+      <p15:notesGuideLst xmlns:p15="http://schemas.microsoft.com/office/powerpoint/2012/main"/>
+    </p:ext>
   </p:extLst>
 </p:presentation>
 </file>
@@ -226,7 +229,7 @@
           <a:p>
             <a:fld id="{B6FBD0CA-8F9C-4380-8AFD-600A0D90DFDA}" type="datetimeFigureOut">
               <a:rPr lang="en-GB" smtClean="0"/>
-              <a:t>10/03/2025</a:t>
+              <a:t>11/03/2025</a:t>
             </a:fld>
             <a:endParaRPr lang="en-GB"/>
           </a:p>
@@ -2924,14 +2927,20 @@
           <a:lstStyle/>
           <a:p>
             <a:r>
-              <a:rPr lang="it-IT" dirty="0"/>
+              <a:rPr lang="it-IT" dirty="0">
+                <a:latin typeface="Aptos" panose="020B0004020202020204" pitchFamily="34" charset="0"/>
+              </a:rPr>
               <a:t>Services and </a:t>
             </a:r>
             <a:r>
-              <a:rPr lang="it-IT" dirty="0" err="1"/>
+              <a:rPr lang="it-IT" dirty="0" err="1">
+                <a:latin typeface="Aptos" panose="020B0004020202020204" pitchFamily="34" charset="0"/>
+              </a:rPr>
               <a:t>primitives</a:t>
             </a:r>
-            <a:endParaRPr lang="en-GB" dirty="0"/>
+            <a:endParaRPr lang="en-GB" dirty="0">
+              <a:latin typeface="Aptos" panose="020B0004020202020204" pitchFamily="34" charset="0"/>
+            </a:endParaRPr>
           </a:p>
         </p:txBody>
       </p:sp>
